--- a/docs/Progress_Presentation.pptx
+++ b/docs/Progress_Presentation.pptx
@@ -6,17 +6,21 @@
   </p:sldMasterIdLst>
   <p:sldIdLst>
     <p:sldId id="256" r:id="rId2"/>
-    <p:sldId id="257" r:id="rId3"/>
-    <p:sldId id="258" r:id="rId4"/>
-    <p:sldId id="259" r:id="rId5"/>
-    <p:sldId id="260" r:id="rId6"/>
-    <p:sldId id="261" r:id="rId7"/>
-    <p:sldId id="262" r:id="rId8"/>
-    <p:sldId id="263" r:id="rId9"/>
-    <p:sldId id="264" r:id="rId10"/>
-    <p:sldId id="265" r:id="rId11"/>
-    <p:sldId id="266" r:id="rId12"/>
-    <p:sldId id="267" r:id="rId13"/>
+    <p:sldId id="271" r:id="rId3"/>
+    <p:sldId id="282" r:id="rId4"/>
+    <p:sldId id="283" r:id="rId5"/>
+    <p:sldId id="284" r:id="rId6"/>
+    <p:sldId id="285" r:id="rId7"/>
+    <p:sldId id="286" r:id="rId8"/>
+    <p:sldId id="287" r:id="rId9"/>
+    <p:sldId id="288" r:id="rId10"/>
+    <p:sldId id="289" r:id="rId11"/>
+    <p:sldId id="290" r:id="rId12"/>
+    <p:sldId id="291" r:id="rId13"/>
+    <p:sldId id="292" r:id="rId14"/>
+    <p:sldId id="293" r:id="rId15"/>
+    <p:sldId id="294" r:id="rId16"/>
+    <p:sldId id="295" r:id="rId17"/>
   </p:sldIdLst>
   <p:sldSz cx="12192000" cy="6858000"/>
   <p:notesSz cx="6858000" cy="9144000"/>
@@ -3350,8 +3354,8 @@
         </p:nvSpPr>
         <p:spPr>
           <a:xfrm>
-            <a:off x="1761744" y="1101852"/>
-            <a:ext cx="8470392" cy="4654296"/>
+            <a:off x="1761744" y="694944"/>
+            <a:ext cx="9247632" cy="5061204"/>
           </a:xfrm>
         </p:spPr>
         <p:txBody>
@@ -3361,131 +3365,143 @@
           <a:lstStyle/>
           <a:p>
             <a:r>
-              <a:rPr lang="en-US" sz="2000" b="1" i="0" u="none" strike="noStrike" baseline="0" dirty="0">
+              <a:rPr lang="en-US" b="1" i="0" u="none" strike="noStrike" baseline="0" dirty="0">
                 <a:latin typeface="TimesNewRomanPS-BoldMT"/>
+                <a:cs typeface="+mj-cs"/>
               </a:rPr>
               <a:t>Classification of objects at a very low resolution</a:t>
             </a:r>
             <a:br>
-              <a:rPr lang="en-US" sz="2000" b="1" i="0" u="none" strike="noStrike" baseline="0" dirty="0">
+              <a:rPr lang="en-US" b="1" i="0" u="none" strike="noStrike" baseline="0" dirty="0">
                 <a:latin typeface="TimesNewRomanPS-BoldMT"/>
+                <a:cs typeface="+mj-cs"/>
               </a:rPr>
             </a:br>
-            <a:endParaRPr lang="en-US" sz="2000" b="1" i="0" u="none" strike="noStrike" baseline="0" dirty="0">
+            <a:endParaRPr lang="en-US" b="1" i="0" u="none" strike="noStrike" baseline="0" dirty="0">
               <a:latin typeface="TimesNewRomanPS-BoldMT"/>
+              <a:cs typeface="+mj-cs"/>
             </a:endParaRPr>
           </a:p>
           <a:p>
             <a:r>
-              <a:rPr lang="en-US" sz="2000" b="0" i="0" u="none" strike="noStrike" baseline="0" dirty="0">
+              <a:rPr lang="en-US" b="0" i="0" u="none" strike="noStrike" baseline="0" dirty="0">
                 <a:latin typeface="TimesNewRomanPSMT"/>
+                <a:cs typeface="+mj-cs"/>
               </a:rPr>
               <a:t>Project number: s-2026-045 / p-2026-061</a:t>
             </a:r>
             <a:br>
-              <a:rPr lang="en-US" sz="2000" b="0" i="0" u="none" strike="noStrike" baseline="0" dirty="0">
+              <a:rPr lang="en-US" b="0" i="0" u="none" strike="noStrike" baseline="0" dirty="0">
                 <a:latin typeface="TimesNewRomanPSMT"/>
-              </a:rPr>
-            </a:br>
-            <a:r>
-              <a:rPr lang="en-US" sz="2000" b="0" i="0" u="none" strike="noStrike" baseline="0" dirty="0">
-                <a:latin typeface="TimesNewRomanPSMT"/>
-              </a:rPr>
-              <a:t> </a:t>
-            </a:r>
-            <a:br>
-              <a:rPr lang="en-US" sz="2000" b="0" i="0" u="none" strike="noStrike" baseline="0" dirty="0">
-                <a:latin typeface="TimesNewRomanPSMT"/>
+                <a:cs typeface="+mj-cs"/>
               </a:rPr>
             </a:br>
             <a:br>
-              <a:rPr lang="en-US" sz="2000" b="0" i="0" u="none" strike="noStrike" baseline="0" dirty="0">
+              <a:rPr lang="en-US" b="0" i="0" u="none" strike="noStrike" baseline="0" dirty="0">
                 <a:latin typeface="TimesNewRomanPSMT"/>
+                <a:cs typeface="+mj-cs"/>
               </a:rPr>
             </a:br>
             <a:r>
-              <a:rPr lang="en-US" sz="2000" b="0" i="0" u="none" strike="noStrike" baseline="0" dirty="0">
+              <a:rPr lang="en-US" b="0" i="0" u="none" strike="noStrike" baseline="0" dirty="0">
                 <a:latin typeface="TimesNewRomanPSMT"/>
+                <a:cs typeface="+mj-cs"/>
               </a:rPr>
               <a:t>Students: Dotan Ann Hanna 211542311, Bahat Itamar 205805856</a:t>
             </a:r>
             <a:br>
-              <a:rPr lang="en-US" sz="2000" b="0" i="0" u="none" strike="noStrike" baseline="0" dirty="0">
+              <a:rPr lang="en-US" b="0" i="0" u="none" strike="noStrike" baseline="0" dirty="0">
                 <a:latin typeface="TimesNewRomanPSMT"/>
+                <a:cs typeface="+mj-cs"/>
               </a:rPr>
             </a:br>
-            <a:endParaRPr lang="en-US" sz="2000" b="0" i="0" u="none" strike="noStrike" baseline="0" dirty="0">
+            <a:endParaRPr lang="en-US" b="0" i="0" u="none" strike="noStrike" baseline="0" dirty="0">
               <a:latin typeface="TimesNewRomanPSMT"/>
+              <a:cs typeface="+mj-cs"/>
             </a:endParaRPr>
           </a:p>
           <a:p>
             <a:r>
-              <a:rPr lang="en-US" sz="2000" b="0" i="1" u="none" strike="noStrike" baseline="0" dirty="0">
+              <a:rPr lang="en-US" b="0" i="1" u="none" strike="noStrike" baseline="0" dirty="0">
                 <a:latin typeface="TimesNewRomanPS-ItalicMT"/>
+                <a:cs typeface="+mj-cs"/>
               </a:rPr>
               <a:t>Emails: anndo@post.bgu.ac.il, bahit@post.bgu.ac.il </a:t>
             </a:r>
             <a:br>
-              <a:rPr lang="en-US" sz="2000" b="0" i="1" u="none" strike="noStrike" baseline="0" dirty="0">
+              <a:rPr lang="en-US" b="0" i="1" u="none" strike="noStrike" baseline="0" dirty="0">
                 <a:latin typeface="TimesNewRomanPS-ItalicMT"/>
+                <a:cs typeface="+mj-cs"/>
               </a:rPr>
             </a:br>
             <a:br>
-              <a:rPr lang="en-US" sz="2000" b="0" i="1" u="none" strike="noStrike" baseline="0" dirty="0">
+              <a:rPr lang="en-US" b="0" i="1" u="none" strike="noStrike" baseline="0" dirty="0">
                 <a:latin typeface="TimesNewRomanPS-ItalicMT"/>
+                <a:cs typeface="+mj-cs"/>
               </a:rPr>
             </a:br>
             <a:r>
-              <a:rPr lang="en-US" sz="2000" b="0" i="0" u="none" strike="noStrike" baseline="0" dirty="0">
+              <a:rPr lang="en-US" b="0" i="0" u="none" strike="noStrike" baseline="0" dirty="0">
                 <a:latin typeface="TimesNewRomanPSMT"/>
+                <a:cs typeface="+mj-cs"/>
               </a:rPr>
               <a:t>Supervisors: </a:t>
             </a:r>
             <a:r>
-              <a:rPr lang="en-US" sz="2000" b="0" i="0" u="none" strike="noStrike" baseline="0" dirty="0" err="1">
+              <a:rPr lang="en-US" b="0" i="0" u="none" strike="noStrike" baseline="0" dirty="0" err="1">
                 <a:latin typeface="TimesNewRomanPSMT"/>
+                <a:cs typeface="+mj-cs"/>
               </a:rPr>
               <a:t>Yitzhaky</a:t>
             </a:r>
             <a:r>
-              <a:rPr lang="en-US" sz="2000" b="0" i="0" u="none" strike="noStrike" baseline="0" dirty="0">
+              <a:rPr lang="en-US" b="0" i="0" u="none" strike="noStrike" baseline="0" dirty="0">
                 <a:latin typeface="TimesNewRomanPSMT"/>
+                <a:cs typeface="+mj-cs"/>
               </a:rPr>
               <a:t> Yitzhak, Lerner Rinat </a:t>
             </a:r>
             <a:br>
-              <a:rPr lang="en-US" sz="2000" b="0" i="0" u="none" strike="noStrike" baseline="0" dirty="0">
+              <a:rPr lang="en-US" b="0" i="0" u="none" strike="noStrike" baseline="0" dirty="0">
                 <a:latin typeface="TimesNewRomanPSMT"/>
+                <a:cs typeface="+mj-cs"/>
               </a:rPr>
             </a:br>
             <a:br>
-              <a:rPr lang="en-US" sz="2000" b="0" i="0" u="none" strike="noStrike" baseline="0" dirty="0">
+              <a:rPr lang="en-US" b="0" i="0" u="none" strike="noStrike" baseline="0" dirty="0">
                 <a:latin typeface="TimesNewRomanPSMT"/>
+                <a:cs typeface="+mj-cs"/>
               </a:rPr>
             </a:br>
             <a:r>
-              <a:rPr lang="en-US" sz="2000" b="0" i="0" u="none" strike="noStrike" baseline="0" dirty="0">
+              <a:rPr lang="en-US" b="0" i="0" u="none" strike="noStrike" baseline="0" dirty="0">
                 <a:latin typeface="TimesNewRomanPSMT"/>
+                <a:cs typeface="+mj-cs"/>
               </a:rPr>
               <a:t>Progress Presentation</a:t>
             </a:r>
             <a:br>
-              <a:rPr lang="en-US" sz="2000" b="0" i="0" u="none" strike="noStrike" baseline="0" dirty="0">
+              <a:rPr lang="en-US" b="0" i="0" u="none" strike="noStrike" baseline="0" dirty="0">
                 <a:latin typeface="TimesNewRomanPSMT"/>
+                <a:cs typeface="+mj-cs"/>
               </a:rPr>
             </a:br>
             <a:br>
-              <a:rPr lang="en-US" sz="2000" b="0" i="0" u="none" strike="noStrike" baseline="0" dirty="0">
+              <a:rPr lang="en-US" b="0" i="0" u="none" strike="noStrike" baseline="0" dirty="0">
                 <a:latin typeface="TimesNewRomanPSMT"/>
+                <a:cs typeface="+mj-cs"/>
               </a:rPr>
             </a:br>
             <a:r>
-              <a:rPr lang="en-US" sz="2000" b="0" i="0" u="none" strike="noStrike" baseline="0" dirty="0">
+              <a:rPr lang="en-US" b="0" i="0" u="none" strike="noStrike" baseline="0" dirty="0">
                 <a:latin typeface="TimesNewRomanPSMT"/>
+                <a:cs typeface="+mj-cs"/>
               </a:rPr>
               <a:t>March 2026</a:t>
             </a:r>
-            <a:endParaRPr lang="he-IL" sz="2000" dirty="0"/>
+            <a:endParaRPr lang="he-IL" dirty="0">
+              <a:cs typeface="+mj-cs"/>
+            </a:endParaRPr>
           </a:p>
         </p:txBody>
       </p:sp>
@@ -3540,7 +3556,7 @@
         <p:cNvPr id="1" name="">
           <a:extLst>
             <a:ext uri="{FF2B5EF4-FFF2-40B4-BE49-F238E27FC236}">
-              <a16:creationId xmlns:a16="http://schemas.microsoft.com/office/drawing/2014/main" id="{C39681E4-BE15-D065-2F9F-EB5873E02D84}"/>
+              <a16:creationId xmlns:a16="http://schemas.microsoft.com/office/drawing/2014/main" id="{5FCD643E-4D79-59BC-2E0F-DB0D57DBF61E}"/>
             </a:ext>
           </a:extLst>
         </p:cNvPr>
@@ -3560,7 +3576,7 @@
           <p:cNvPr id="7" name="כותרת משנה 6">
             <a:extLst>
               <a:ext uri="{FF2B5EF4-FFF2-40B4-BE49-F238E27FC236}">
-                <a16:creationId xmlns:a16="http://schemas.microsoft.com/office/drawing/2014/main" id="{460E0DA8-FF01-89EF-D4B6-ACE539ADF73A}"/>
+                <a16:creationId xmlns:a16="http://schemas.microsoft.com/office/drawing/2014/main" id="{92E4C109-86CF-42AC-1A96-6F756D2D3E8C}"/>
               </a:ext>
             </a:extLst>
           </p:cNvPr>
@@ -3571,19 +3587,274 @@
             <p:ph type="subTitle" idx="1"/>
           </p:nvPr>
         </p:nvSpPr>
-        <p:spPr/>
+        <p:spPr>
+          <a:xfrm>
+            <a:off x="2100072" y="428644"/>
+            <a:ext cx="8598408" cy="411480"/>
+          </a:xfrm>
+        </p:spPr>
         <p:txBody>
-          <a:bodyPr/>
+          <a:bodyPr>
+            <a:normAutofit lnSpcReduction="10000"/>
+          </a:bodyPr>
           <a:lstStyle/>
           <a:p>
-            <a:endParaRPr lang="he-IL" dirty="0"/>
+            <a:r>
+              <a:rPr lang="en-US" b="1" dirty="0">
+                <a:latin typeface="Times New Roman" panose="02020603050405020304" pitchFamily="18" charset="0"/>
+                <a:cs typeface="Times New Roman" panose="02020603050405020304" pitchFamily="18" charset="0"/>
+              </a:rPr>
+              <a:t>Initial Experimental Results</a:t>
+            </a:r>
+            <a:endParaRPr lang="he-IL" b="1" dirty="0">
+              <a:latin typeface="Times New Roman" panose="02020603050405020304" pitchFamily="18" charset="0"/>
+              <a:cs typeface="Times New Roman" panose="02020603050405020304" pitchFamily="18" charset="0"/>
+            </a:endParaRPr>
+          </a:p>
+        </p:txBody>
+      </p:sp>
+      <p:pic>
+        <p:nvPicPr>
+          <p:cNvPr id="5" name="תמונה 4">
+            <a:extLst>
+              <a:ext uri="{FF2B5EF4-FFF2-40B4-BE49-F238E27FC236}">
+                <a16:creationId xmlns:a16="http://schemas.microsoft.com/office/drawing/2014/main" id="{D4835771-5226-C0D5-5C77-A41D5B852C92}"/>
+              </a:ext>
+            </a:extLst>
+          </p:cNvPr>
+          <p:cNvPicPr>
+            <a:picLocks noChangeAspect="1"/>
+          </p:cNvPicPr>
+          <p:nvPr/>
+        </p:nvPicPr>
+        <p:blipFill>
+          <a:blip r:embed="rId2">
+            <a:extLst>
+              <a:ext uri="{28A0092B-C50C-407E-A947-70E740481C1C}">
+                <a14:useLocalDpi xmlns:a14="http://schemas.microsoft.com/office/drawing/2010/main" val="0"/>
+              </a:ext>
+            </a:extLst>
+          </a:blip>
+          <a:stretch>
+            <a:fillRect/>
+          </a:stretch>
+        </p:blipFill>
+        <p:spPr>
+          <a:xfrm>
+            <a:off x="2587672" y="1026181"/>
+            <a:ext cx="7016656" cy="4209994"/>
+          </a:xfrm>
+          <a:prstGeom prst="rect">
+            <a:avLst/>
+          </a:prstGeom>
+        </p:spPr>
+      </p:pic>
+      <p:sp>
+        <p:nvSpPr>
+          <p:cNvPr id="9" name="כותרת משנה 6">
+            <a:extLst>
+              <a:ext uri="{FF2B5EF4-FFF2-40B4-BE49-F238E27FC236}">
+                <a16:creationId xmlns:a16="http://schemas.microsoft.com/office/drawing/2014/main" id="{6777D87D-9347-7968-A530-4CD074433470}"/>
+              </a:ext>
+            </a:extLst>
+          </p:cNvPr>
+          <p:cNvSpPr txBox="1">
+            <a:spLocks/>
+          </p:cNvSpPr>
+          <p:nvPr/>
+        </p:nvSpPr>
+        <p:spPr>
+          <a:xfrm>
+            <a:off x="1371600" y="5627972"/>
+            <a:ext cx="9802368" cy="1019716"/>
+          </a:xfrm>
+          <a:prstGeom prst="rect">
+            <a:avLst/>
+          </a:prstGeom>
+        </p:spPr>
+        <p:txBody>
+          <a:bodyPr vert="horz" lIns="91440" tIns="45720" rIns="91440" bIns="45720" rtlCol="1">
+            <a:normAutofit/>
+          </a:bodyPr>
+          <a:lstStyle>
+            <a:lvl1pPr marL="0" indent="0" algn="ctr" defTabSz="914400" rtl="1" eaLnBrk="1" latinLnBrk="0" hangingPunct="1">
+              <a:lnSpc>
+                <a:spcPct val="90000"/>
+              </a:lnSpc>
+              <a:spcBef>
+                <a:spcPts val="1000"/>
+              </a:spcBef>
+              <a:buFont typeface="Arial" panose="020B0604020202020204" pitchFamily="34" charset="0"/>
+              <a:buNone/>
+              <a:defRPr sz="2400" kern="1200">
+                <a:solidFill>
+                  <a:schemeClr val="tx1"/>
+                </a:solidFill>
+                <a:latin typeface="+mn-lt"/>
+                <a:ea typeface="+mn-ea"/>
+                <a:cs typeface="+mn-cs"/>
+              </a:defRPr>
+            </a:lvl1pPr>
+            <a:lvl2pPr marL="457200" indent="0" algn="ctr" defTabSz="914400" rtl="1" eaLnBrk="1" latinLnBrk="0" hangingPunct="1">
+              <a:lnSpc>
+                <a:spcPct val="90000"/>
+              </a:lnSpc>
+              <a:spcBef>
+                <a:spcPts val="500"/>
+              </a:spcBef>
+              <a:buFont typeface="Arial" panose="020B0604020202020204" pitchFamily="34" charset="0"/>
+              <a:buNone/>
+              <a:defRPr sz="2000" kern="1200">
+                <a:solidFill>
+                  <a:schemeClr val="tx1"/>
+                </a:solidFill>
+                <a:latin typeface="+mn-lt"/>
+                <a:ea typeface="+mn-ea"/>
+                <a:cs typeface="+mn-cs"/>
+              </a:defRPr>
+            </a:lvl2pPr>
+            <a:lvl3pPr marL="914400" indent="0" algn="ctr" defTabSz="914400" rtl="1" eaLnBrk="1" latinLnBrk="0" hangingPunct="1">
+              <a:lnSpc>
+                <a:spcPct val="90000"/>
+              </a:lnSpc>
+              <a:spcBef>
+                <a:spcPts val="500"/>
+              </a:spcBef>
+              <a:buFont typeface="Arial" panose="020B0604020202020204" pitchFamily="34" charset="0"/>
+              <a:buNone/>
+              <a:defRPr sz="1800" kern="1200">
+                <a:solidFill>
+                  <a:schemeClr val="tx1"/>
+                </a:solidFill>
+                <a:latin typeface="+mn-lt"/>
+                <a:ea typeface="+mn-ea"/>
+                <a:cs typeface="+mn-cs"/>
+              </a:defRPr>
+            </a:lvl3pPr>
+            <a:lvl4pPr marL="1371600" indent="0" algn="ctr" defTabSz="914400" rtl="1" eaLnBrk="1" latinLnBrk="0" hangingPunct="1">
+              <a:lnSpc>
+                <a:spcPct val="90000"/>
+              </a:lnSpc>
+              <a:spcBef>
+                <a:spcPts val="500"/>
+              </a:spcBef>
+              <a:buFont typeface="Arial" panose="020B0604020202020204" pitchFamily="34" charset="0"/>
+              <a:buNone/>
+              <a:defRPr sz="1600" kern="1200">
+                <a:solidFill>
+                  <a:schemeClr val="tx1"/>
+                </a:solidFill>
+                <a:latin typeface="+mn-lt"/>
+                <a:ea typeface="+mn-ea"/>
+                <a:cs typeface="+mn-cs"/>
+              </a:defRPr>
+            </a:lvl4pPr>
+            <a:lvl5pPr marL="1828800" indent="0" algn="ctr" defTabSz="914400" rtl="1" eaLnBrk="1" latinLnBrk="0" hangingPunct="1">
+              <a:lnSpc>
+                <a:spcPct val="90000"/>
+              </a:lnSpc>
+              <a:spcBef>
+                <a:spcPts val="500"/>
+              </a:spcBef>
+              <a:buFont typeface="Arial" panose="020B0604020202020204" pitchFamily="34" charset="0"/>
+              <a:buNone/>
+              <a:defRPr sz="1600" kern="1200">
+                <a:solidFill>
+                  <a:schemeClr val="tx1"/>
+                </a:solidFill>
+                <a:latin typeface="+mn-lt"/>
+                <a:ea typeface="+mn-ea"/>
+                <a:cs typeface="+mn-cs"/>
+              </a:defRPr>
+            </a:lvl5pPr>
+            <a:lvl6pPr marL="2286000" indent="0" algn="ctr" defTabSz="914400" rtl="1" eaLnBrk="1" latinLnBrk="0" hangingPunct="1">
+              <a:lnSpc>
+                <a:spcPct val="90000"/>
+              </a:lnSpc>
+              <a:spcBef>
+                <a:spcPts val="500"/>
+              </a:spcBef>
+              <a:buFont typeface="Arial" panose="020B0604020202020204" pitchFamily="34" charset="0"/>
+              <a:buNone/>
+              <a:defRPr sz="1600" kern="1200">
+                <a:solidFill>
+                  <a:schemeClr val="tx1"/>
+                </a:solidFill>
+                <a:latin typeface="+mn-lt"/>
+                <a:ea typeface="+mn-ea"/>
+                <a:cs typeface="+mn-cs"/>
+              </a:defRPr>
+            </a:lvl6pPr>
+            <a:lvl7pPr marL="2743200" indent="0" algn="ctr" defTabSz="914400" rtl="1" eaLnBrk="1" latinLnBrk="0" hangingPunct="1">
+              <a:lnSpc>
+                <a:spcPct val="90000"/>
+              </a:lnSpc>
+              <a:spcBef>
+                <a:spcPts val="500"/>
+              </a:spcBef>
+              <a:buFont typeface="Arial" panose="020B0604020202020204" pitchFamily="34" charset="0"/>
+              <a:buNone/>
+              <a:defRPr sz="1600" kern="1200">
+                <a:solidFill>
+                  <a:schemeClr val="tx1"/>
+                </a:solidFill>
+                <a:latin typeface="+mn-lt"/>
+                <a:ea typeface="+mn-ea"/>
+                <a:cs typeface="+mn-cs"/>
+              </a:defRPr>
+            </a:lvl7pPr>
+            <a:lvl8pPr marL="3200400" indent="0" algn="ctr" defTabSz="914400" rtl="1" eaLnBrk="1" latinLnBrk="0" hangingPunct="1">
+              <a:lnSpc>
+                <a:spcPct val="90000"/>
+              </a:lnSpc>
+              <a:spcBef>
+                <a:spcPts val="500"/>
+              </a:spcBef>
+              <a:buFont typeface="Arial" panose="020B0604020202020204" pitchFamily="34" charset="0"/>
+              <a:buNone/>
+              <a:defRPr sz="1600" kern="1200">
+                <a:solidFill>
+                  <a:schemeClr val="tx1"/>
+                </a:solidFill>
+                <a:latin typeface="+mn-lt"/>
+                <a:ea typeface="+mn-ea"/>
+                <a:cs typeface="+mn-cs"/>
+              </a:defRPr>
+            </a:lvl8pPr>
+            <a:lvl9pPr marL="3657600" indent="0" algn="ctr" defTabSz="914400" rtl="1" eaLnBrk="1" latinLnBrk="0" hangingPunct="1">
+              <a:lnSpc>
+                <a:spcPct val="90000"/>
+              </a:lnSpc>
+              <a:spcBef>
+                <a:spcPts val="500"/>
+              </a:spcBef>
+              <a:buFont typeface="Arial" panose="020B0604020202020204" pitchFamily="34" charset="0"/>
+              <a:buNone/>
+              <a:defRPr sz="1600" kern="1200">
+                <a:solidFill>
+                  <a:schemeClr val="tx1"/>
+                </a:solidFill>
+                <a:latin typeface="+mn-lt"/>
+                <a:ea typeface="+mn-ea"/>
+                <a:cs typeface="+mn-cs"/>
+              </a:defRPr>
+            </a:lvl9pPr>
+          </a:lstStyle>
+          <a:p>
+            <a:r>
+              <a:rPr lang="en-US" sz="1800" dirty="0">
+                <a:latin typeface="Times New Roman" panose="02020603050405020304" pitchFamily="18" charset="0"/>
+                <a:cs typeface="Times New Roman" panose="02020603050405020304" pitchFamily="18" charset="0"/>
+              </a:rPr>
+              <a:t>Validation accuracy during training for ResNet50 and DenseNet121 under degradation level 16</a:t>
+            </a:r>
           </a:p>
         </p:txBody>
       </p:sp>
     </p:spTree>
     <p:extLst>
       <p:ext uri="{BB962C8B-B14F-4D97-AF65-F5344CB8AC3E}">
-        <p14:creationId xmlns:p14="http://schemas.microsoft.com/office/powerpoint/2010/main" val="3663281557"/>
+        <p14:creationId xmlns:p14="http://schemas.microsoft.com/office/powerpoint/2010/main" val="1363191885"/>
       </p:ext>
     </p:extLst>
   </p:cSld>
@@ -3601,7 +3872,7 @@
         <p:cNvPr id="1" name="">
           <a:extLst>
             <a:ext uri="{FF2B5EF4-FFF2-40B4-BE49-F238E27FC236}">
-              <a16:creationId xmlns:a16="http://schemas.microsoft.com/office/drawing/2014/main" id="{8EA44025-93E8-6529-EB44-CC6655B35873}"/>
+              <a16:creationId xmlns:a16="http://schemas.microsoft.com/office/drawing/2014/main" id="{DF2A8F41-DCFF-306E-F976-819EF2967ED5}"/>
             </a:ext>
           </a:extLst>
         </p:cNvPr>
@@ -3621,7 +3892,7 @@
           <p:cNvPr id="7" name="כותרת משנה 6">
             <a:extLst>
               <a:ext uri="{FF2B5EF4-FFF2-40B4-BE49-F238E27FC236}">
-                <a16:creationId xmlns:a16="http://schemas.microsoft.com/office/drawing/2014/main" id="{E50F5393-24A4-12DC-A305-4C46E80A0E7E}"/>
+                <a16:creationId xmlns:a16="http://schemas.microsoft.com/office/drawing/2014/main" id="{A95CCA25-78E4-72D0-7A20-530507B350A2}"/>
               </a:ext>
             </a:extLst>
           </p:cNvPr>
@@ -3632,19 +3903,484 @@
             <p:ph type="subTitle" idx="1"/>
           </p:nvPr>
         </p:nvSpPr>
-        <p:spPr/>
+        <p:spPr>
+          <a:xfrm>
+            <a:off x="1706880" y="658368"/>
+            <a:ext cx="9144000" cy="978408"/>
+          </a:xfrm>
+        </p:spPr>
         <p:txBody>
           <a:bodyPr/>
           <a:lstStyle/>
           <a:p>
-            <a:endParaRPr lang="he-IL" dirty="0"/>
+            <a:r>
+              <a:rPr lang="en-US" b="1" dirty="0">
+                <a:latin typeface="Times New Roman" panose="02020603050405020304" pitchFamily="18" charset="0"/>
+                <a:cs typeface="Times New Roman" panose="02020603050405020304" pitchFamily="18" charset="0"/>
+              </a:rPr>
+              <a:t>Effect of Image Degradation on Classification Accuracy</a:t>
+            </a:r>
+            <a:endParaRPr lang="en-US" dirty="0">
+              <a:latin typeface="Times New Roman" panose="02020603050405020304" pitchFamily="18" charset="0"/>
+              <a:cs typeface="Times New Roman" panose="02020603050405020304" pitchFamily="18" charset="0"/>
+            </a:endParaRPr>
+          </a:p>
+          <a:p>
+            <a:endParaRPr lang="he-IL" b="1" dirty="0">
+              <a:latin typeface="Times New Roman" panose="02020603050405020304" pitchFamily="18" charset="0"/>
+              <a:cs typeface="Times New Roman" panose="02020603050405020304" pitchFamily="18" charset="0"/>
+            </a:endParaRPr>
+          </a:p>
+        </p:txBody>
+      </p:sp>
+      <p:sp>
+        <p:nvSpPr>
+          <p:cNvPr id="11" name="כותרת משנה 6">
+            <a:extLst>
+              <a:ext uri="{FF2B5EF4-FFF2-40B4-BE49-F238E27FC236}">
+                <a16:creationId xmlns:a16="http://schemas.microsoft.com/office/drawing/2014/main" id="{7F7BB4FF-297D-B2E1-38DC-CB069C379719}"/>
+              </a:ext>
+            </a:extLst>
+          </p:cNvPr>
+          <p:cNvSpPr txBox="1">
+            <a:spLocks/>
+          </p:cNvSpPr>
+          <p:nvPr/>
+        </p:nvSpPr>
+        <p:spPr>
+          <a:xfrm>
+            <a:off x="1706880" y="1837944"/>
+            <a:ext cx="9211056" cy="4242816"/>
+          </a:xfrm>
+          <a:prstGeom prst="rect">
+            <a:avLst/>
+          </a:prstGeom>
+        </p:spPr>
+        <p:txBody>
+          <a:bodyPr vert="horz" lIns="91440" tIns="45720" rIns="91440" bIns="45720" rtlCol="1">
+            <a:normAutofit/>
+          </a:bodyPr>
+          <a:lstStyle>
+            <a:lvl1pPr marL="0" indent="0" algn="ctr" defTabSz="914400" rtl="1" eaLnBrk="1" latinLnBrk="0" hangingPunct="1">
+              <a:lnSpc>
+                <a:spcPct val="90000"/>
+              </a:lnSpc>
+              <a:spcBef>
+                <a:spcPts val="1000"/>
+              </a:spcBef>
+              <a:buFont typeface="Arial" panose="020B0604020202020204" pitchFamily="34" charset="0"/>
+              <a:buNone/>
+              <a:defRPr sz="2400" kern="1200">
+                <a:solidFill>
+                  <a:schemeClr val="tx1"/>
+                </a:solidFill>
+                <a:latin typeface="+mn-lt"/>
+                <a:ea typeface="+mn-ea"/>
+                <a:cs typeface="+mn-cs"/>
+              </a:defRPr>
+            </a:lvl1pPr>
+            <a:lvl2pPr marL="457200" indent="0" algn="ctr" defTabSz="914400" rtl="1" eaLnBrk="1" latinLnBrk="0" hangingPunct="1">
+              <a:lnSpc>
+                <a:spcPct val="90000"/>
+              </a:lnSpc>
+              <a:spcBef>
+                <a:spcPts val="500"/>
+              </a:spcBef>
+              <a:buFont typeface="Arial" panose="020B0604020202020204" pitchFamily="34" charset="0"/>
+              <a:buNone/>
+              <a:defRPr sz="2000" kern="1200">
+                <a:solidFill>
+                  <a:schemeClr val="tx1"/>
+                </a:solidFill>
+                <a:latin typeface="+mn-lt"/>
+                <a:ea typeface="+mn-ea"/>
+                <a:cs typeface="+mn-cs"/>
+              </a:defRPr>
+            </a:lvl2pPr>
+            <a:lvl3pPr marL="914400" indent="0" algn="ctr" defTabSz="914400" rtl="1" eaLnBrk="1" latinLnBrk="0" hangingPunct="1">
+              <a:lnSpc>
+                <a:spcPct val="90000"/>
+              </a:lnSpc>
+              <a:spcBef>
+                <a:spcPts val="500"/>
+              </a:spcBef>
+              <a:buFont typeface="Arial" panose="020B0604020202020204" pitchFamily="34" charset="0"/>
+              <a:buNone/>
+              <a:defRPr sz="1800" kern="1200">
+                <a:solidFill>
+                  <a:schemeClr val="tx1"/>
+                </a:solidFill>
+                <a:latin typeface="+mn-lt"/>
+                <a:ea typeface="+mn-ea"/>
+                <a:cs typeface="+mn-cs"/>
+              </a:defRPr>
+            </a:lvl3pPr>
+            <a:lvl4pPr marL="1371600" indent="0" algn="ctr" defTabSz="914400" rtl="1" eaLnBrk="1" latinLnBrk="0" hangingPunct="1">
+              <a:lnSpc>
+                <a:spcPct val="90000"/>
+              </a:lnSpc>
+              <a:spcBef>
+                <a:spcPts val="500"/>
+              </a:spcBef>
+              <a:buFont typeface="Arial" panose="020B0604020202020204" pitchFamily="34" charset="0"/>
+              <a:buNone/>
+              <a:defRPr sz="1600" kern="1200">
+                <a:solidFill>
+                  <a:schemeClr val="tx1"/>
+                </a:solidFill>
+                <a:latin typeface="+mn-lt"/>
+                <a:ea typeface="+mn-ea"/>
+                <a:cs typeface="+mn-cs"/>
+              </a:defRPr>
+            </a:lvl4pPr>
+            <a:lvl5pPr marL="1828800" indent="0" algn="ctr" defTabSz="914400" rtl="1" eaLnBrk="1" latinLnBrk="0" hangingPunct="1">
+              <a:lnSpc>
+                <a:spcPct val="90000"/>
+              </a:lnSpc>
+              <a:spcBef>
+                <a:spcPts val="500"/>
+              </a:spcBef>
+              <a:buFont typeface="Arial" panose="020B0604020202020204" pitchFamily="34" charset="0"/>
+              <a:buNone/>
+              <a:defRPr sz="1600" kern="1200">
+                <a:solidFill>
+                  <a:schemeClr val="tx1"/>
+                </a:solidFill>
+                <a:latin typeface="+mn-lt"/>
+                <a:ea typeface="+mn-ea"/>
+                <a:cs typeface="+mn-cs"/>
+              </a:defRPr>
+            </a:lvl5pPr>
+            <a:lvl6pPr marL="2286000" indent="0" algn="ctr" defTabSz="914400" rtl="1" eaLnBrk="1" latinLnBrk="0" hangingPunct="1">
+              <a:lnSpc>
+                <a:spcPct val="90000"/>
+              </a:lnSpc>
+              <a:spcBef>
+                <a:spcPts val="500"/>
+              </a:spcBef>
+              <a:buFont typeface="Arial" panose="020B0604020202020204" pitchFamily="34" charset="0"/>
+              <a:buNone/>
+              <a:defRPr sz="1600" kern="1200">
+                <a:solidFill>
+                  <a:schemeClr val="tx1"/>
+                </a:solidFill>
+                <a:latin typeface="+mn-lt"/>
+                <a:ea typeface="+mn-ea"/>
+                <a:cs typeface="+mn-cs"/>
+              </a:defRPr>
+            </a:lvl6pPr>
+            <a:lvl7pPr marL="2743200" indent="0" algn="ctr" defTabSz="914400" rtl="1" eaLnBrk="1" latinLnBrk="0" hangingPunct="1">
+              <a:lnSpc>
+                <a:spcPct val="90000"/>
+              </a:lnSpc>
+              <a:spcBef>
+                <a:spcPts val="500"/>
+              </a:spcBef>
+              <a:buFont typeface="Arial" panose="020B0604020202020204" pitchFamily="34" charset="0"/>
+              <a:buNone/>
+              <a:defRPr sz="1600" kern="1200">
+                <a:solidFill>
+                  <a:schemeClr val="tx1"/>
+                </a:solidFill>
+                <a:latin typeface="+mn-lt"/>
+                <a:ea typeface="+mn-ea"/>
+                <a:cs typeface="+mn-cs"/>
+              </a:defRPr>
+            </a:lvl7pPr>
+            <a:lvl8pPr marL="3200400" indent="0" algn="ctr" defTabSz="914400" rtl="1" eaLnBrk="1" latinLnBrk="0" hangingPunct="1">
+              <a:lnSpc>
+                <a:spcPct val="90000"/>
+              </a:lnSpc>
+              <a:spcBef>
+                <a:spcPts val="500"/>
+              </a:spcBef>
+              <a:buFont typeface="Arial" panose="020B0604020202020204" pitchFamily="34" charset="0"/>
+              <a:buNone/>
+              <a:defRPr sz="1600" kern="1200">
+                <a:solidFill>
+                  <a:schemeClr val="tx1"/>
+                </a:solidFill>
+                <a:latin typeface="+mn-lt"/>
+                <a:ea typeface="+mn-ea"/>
+                <a:cs typeface="+mn-cs"/>
+              </a:defRPr>
+            </a:lvl8pPr>
+            <a:lvl9pPr marL="3657600" indent="0" algn="ctr" defTabSz="914400" rtl="1" eaLnBrk="1" latinLnBrk="0" hangingPunct="1">
+              <a:lnSpc>
+                <a:spcPct val="90000"/>
+              </a:lnSpc>
+              <a:spcBef>
+                <a:spcPts val="500"/>
+              </a:spcBef>
+              <a:buFont typeface="Arial" panose="020B0604020202020204" pitchFamily="34" charset="0"/>
+              <a:buNone/>
+              <a:defRPr sz="1600" kern="1200">
+                <a:solidFill>
+                  <a:schemeClr val="tx1"/>
+                </a:solidFill>
+                <a:latin typeface="+mn-lt"/>
+                <a:ea typeface="+mn-ea"/>
+                <a:cs typeface="+mn-cs"/>
+              </a:defRPr>
+            </a:lvl9pPr>
+          </a:lstStyle>
+          <a:p>
+            <a:pPr algn="l"/>
+            <a:endParaRPr lang="he-IL" sz="2000" dirty="0">
+              <a:latin typeface="Times New Roman" panose="02020603050405020304" pitchFamily="18" charset="0"/>
+              <a:cs typeface="Times New Roman" panose="02020603050405020304" pitchFamily="18" charset="0"/>
+            </a:endParaRPr>
+          </a:p>
+        </p:txBody>
+      </p:sp>
+      <p:pic>
+        <p:nvPicPr>
+          <p:cNvPr id="3" name="תמונה 2">
+            <a:extLst>
+              <a:ext uri="{FF2B5EF4-FFF2-40B4-BE49-F238E27FC236}">
+                <a16:creationId xmlns:a16="http://schemas.microsoft.com/office/drawing/2014/main" id="{712C7A1C-E242-D735-351F-1B7E3087D2AC}"/>
+              </a:ext>
+            </a:extLst>
+          </p:cNvPr>
+          <p:cNvPicPr>
+            <a:picLocks noChangeAspect="1"/>
+          </p:cNvPicPr>
+          <p:nvPr/>
+        </p:nvPicPr>
+        <p:blipFill>
+          <a:blip r:embed="rId2">
+            <a:extLst>
+              <a:ext uri="{28A0092B-C50C-407E-A947-70E740481C1C}">
+                <a14:useLocalDpi xmlns:a14="http://schemas.microsoft.com/office/drawing/2010/main" val="0"/>
+              </a:ext>
+            </a:extLst>
+          </a:blip>
+          <a:stretch>
+            <a:fillRect/>
+          </a:stretch>
+        </p:blipFill>
+        <p:spPr>
+          <a:xfrm>
+            <a:off x="2728719" y="1223926"/>
+            <a:ext cx="6973065" cy="4183839"/>
+          </a:xfrm>
+          <a:prstGeom prst="rect">
+            <a:avLst/>
+          </a:prstGeom>
+        </p:spPr>
+      </p:pic>
+      <p:sp>
+        <p:nvSpPr>
+          <p:cNvPr id="4" name="כותרת משנה 6">
+            <a:extLst>
+              <a:ext uri="{FF2B5EF4-FFF2-40B4-BE49-F238E27FC236}">
+                <a16:creationId xmlns:a16="http://schemas.microsoft.com/office/drawing/2014/main" id="{0D4BD721-03B1-E9A1-ED8A-0BA8592FA359}"/>
+              </a:ext>
+            </a:extLst>
+          </p:cNvPr>
+          <p:cNvSpPr txBox="1">
+            <a:spLocks/>
+          </p:cNvSpPr>
+          <p:nvPr/>
+        </p:nvSpPr>
+        <p:spPr>
+          <a:xfrm>
+            <a:off x="1862327" y="5513832"/>
+            <a:ext cx="9144000" cy="978408"/>
+          </a:xfrm>
+          <a:prstGeom prst="rect">
+            <a:avLst/>
+          </a:prstGeom>
+        </p:spPr>
+        <p:txBody>
+          <a:bodyPr vert="horz" lIns="91440" tIns="45720" rIns="91440" bIns="45720" rtlCol="1">
+            <a:normAutofit/>
+          </a:bodyPr>
+          <a:lstStyle>
+            <a:lvl1pPr marL="0" indent="0" algn="ctr" defTabSz="914400" rtl="1" eaLnBrk="1" latinLnBrk="0" hangingPunct="1">
+              <a:lnSpc>
+                <a:spcPct val="90000"/>
+              </a:lnSpc>
+              <a:spcBef>
+                <a:spcPts val="1000"/>
+              </a:spcBef>
+              <a:buFont typeface="Arial" panose="020B0604020202020204" pitchFamily="34" charset="0"/>
+              <a:buNone/>
+              <a:defRPr sz="2400" kern="1200">
+                <a:solidFill>
+                  <a:schemeClr val="tx1"/>
+                </a:solidFill>
+                <a:latin typeface="+mn-lt"/>
+                <a:ea typeface="+mn-ea"/>
+                <a:cs typeface="+mn-cs"/>
+              </a:defRPr>
+            </a:lvl1pPr>
+            <a:lvl2pPr marL="457200" indent="0" algn="ctr" defTabSz="914400" rtl="1" eaLnBrk="1" latinLnBrk="0" hangingPunct="1">
+              <a:lnSpc>
+                <a:spcPct val="90000"/>
+              </a:lnSpc>
+              <a:spcBef>
+                <a:spcPts val="500"/>
+              </a:spcBef>
+              <a:buFont typeface="Arial" panose="020B0604020202020204" pitchFamily="34" charset="0"/>
+              <a:buNone/>
+              <a:defRPr sz="2000" kern="1200">
+                <a:solidFill>
+                  <a:schemeClr val="tx1"/>
+                </a:solidFill>
+                <a:latin typeface="+mn-lt"/>
+                <a:ea typeface="+mn-ea"/>
+                <a:cs typeface="+mn-cs"/>
+              </a:defRPr>
+            </a:lvl2pPr>
+            <a:lvl3pPr marL="914400" indent="0" algn="ctr" defTabSz="914400" rtl="1" eaLnBrk="1" latinLnBrk="0" hangingPunct="1">
+              <a:lnSpc>
+                <a:spcPct val="90000"/>
+              </a:lnSpc>
+              <a:spcBef>
+                <a:spcPts val="500"/>
+              </a:spcBef>
+              <a:buFont typeface="Arial" panose="020B0604020202020204" pitchFamily="34" charset="0"/>
+              <a:buNone/>
+              <a:defRPr sz="1800" kern="1200">
+                <a:solidFill>
+                  <a:schemeClr val="tx1"/>
+                </a:solidFill>
+                <a:latin typeface="+mn-lt"/>
+                <a:ea typeface="+mn-ea"/>
+                <a:cs typeface="+mn-cs"/>
+              </a:defRPr>
+            </a:lvl3pPr>
+            <a:lvl4pPr marL="1371600" indent="0" algn="ctr" defTabSz="914400" rtl="1" eaLnBrk="1" latinLnBrk="0" hangingPunct="1">
+              <a:lnSpc>
+                <a:spcPct val="90000"/>
+              </a:lnSpc>
+              <a:spcBef>
+                <a:spcPts val="500"/>
+              </a:spcBef>
+              <a:buFont typeface="Arial" panose="020B0604020202020204" pitchFamily="34" charset="0"/>
+              <a:buNone/>
+              <a:defRPr sz="1600" kern="1200">
+                <a:solidFill>
+                  <a:schemeClr val="tx1"/>
+                </a:solidFill>
+                <a:latin typeface="+mn-lt"/>
+                <a:ea typeface="+mn-ea"/>
+                <a:cs typeface="+mn-cs"/>
+              </a:defRPr>
+            </a:lvl4pPr>
+            <a:lvl5pPr marL="1828800" indent="0" algn="ctr" defTabSz="914400" rtl="1" eaLnBrk="1" latinLnBrk="0" hangingPunct="1">
+              <a:lnSpc>
+                <a:spcPct val="90000"/>
+              </a:lnSpc>
+              <a:spcBef>
+                <a:spcPts val="500"/>
+              </a:spcBef>
+              <a:buFont typeface="Arial" panose="020B0604020202020204" pitchFamily="34" charset="0"/>
+              <a:buNone/>
+              <a:defRPr sz="1600" kern="1200">
+                <a:solidFill>
+                  <a:schemeClr val="tx1"/>
+                </a:solidFill>
+                <a:latin typeface="+mn-lt"/>
+                <a:ea typeface="+mn-ea"/>
+                <a:cs typeface="+mn-cs"/>
+              </a:defRPr>
+            </a:lvl5pPr>
+            <a:lvl6pPr marL="2286000" indent="0" algn="ctr" defTabSz="914400" rtl="1" eaLnBrk="1" latinLnBrk="0" hangingPunct="1">
+              <a:lnSpc>
+                <a:spcPct val="90000"/>
+              </a:lnSpc>
+              <a:spcBef>
+                <a:spcPts val="500"/>
+              </a:spcBef>
+              <a:buFont typeface="Arial" panose="020B0604020202020204" pitchFamily="34" charset="0"/>
+              <a:buNone/>
+              <a:defRPr sz="1600" kern="1200">
+                <a:solidFill>
+                  <a:schemeClr val="tx1"/>
+                </a:solidFill>
+                <a:latin typeface="+mn-lt"/>
+                <a:ea typeface="+mn-ea"/>
+                <a:cs typeface="+mn-cs"/>
+              </a:defRPr>
+            </a:lvl6pPr>
+            <a:lvl7pPr marL="2743200" indent="0" algn="ctr" defTabSz="914400" rtl="1" eaLnBrk="1" latinLnBrk="0" hangingPunct="1">
+              <a:lnSpc>
+                <a:spcPct val="90000"/>
+              </a:lnSpc>
+              <a:spcBef>
+                <a:spcPts val="500"/>
+              </a:spcBef>
+              <a:buFont typeface="Arial" panose="020B0604020202020204" pitchFamily="34" charset="0"/>
+              <a:buNone/>
+              <a:defRPr sz="1600" kern="1200">
+                <a:solidFill>
+                  <a:schemeClr val="tx1"/>
+                </a:solidFill>
+                <a:latin typeface="+mn-lt"/>
+                <a:ea typeface="+mn-ea"/>
+                <a:cs typeface="+mn-cs"/>
+              </a:defRPr>
+            </a:lvl7pPr>
+            <a:lvl8pPr marL="3200400" indent="0" algn="ctr" defTabSz="914400" rtl="1" eaLnBrk="1" latinLnBrk="0" hangingPunct="1">
+              <a:lnSpc>
+                <a:spcPct val="90000"/>
+              </a:lnSpc>
+              <a:spcBef>
+                <a:spcPts val="500"/>
+              </a:spcBef>
+              <a:buFont typeface="Arial" panose="020B0604020202020204" pitchFamily="34" charset="0"/>
+              <a:buNone/>
+              <a:defRPr sz="1600" kern="1200">
+                <a:solidFill>
+                  <a:schemeClr val="tx1"/>
+                </a:solidFill>
+                <a:latin typeface="+mn-lt"/>
+                <a:ea typeface="+mn-ea"/>
+                <a:cs typeface="+mn-cs"/>
+              </a:defRPr>
+            </a:lvl8pPr>
+            <a:lvl9pPr marL="3657600" indent="0" algn="ctr" defTabSz="914400" rtl="1" eaLnBrk="1" latinLnBrk="0" hangingPunct="1">
+              <a:lnSpc>
+                <a:spcPct val="90000"/>
+              </a:lnSpc>
+              <a:spcBef>
+                <a:spcPts val="500"/>
+              </a:spcBef>
+              <a:buFont typeface="Arial" panose="020B0604020202020204" pitchFamily="34" charset="0"/>
+              <a:buNone/>
+              <a:defRPr sz="1600" kern="1200">
+                <a:solidFill>
+                  <a:schemeClr val="tx1"/>
+                </a:solidFill>
+                <a:latin typeface="+mn-lt"/>
+                <a:ea typeface="+mn-ea"/>
+                <a:cs typeface="+mn-cs"/>
+              </a:defRPr>
+            </a:lvl9pPr>
+          </a:lstStyle>
+          <a:p>
+            <a:r>
+              <a:rPr lang="en-US" sz="2000" dirty="0">
+                <a:latin typeface="Times New Roman" panose="02020603050405020304" pitchFamily="18" charset="0"/>
+                <a:cs typeface="Times New Roman" panose="02020603050405020304" pitchFamily="18" charset="0"/>
+              </a:rPr>
+              <a:t>Classification accuracy decreases as image resolution becomes lower</a:t>
+            </a:r>
+          </a:p>
+          <a:p>
+            <a:endParaRPr lang="he-IL" sz="2000" dirty="0">
+              <a:latin typeface="Times New Roman" panose="02020603050405020304" pitchFamily="18" charset="0"/>
+              <a:cs typeface="Times New Roman" panose="02020603050405020304" pitchFamily="18" charset="0"/>
+            </a:endParaRPr>
           </a:p>
         </p:txBody>
       </p:sp>
     </p:spTree>
     <p:extLst>
       <p:ext uri="{BB962C8B-B14F-4D97-AF65-F5344CB8AC3E}">
-        <p14:creationId xmlns:p14="http://schemas.microsoft.com/office/powerpoint/2010/main" val="588153568"/>
+        <p14:creationId xmlns:p14="http://schemas.microsoft.com/office/powerpoint/2010/main" val="4053289434"/>
       </p:ext>
     </p:extLst>
   </p:cSld>
@@ -3662,7 +4398,7 @@
         <p:cNvPr id="1" name="">
           <a:extLst>
             <a:ext uri="{FF2B5EF4-FFF2-40B4-BE49-F238E27FC236}">
-              <a16:creationId xmlns:a16="http://schemas.microsoft.com/office/drawing/2014/main" id="{F2BE6B70-6B3F-36A8-282E-96CCFFC778A2}"/>
+              <a16:creationId xmlns:a16="http://schemas.microsoft.com/office/drawing/2014/main" id="{7CBDE22A-30DE-8AF9-DD9C-4F5D44D9E652}"/>
             </a:ext>
           </a:extLst>
         </p:cNvPr>
@@ -3682,7 +4418,7 @@
           <p:cNvPr id="7" name="כותרת משנה 6">
             <a:extLst>
               <a:ext uri="{FF2B5EF4-FFF2-40B4-BE49-F238E27FC236}">
-                <a16:creationId xmlns:a16="http://schemas.microsoft.com/office/drawing/2014/main" id="{B566F7E4-BF70-C0C7-3AC1-FADDF39FDEEA}"/>
+                <a16:creationId xmlns:a16="http://schemas.microsoft.com/office/drawing/2014/main" id="{1A121565-93FF-AB35-BD1F-B8506F23C4A4}"/>
               </a:ext>
             </a:extLst>
           </p:cNvPr>
@@ -3693,19 +4429,276 @@
             <p:ph type="subTitle" idx="1"/>
           </p:nvPr>
         </p:nvSpPr>
-        <p:spPr/>
+        <p:spPr>
+          <a:xfrm>
+            <a:off x="1706880" y="658368"/>
+            <a:ext cx="9144000" cy="978408"/>
+          </a:xfrm>
+        </p:spPr>
         <p:txBody>
           <a:bodyPr/>
           <a:lstStyle/>
           <a:p>
-            <a:endParaRPr lang="he-IL" dirty="0"/>
+            <a:r>
+              <a:rPr lang="en-US" b="1" dirty="0">
+                <a:latin typeface="Times New Roman" panose="02020603050405020304" pitchFamily="18" charset="0"/>
+                <a:cs typeface="Times New Roman" panose="02020603050405020304" pitchFamily="18" charset="0"/>
+              </a:rPr>
+              <a:t>Example of Simulated THz Degradation</a:t>
+            </a:r>
+            <a:endParaRPr lang="en-US" dirty="0">
+              <a:latin typeface="Times New Roman" panose="02020603050405020304" pitchFamily="18" charset="0"/>
+              <a:cs typeface="Times New Roman" panose="02020603050405020304" pitchFamily="18" charset="0"/>
+            </a:endParaRPr>
+          </a:p>
+          <a:p>
+            <a:endParaRPr lang="he-IL" b="1" dirty="0">
+              <a:latin typeface="Times New Roman" panose="02020603050405020304" pitchFamily="18" charset="0"/>
+              <a:cs typeface="Times New Roman" panose="02020603050405020304" pitchFamily="18" charset="0"/>
+            </a:endParaRPr>
           </a:p>
         </p:txBody>
       </p:sp>
+      <p:sp>
+        <p:nvSpPr>
+          <p:cNvPr id="11" name="כותרת משנה 6">
+            <a:extLst>
+              <a:ext uri="{FF2B5EF4-FFF2-40B4-BE49-F238E27FC236}">
+                <a16:creationId xmlns:a16="http://schemas.microsoft.com/office/drawing/2014/main" id="{AF345A99-E20E-A9D5-DFC4-F31ABFC1BD46}"/>
+              </a:ext>
+            </a:extLst>
+          </p:cNvPr>
+          <p:cNvSpPr txBox="1">
+            <a:spLocks/>
+          </p:cNvSpPr>
+          <p:nvPr/>
+        </p:nvSpPr>
+        <p:spPr>
+          <a:xfrm>
+            <a:off x="1706880" y="1837944"/>
+            <a:ext cx="9211056" cy="4242816"/>
+          </a:xfrm>
+          <a:prstGeom prst="rect">
+            <a:avLst/>
+          </a:prstGeom>
+        </p:spPr>
+        <p:txBody>
+          <a:bodyPr vert="horz" lIns="91440" tIns="45720" rIns="91440" bIns="45720" rtlCol="1">
+            <a:normAutofit/>
+          </a:bodyPr>
+          <a:lstStyle>
+            <a:lvl1pPr marL="0" indent="0" algn="ctr" defTabSz="914400" rtl="1" eaLnBrk="1" latinLnBrk="0" hangingPunct="1">
+              <a:lnSpc>
+                <a:spcPct val="90000"/>
+              </a:lnSpc>
+              <a:spcBef>
+                <a:spcPts val="1000"/>
+              </a:spcBef>
+              <a:buFont typeface="Arial" panose="020B0604020202020204" pitchFamily="34" charset="0"/>
+              <a:buNone/>
+              <a:defRPr sz="2400" kern="1200">
+                <a:solidFill>
+                  <a:schemeClr val="tx1"/>
+                </a:solidFill>
+                <a:latin typeface="+mn-lt"/>
+                <a:ea typeface="+mn-ea"/>
+                <a:cs typeface="+mn-cs"/>
+              </a:defRPr>
+            </a:lvl1pPr>
+            <a:lvl2pPr marL="457200" indent="0" algn="ctr" defTabSz="914400" rtl="1" eaLnBrk="1" latinLnBrk="0" hangingPunct="1">
+              <a:lnSpc>
+                <a:spcPct val="90000"/>
+              </a:lnSpc>
+              <a:spcBef>
+                <a:spcPts val="500"/>
+              </a:spcBef>
+              <a:buFont typeface="Arial" panose="020B0604020202020204" pitchFamily="34" charset="0"/>
+              <a:buNone/>
+              <a:defRPr sz="2000" kern="1200">
+                <a:solidFill>
+                  <a:schemeClr val="tx1"/>
+                </a:solidFill>
+                <a:latin typeface="+mn-lt"/>
+                <a:ea typeface="+mn-ea"/>
+                <a:cs typeface="+mn-cs"/>
+              </a:defRPr>
+            </a:lvl2pPr>
+            <a:lvl3pPr marL="914400" indent="0" algn="ctr" defTabSz="914400" rtl="1" eaLnBrk="1" latinLnBrk="0" hangingPunct="1">
+              <a:lnSpc>
+                <a:spcPct val="90000"/>
+              </a:lnSpc>
+              <a:spcBef>
+                <a:spcPts val="500"/>
+              </a:spcBef>
+              <a:buFont typeface="Arial" panose="020B0604020202020204" pitchFamily="34" charset="0"/>
+              <a:buNone/>
+              <a:defRPr sz="1800" kern="1200">
+                <a:solidFill>
+                  <a:schemeClr val="tx1"/>
+                </a:solidFill>
+                <a:latin typeface="+mn-lt"/>
+                <a:ea typeface="+mn-ea"/>
+                <a:cs typeface="+mn-cs"/>
+              </a:defRPr>
+            </a:lvl3pPr>
+            <a:lvl4pPr marL="1371600" indent="0" algn="ctr" defTabSz="914400" rtl="1" eaLnBrk="1" latinLnBrk="0" hangingPunct="1">
+              <a:lnSpc>
+                <a:spcPct val="90000"/>
+              </a:lnSpc>
+              <a:spcBef>
+                <a:spcPts val="500"/>
+              </a:spcBef>
+              <a:buFont typeface="Arial" panose="020B0604020202020204" pitchFamily="34" charset="0"/>
+              <a:buNone/>
+              <a:defRPr sz="1600" kern="1200">
+                <a:solidFill>
+                  <a:schemeClr val="tx1"/>
+                </a:solidFill>
+                <a:latin typeface="+mn-lt"/>
+                <a:ea typeface="+mn-ea"/>
+                <a:cs typeface="+mn-cs"/>
+              </a:defRPr>
+            </a:lvl4pPr>
+            <a:lvl5pPr marL="1828800" indent="0" algn="ctr" defTabSz="914400" rtl="1" eaLnBrk="1" latinLnBrk="0" hangingPunct="1">
+              <a:lnSpc>
+                <a:spcPct val="90000"/>
+              </a:lnSpc>
+              <a:spcBef>
+                <a:spcPts val="500"/>
+              </a:spcBef>
+              <a:buFont typeface="Arial" panose="020B0604020202020204" pitchFamily="34" charset="0"/>
+              <a:buNone/>
+              <a:defRPr sz="1600" kern="1200">
+                <a:solidFill>
+                  <a:schemeClr val="tx1"/>
+                </a:solidFill>
+                <a:latin typeface="+mn-lt"/>
+                <a:ea typeface="+mn-ea"/>
+                <a:cs typeface="+mn-cs"/>
+              </a:defRPr>
+            </a:lvl5pPr>
+            <a:lvl6pPr marL="2286000" indent="0" algn="ctr" defTabSz="914400" rtl="1" eaLnBrk="1" latinLnBrk="0" hangingPunct="1">
+              <a:lnSpc>
+                <a:spcPct val="90000"/>
+              </a:lnSpc>
+              <a:spcBef>
+                <a:spcPts val="500"/>
+              </a:spcBef>
+              <a:buFont typeface="Arial" panose="020B0604020202020204" pitchFamily="34" charset="0"/>
+              <a:buNone/>
+              <a:defRPr sz="1600" kern="1200">
+                <a:solidFill>
+                  <a:schemeClr val="tx1"/>
+                </a:solidFill>
+                <a:latin typeface="+mn-lt"/>
+                <a:ea typeface="+mn-ea"/>
+                <a:cs typeface="+mn-cs"/>
+              </a:defRPr>
+            </a:lvl6pPr>
+            <a:lvl7pPr marL="2743200" indent="0" algn="ctr" defTabSz="914400" rtl="1" eaLnBrk="1" latinLnBrk="0" hangingPunct="1">
+              <a:lnSpc>
+                <a:spcPct val="90000"/>
+              </a:lnSpc>
+              <a:spcBef>
+                <a:spcPts val="500"/>
+              </a:spcBef>
+              <a:buFont typeface="Arial" panose="020B0604020202020204" pitchFamily="34" charset="0"/>
+              <a:buNone/>
+              <a:defRPr sz="1600" kern="1200">
+                <a:solidFill>
+                  <a:schemeClr val="tx1"/>
+                </a:solidFill>
+                <a:latin typeface="+mn-lt"/>
+                <a:ea typeface="+mn-ea"/>
+                <a:cs typeface="+mn-cs"/>
+              </a:defRPr>
+            </a:lvl7pPr>
+            <a:lvl8pPr marL="3200400" indent="0" algn="ctr" defTabSz="914400" rtl="1" eaLnBrk="1" latinLnBrk="0" hangingPunct="1">
+              <a:lnSpc>
+                <a:spcPct val="90000"/>
+              </a:lnSpc>
+              <a:spcBef>
+                <a:spcPts val="500"/>
+              </a:spcBef>
+              <a:buFont typeface="Arial" panose="020B0604020202020204" pitchFamily="34" charset="0"/>
+              <a:buNone/>
+              <a:defRPr sz="1600" kern="1200">
+                <a:solidFill>
+                  <a:schemeClr val="tx1"/>
+                </a:solidFill>
+                <a:latin typeface="+mn-lt"/>
+                <a:ea typeface="+mn-ea"/>
+                <a:cs typeface="+mn-cs"/>
+              </a:defRPr>
+            </a:lvl8pPr>
+            <a:lvl9pPr marL="3657600" indent="0" algn="ctr" defTabSz="914400" rtl="1" eaLnBrk="1" latinLnBrk="0" hangingPunct="1">
+              <a:lnSpc>
+                <a:spcPct val="90000"/>
+              </a:lnSpc>
+              <a:spcBef>
+                <a:spcPts val="500"/>
+              </a:spcBef>
+              <a:buFont typeface="Arial" panose="020B0604020202020204" pitchFamily="34" charset="0"/>
+              <a:buNone/>
+              <a:defRPr sz="1600" kern="1200">
+                <a:solidFill>
+                  <a:schemeClr val="tx1"/>
+                </a:solidFill>
+                <a:latin typeface="+mn-lt"/>
+                <a:ea typeface="+mn-ea"/>
+                <a:cs typeface="+mn-cs"/>
+              </a:defRPr>
+            </a:lvl9pPr>
+          </a:lstStyle>
+          <a:p>
+            <a:pPr algn="l"/>
+            <a:endParaRPr lang="he-IL" sz="2000" dirty="0">
+              <a:latin typeface="Times New Roman" panose="02020603050405020304" pitchFamily="18" charset="0"/>
+              <a:cs typeface="Times New Roman" panose="02020603050405020304" pitchFamily="18" charset="0"/>
+            </a:endParaRPr>
+          </a:p>
+        </p:txBody>
+      </p:sp>
+      <p:pic>
+        <p:nvPicPr>
+          <p:cNvPr id="3" name="תמונה 2">
+            <a:extLst>
+              <a:ext uri="{FF2B5EF4-FFF2-40B4-BE49-F238E27FC236}">
+                <a16:creationId xmlns:a16="http://schemas.microsoft.com/office/drawing/2014/main" id="{AA672C83-D6BA-0789-3668-5FA1001A8A09}"/>
+              </a:ext>
+            </a:extLst>
+          </p:cNvPr>
+          <p:cNvPicPr>
+            <a:picLocks noChangeAspect="1"/>
+          </p:cNvPicPr>
+          <p:nvPr/>
+        </p:nvPicPr>
+        <p:blipFill>
+          <a:blip r:embed="rId2">
+            <a:extLst>
+              <a:ext uri="{28A0092B-C50C-407E-A947-70E740481C1C}">
+                <a14:useLocalDpi xmlns:a14="http://schemas.microsoft.com/office/drawing/2010/main" val="0"/>
+              </a:ext>
+            </a:extLst>
+          </a:blip>
+          <a:stretch>
+            <a:fillRect/>
+          </a:stretch>
+        </p:blipFill>
+        <p:spPr>
+          <a:xfrm>
+            <a:off x="2137405" y="1919098"/>
+            <a:ext cx="8076443" cy="2692148"/>
+          </a:xfrm>
+          <a:prstGeom prst="rect">
+            <a:avLst/>
+          </a:prstGeom>
+        </p:spPr>
+      </p:pic>
     </p:spTree>
     <p:extLst>
       <p:ext uri="{BB962C8B-B14F-4D97-AF65-F5344CB8AC3E}">
-        <p14:creationId xmlns:p14="http://schemas.microsoft.com/office/powerpoint/2010/main" val="718051477"/>
+        <p14:creationId xmlns:p14="http://schemas.microsoft.com/office/powerpoint/2010/main" val="4241249152"/>
       </p:ext>
     </p:extLst>
   </p:cSld>
@@ -3715,7 +4708,7 @@
 </p:sld>
 </file>
 
-<file path=ppt/slides/slide2.xml><?xml version="1.0" encoding="utf-8"?>
+<file path=ppt/slides/slide13.xml><?xml version="1.0" encoding="utf-8"?>
 <p:sld xmlns:a="http://schemas.openxmlformats.org/drawingml/2006/main" xmlns:r="http://schemas.openxmlformats.org/officeDocument/2006/relationships" xmlns:p="http://schemas.openxmlformats.org/presentationml/2006/main">
   <p:cSld>
     <p:spTree>
@@ -3723,7 +4716,7 @@
         <p:cNvPr id="1" name="">
           <a:extLst>
             <a:ext uri="{FF2B5EF4-FFF2-40B4-BE49-F238E27FC236}">
-              <a16:creationId xmlns:a16="http://schemas.microsoft.com/office/drawing/2014/main" id="{9786AA3C-FC86-220D-A585-8542909AE01E}"/>
+              <a16:creationId xmlns:a16="http://schemas.microsoft.com/office/drawing/2014/main" id="{7C7B4CA3-E860-BB7B-D49B-E75294681607}"/>
             </a:ext>
           </a:extLst>
         </p:cNvPr>
@@ -3743,7 +4736,7 @@
           <p:cNvPr id="7" name="כותרת משנה 6">
             <a:extLst>
               <a:ext uri="{FF2B5EF4-FFF2-40B4-BE49-F238E27FC236}">
-                <a16:creationId xmlns:a16="http://schemas.microsoft.com/office/drawing/2014/main" id="{8E0AC190-E121-B5C2-A065-DB1A4E4AD5B6}"/>
+                <a16:creationId xmlns:a16="http://schemas.microsoft.com/office/drawing/2014/main" id="{106C01EE-1D80-BEE4-D6AB-5EB0C2ADA513}"/>
               </a:ext>
             </a:extLst>
           </p:cNvPr>
@@ -3754,19 +4747,277 @@
             <p:ph type="subTitle" idx="1"/>
           </p:nvPr>
         </p:nvSpPr>
-        <p:spPr/>
+        <p:spPr>
+          <a:xfrm>
+            <a:off x="1706880" y="658368"/>
+            <a:ext cx="9144000" cy="978408"/>
+          </a:xfrm>
+        </p:spPr>
         <p:txBody>
           <a:bodyPr/>
           <a:lstStyle/>
           <a:p>
-            <a:endParaRPr lang="he-IL" dirty="0"/>
+            <a:r>
+              <a:rPr lang="en-US" b="1" dirty="0">
+                <a:latin typeface="Times New Roman" panose="02020603050405020304" pitchFamily="18" charset="0"/>
+                <a:cs typeface="Times New Roman" panose="02020603050405020304" pitchFamily="18" charset="0"/>
+              </a:rPr>
+              <a:t>Discussion and Preliminary Insights</a:t>
+            </a:r>
+            <a:endParaRPr lang="en-US" dirty="0">
+              <a:latin typeface="Times New Roman" panose="02020603050405020304" pitchFamily="18" charset="0"/>
+              <a:cs typeface="Times New Roman" panose="02020603050405020304" pitchFamily="18" charset="0"/>
+            </a:endParaRPr>
+          </a:p>
+          <a:p>
+            <a:endParaRPr lang="he-IL" b="1" dirty="0">
+              <a:latin typeface="Times New Roman" panose="02020603050405020304" pitchFamily="18" charset="0"/>
+              <a:cs typeface="Times New Roman" panose="02020603050405020304" pitchFamily="18" charset="0"/>
+            </a:endParaRPr>
+          </a:p>
+        </p:txBody>
+      </p:sp>
+      <p:sp>
+        <p:nvSpPr>
+          <p:cNvPr id="11" name="כותרת משנה 6">
+            <a:extLst>
+              <a:ext uri="{FF2B5EF4-FFF2-40B4-BE49-F238E27FC236}">
+                <a16:creationId xmlns:a16="http://schemas.microsoft.com/office/drawing/2014/main" id="{660AA9D2-4332-4A70-7537-FD70A8153450}"/>
+              </a:ext>
+            </a:extLst>
+          </p:cNvPr>
+          <p:cNvSpPr txBox="1">
+            <a:spLocks/>
+          </p:cNvSpPr>
+          <p:nvPr/>
+        </p:nvSpPr>
+        <p:spPr>
+          <a:xfrm>
+            <a:off x="1706880" y="1837944"/>
+            <a:ext cx="9211056" cy="4242816"/>
+          </a:xfrm>
+          <a:prstGeom prst="rect">
+            <a:avLst/>
+          </a:prstGeom>
+        </p:spPr>
+        <p:txBody>
+          <a:bodyPr vert="horz" lIns="91440" tIns="45720" rIns="91440" bIns="45720" rtlCol="1">
+            <a:normAutofit/>
+          </a:bodyPr>
+          <a:lstStyle>
+            <a:lvl1pPr marL="0" indent="0" algn="ctr" defTabSz="914400" rtl="1" eaLnBrk="1" latinLnBrk="0" hangingPunct="1">
+              <a:lnSpc>
+                <a:spcPct val="90000"/>
+              </a:lnSpc>
+              <a:spcBef>
+                <a:spcPts val="1000"/>
+              </a:spcBef>
+              <a:buFont typeface="Arial" panose="020B0604020202020204" pitchFamily="34" charset="0"/>
+              <a:buNone/>
+              <a:defRPr sz="2400" kern="1200">
+                <a:solidFill>
+                  <a:schemeClr val="tx1"/>
+                </a:solidFill>
+                <a:latin typeface="+mn-lt"/>
+                <a:ea typeface="+mn-ea"/>
+                <a:cs typeface="+mn-cs"/>
+              </a:defRPr>
+            </a:lvl1pPr>
+            <a:lvl2pPr marL="457200" indent="0" algn="ctr" defTabSz="914400" rtl="1" eaLnBrk="1" latinLnBrk="0" hangingPunct="1">
+              <a:lnSpc>
+                <a:spcPct val="90000"/>
+              </a:lnSpc>
+              <a:spcBef>
+                <a:spcPts val="500"/>
+              </a:spcBef>
+              <a:buFont typeface="Arial" panose="020B0604020202020204" pitchFamily="34" charset="0"/>
+              <a:buNone/>
+              <a:defRPr sz="2000" kern="1200">
+                <a:solidFill>
+                  <a:schemeClr val="tx1"/>
+                </a:solidFill>
+                <a:latin typeface="+mn-lt"/>
+                <a:ea typeface="+mn-ea"/>
+                <a:cs typeface="+mn-cs"/>
+              </a:defRPr>
+            </a:lvl2pPr>
+            <a:lvl3pPr marL="914400" indent="0" algn="ctr" defTabSz="914400" rtl="1" eaLnBrk="1" latinLnBrk="0" hangingPunct="1">
+              <a:lnSpc>
+                <a:spcPct val="90000"/>
+              </a:lnSpc>
+              <a:spcBef>
+                <a:spcPts val="500"/>
+              </a:spcBef>
+              <a:buFont typeface="Arial" panose="020B0604020202020204" pitchFamily="34" charset="0"/>
+              <a:buNone/>
+              <a:defRPr sz="1800" kern="1200">
+                <a:solidFill>
+                  <a:schemeClr val="tx1"/>
+                </a:solidFill>
+                <a:latin typeface="+mn-lt"/>
+                <a:ea typeface="+mn-ea"/>
+                <a:cs typeface="+mn-cs"/>
+              </a:defRPr>
+            </a:lvl3pPr>
+            <a:lvl4pPr marL="1371600" indent="0" algn="ctr" defTabSz="914400" rtl="1" eaLnBrk="1" latinLnBrk="0" hangingPunct="1">
+              <a:lnSpc>
+                <a:spcPct val="90000"/>
+              </a:lnSpc>
+              <a:spcBef>
+                <a:spcPts val="500"/>
+              </a:spcBef>
+              <a:buFont typeface="Arial" panose="020B0604020202020204" pitchFamily="34" charset="0"/>
+              <a:buNone/>
+              <a:defRPr sz="1600" kern="1200">
+                <a:solidFill>
+                  <a:schemeClr val="tx1"/>
+                </a:solidFill>
+                <a:latin typeface="+mn-lt"/>
+                <a:ea typeface="+mn-ea"/>
+                <a:cs typeface="+mn-cs"/>
+              </a:defRPr>
+            </a:lvl4pPr>
+            <a:lvl5pPr marL="1828800" indent="0" algn="ctr" defTabSz="914400" rtl="1" eaLnBrk="1" latinLnBrk="0" hangingPunct="1">
+              <a:lnSpc>
+                <a:spcPct val="90000"/>
+              </a:lnSpc>
+              <a:spcBef>
+                <a:spcPts val="500"/>
+              </a:spcBef>
+              <a:buFont typeface="Arial" panose="020B0604020202020204" pitchFamily="34" charset="0"/>
+              <a:buNone/>
+              <a:defRPr sz="1600" kern="1200">
+                <a:solidFill>
+                  <a:schemeClr val="tx1"/>
+                </a:solidFill>
+                <a:latin typeface="+mn-lt"/>
+                <a:ea typeface="+mn-ea"/>
+                <a:cs typeface="+mn-cs"/>
+              </a:defRPr>
+            </a:lvl5pPr>
+            <a:lvl6pPr marL="2286000" indent="0" algn="ctr" defTabSz="914400" rtl="1" eaLnBrk="1" latinLnBrk="0" hangingPunct="1">
+              <a:lnSpc>
+                <a:spcPct val="90000"/>
+              </a:lnSpc>
+              <a:spcBef>
+                <a:spcPts val="500"/>
+              </a:spcBef>
+              <a:buFont typeface="Arial" panose="020B0604020202020204" pitchFamily="34" charset="0"/>
+              <a:buNone/>
+              <a:defRPr sz="1600" kern="1200">
+                <a:solidFill>
+                  <a:schemeClr val="tx1"/>
+                </a:solidFill>
+                <a:latin typeface="+mn-lt"/>
+                <a:ea typeface="+mn-ea"/>
+                <a:cs typeface="+mn-cs"/>
+              </a:defRPr>
+            </a:lvl6pPr>
+            <a:lvl7pPr marL="2743200" indent="0" algn="ctr" defTabSz="914400" rtl="1" eaLnBrk="1" latinLnBrk="0" hangingPunct="1">
+              <a:lnSpc>
+                <a:spcPct val="90000"/>
+              </a:lnSpc>
+              <a:spcBef>
+                <a:spcPts val="500"/>
+              </a:spcBef>
+              <a:buFont typeface="Arial" panose="020B0604020202020204" pitchFamily="34" charset="0"/>
+              <a:buNone/>
+              <a:defRPr sz="1600" kern="1200">
+                <a:solidFill>
+                  <a:schemeClr val="tx1"/>
+                </a:solidFill>
+                <a:latin typeface="+mn-lt"/>
+                <a:ea typeface="+mn-ea"/>
+                <a:cs typeface="+mn-cs"/>
+              </a:defRPr>
+            </a:lvl7pPr>
+            <a:lvl8pPr marL="3200400" indent="0" algn="ctr" defTabSz="914400" rtl="1" eaLnBrk="1" latinLnBrk="0" hangingPunct="1">
+              <a:lnSpc>
+                <a:spcPct val="90000"/>
+              </a:lnSpc>
+              <a:spcBef>
+                <a:spcPts val="500"/>
+              </a:spcBef>
+              <a:buFont typeface="Arial" panose="020B0604020202020204" pitchFamily="34" charset="0"/>
+              <a:buNone/>
+              <a:defRPr sz="1600" kern="1200">
+                <a:solidFill>
+                  <a:schemeClr val="tx1"/>
+                </a:solidFill>
+                <a:latin typeface="+mn-lt"/>
+                <a:ea typeface="+mn-ea"/>
+                <a:cs typeface="+mn-cs"/>
+              </a:defRPr>
+            </a:lvl8pPr>
+            <a:lvl9pPr marL="3657600" indent="0" algn="ctr" defTabSz="914400" rtl="1" eaLnBrk="1" latinLnBrk="0" hangingPunct="1">
+              <a:lnSpc>
+                <a:spcPct val="90000"/>
+              </a:lnSpc>
+              <a:spcBef>
+                <a:spcPts val="500"/>
+              </a:spcBef>
+              <a:buFont typeface="Arial" panose="020B0604020202020204" pitchFamily="34" charset="0"/>
+              <a:buNone/>
+              <a:defRPr sz="1600" kern="1200">
+                <a:solidFill>
+                  <a:schemeClr val="tx1"/>
+                </a:solidFill>
+                <a:latin typeface="+mn-lt"/>
+                <a:ea typeface="+mn-ea"/>
+                <a:cs typeface="+mn-cs"/>
+              </a:defRPr>
+            </a:lvl9pPr>
+          </a:lstStyle>
+          <a:p>
+            <a:pPr algn="l"/>
+            <a:r>
+              <a:rPr lang="en-US" sz="2000">
+                <a:latin typeface="Times New Roman" panose="02020603050405020304" pitchFamily="18" charset="0"/>
+                <a:cs typeface="Times New Roman" panose="02020603050405020304" pitchFamily="18" charset="0"/>
+              </a:rPr>
+              <a:t>• Deep CNN models can still classify degraded images</a:t>
+            </a:r>
+          </a:p>
+          <a:p>
+            <a:pPr algn="l"/>
+            <a:r>
+              <a:rPr lang="en-US" sz="2000">
+                <a:latin typeface="Times New Roman" panose="02020603050405020304" pitchFamily="18" charset="0"/>
+                <a:cs typeface="Times New Roman" panose="02020603050405020304" pitchFamily="18" charset="0"/>
+              </a:rPr>
+              <a:t>• Performance decreases as degradation becomes stronger</a:t>
+            </a:r>
+          </a:p>
+          <a:p>
+            <a:pPr algn="l"/>
+            <a:r>
+              <a:rPr lang="en-US" sz="2000">
+                <a:latin typeface="Times New Roman" panose="02020603050405020304" pitchFamily="18" charset="0"/>
+                <a:cs typeface="Times New Roman" panose="02020603050405020304" pitchFamily="18" charset="0"/>
+              </a:rPr>
+              <a:t>• ResNet50 slightly outperforms DenseNet121</a:t>
+            </a:r>
+          </a:p>
+          <a:p>
+            <a:pPr algn="l"/>
+            <a:r>
+              <a:rPr lang="en-US" sz="2000">
+                <a:latin typeface="Times New Roman" panose="02020603050405020304" pitchFamily="18" charset="0"/>
+                <a:cs typeface="Times New Roman" panose="02020603050405020304" pitchFamily="18" charset="0"/>
+              </a:rPr>
+              <a:t>• Image degradation significantly reduces visual information</a:t>
+            </a:r>
+            <a:endParaRPr lang="he-IL" sz="2000" dirty="0">
+              <a:latin typeface="Times New Roman" panose="02020603050405020304" pitchFamily="18" charset="0"/>
+              <a:cs typeface="Times New Roman" panose="02020603050405020304" pitchFamily="18" charset="0"/>
+            </a:endParaRPr>
           </a:p>
         </p:txBody>
       </p:sp>
     </p:spTree>
     <p:extLst>
       <p:ext uri="{BB962C8B-B14F-4D97-AF65-F5344CB8AC3E}">
-        <p14:creationId xmlns:p14="http://schemas.microsoft.com/office/powerpoint/2010/main" val="638548552"/>
+        <p14:creationId xmlns:p14="http://schemas.microsoft.com/office/powerpoint/2010/main" val="3251865690"/>
       </p:ext>
     </p:extLst>
   </p:cSld>
@@ -3776,7 +5027,7 @@
 </p:sld>
 </file>
 
-<file path=ppt/slides/slide3.xml><?xml version="1.0" encoding="utf-8"?>
+<file path=ppt/slides/slide14.xml><?xml version="1.0" encoding="utf-8"?>
 <p:sld xmlns:a="http://schemas.openxmlformats.org/drawingml/2006/main" xmlns:r="http://schemas.openxmlformats.org/officeDocument/2006/relationships" xmlns:p="http://schemas.openxmlformats.org/presentationml/2006/main">
   <p:cSld>
     <p:spTree>
@@ -3784,7 +5035,7 @@
         <p:cNvPr id="1" name="">
           <a:extLst>
             <a:ext uri="{FF2B5EF4-FFF2-40B4-BE49-F238E27FC236}">
-              <a16:creationId xmlns:a16="http://schemas.microsoft.com/office/drawing/2014/main" id="{CCBDE575-594C-B0F8-A618-F9762841152C}"/>
+              <a16:creationId xmlns:a16="http://schemas.microsoft.com/office/drawing/2014/main" id="{F2371D91-4549-E9B1-7842-E34881B1F82C}"/>
             </a:ext>
           </a:extLst>
         </p:cNvPr>
@@ -3804,7 +5055,7 @@
           <p:cNvPr id="7" name="כותרת משנה 6">
             <a:extLst>
               <a:ext uri="{FF2B5EF4-FFF2-40B4-BE49-F238E27FC236}">
-                <a16:creationId xmlns:a16="http://schemas.microsoft.com/office/drawing/2014/main" id="{2E883105-591D-5F7E-14BF-20B9197F31FA}"/>
+                <a16:creationId xmlns:a16="http://schemas.microsoft.com/office/drawing/2014/main" id="{667DC347-ED0B-A01C-84E0-8A288F2364CC}"/>
               </a:ext>
             </a:extLst>
           </p:cNvPr>
@@ -3815,19 +5066,287 @@
             <p:ph type="subTitle" idx="1"/>
           </p:nvPr>
         </p:nvSpPr>
-        <p:spPr/>
+        <p:spPr>
+          <a:xfrm>
+            <a:off x="1706880" y="658368"/>
+            <a:ext cx="9083040" cy="621792"/>
+          </a:xfrm>
+        </p:spPr>
         <p:txBody>
           <a:bodyPr/>
           <a:lstStyle/>
           <a:p>
-            <a:endParaRPr lang="he-IL" dirty="0"/>
+            <a:r>
+              <a:rPr lang="en-US" b="1" dirty="0">
+                <a:latin typeface="Times New Roman" panose="02020603050405020304" pitchFamily="18" charset="0"/>
+                <a:cs typeface="Times New Roman" panose="02020603050405020304" pitchFamily="18" charset="0"/>
+              </a:rPr>
+              <a:t>Current Project Progress</a:t>
+            </a:r>
+            <a:endParaRPr lang="en-US" dirty="0">
+              <a:latin typeface="Times New Roman" panose="02020603050405020304" pitchFamily="18" charset="0"/>
+              <a:cs typeface="Times New Roman" panose="02020603050405020304" pitchFamily="18" charset="0"/>
+            </a:endParaRPr>
+          </a:p>
+          <a:p>
+            <a:endParaRPr lang="he-IL" b="1" dirty="0">
+              <a:latin typeface="Times New Roman" panose="02020603050405020304" pitchFamily="18" charset="0"/>
+              <a:cs typeface="Times New Roman" panose="02020603050405020304" pitchFamily="18" charset="0"/>
+            </a:endParaRPr>
+          </a:p>
+        </p:txBody>
+      </p:sp>
+      <p:sp>
+        <p:nvSpPr>
+          <p:cNvPr id="11" name="כותרת משנה 6">
+            <a:extLst>
+              <a:ext uri="{FF2B5EF4-FFF2-40B4-BE49-F238E27FC236}">
+                <a16:creationId xmlns:a16="http://schemas.microsoft.com/office/drawing/2014/main" id="{830F60D1-685F-B65B-5D8A-D8253E96694A}"/>
+              </a:ext>
+            </a:extLst>
+          </p:cNvPr>
+          <p:cNvSpPr txBox="1">
+            <a:spLocks/>
+          </p:cNvSpPr>
+          <p:nvPr/>
+        </p:nvSpPr>
+        <p:spPr>
+          <a:xfrm>
+            <a:off x="1706880" y="1837944"/>
+            <a:ext cx="9211056" cy="4242816"/>
+          </a:xfrm>
+          <a:prstGeom prst="rect">
+            <a:avLst/>
+          </a:prstGeom>
+        </p:spPr>
+        <p:txBody>
+          <a:bodyPr vert="horz" lIns="91440" tIns="45720" rIns="91440" bIns="45720" rtlCol="1">
+            <a:normAutofit/>
+          </a:bodyPr>
+          <a:lstStyle>
+            <a:lvl1pPr marL="0" indent="0" algn="ctr" defTabSz="914400" rtl="1" eaLnBrk="1" latinLnBrk="0" hangingPunct="1">
+              <a:lnSpc>
+                <a:spcPct val="90000"/>
+              </a:lnSpc>
+              <a:spcBef>
+                <a:spcPts val="1000"/>
+              </a:spcBef>
+              <a:buFont typeface="Arial" panose="020B0604020202020204" pitchFamily="34" charset="0"/>
+              <a:buNone/>
+              <a:defRPr sz="2400" kern="1200">
+                <a:solidFill>
+                  <a:schemeClr val="tx1"/>
+                </a:solidFill>
+                <a:latin typeface="+mn-lt"/>
+                <a:ea typeface="+mn-ea"/>
+                <a:cs typeface="+mn-cs"/>
+              </a:defRPr>
+            </a:lvl1pPr>
+            <a:lvl2pPr marL="457200" indent="0" algn="ctr" defTabSz="914400" rtl="1" eaLnBrk="1" latinLnBrk="0" hangingPunct="1">
+              <a:lnSpc>
+                <a:spcPct val="90000"/>
+              </a:lnSpc>
+              <a:spcBef>
+                <a:spcPts val="500"/>
+              </a:spcBef>
+              <a:buFont typeface="Arial" panose="020B0604020202020204" pitchFamily="34" charset="0"/>
+              <a:buNone/>
+              <a:defRPr sz="2000" kern="1200">
+                <a:solidFill>
+                  <a:schemeClr val="tx1"/>
+                </a:solidFill>
+                <a:latin typeface="+mn-lt"/>
+                <a:ea typeface="+mn-ea"/>
+                <a:cs typeface="+mn-cs"/>
+              </a:defRPr>
+            </a:lvl2pPr>
+            <a:lvl3pPr marL="914400" indent="0" algn="ctr" defTabSz="914400" rtl="1" eaLnBrk="1" latinLnBrk="0" hangingPunct="1">
+              <a:lnSpc>
+                <a:spcPct val="90000"/>
+              </a:lnSpc>
+              <a:spcBef>
+                <a:spcPts val="500"/>
+              </a:spcBef>
+              <a:buFont typeface="Arial" panose="020B0604020202020204" pitchFamily="34" charset="0"/>
+              <a:buNone/>
+              <a:defRPr sz="1800" kern="1200">
+                <a:solidFill>
+                  <a:schemeClr val="tx1"/>
+                </a:solidFill>
+                <a:latin typeface="+mn-lt"/>
+                <a:ea typeface="+mn-ea"/>
+                <a:cs typeface="+mn-cs"/>
+              </a:defRPr>
+            </a:lvl3pPr>
+            <a:lvl4pPr marL="1371600" indent="0" algn="ctr" defTabSz="914400" rtl="1" eaLnBrk="1" latinLnBrk="0" hangingPunct="1">
+              <a:lnSpc>
+                <a:spcPct val="90000"/>
+              </a:lnSpc>
+              <a:spcBef>
+                <a:spcPts val="500"/>
+              </a:spcBef>
+              <a:buFont typeface="Arial" panose="020B0604020202020204" pitchFamily="34" charset="0"/>
+              <a:buNone/>
+              <a:defRPr sz="1600" kern="1200">
+                <a:solidFill>
+                  <a:schemeClr val="tx1"/>
+                </a:solidFill>
+                <a:latin typeface="+mn-lt"/>
+                <a:ea typeface="+mn-ea"/>
+                <a:cs typeface="+mn-cs"/>
+              </a:defRPr>
+            </a:lvl4pPr>
+            <a:lvl5pPr marL="1828800" indent="0" algn="ctr" defTabSz="914400" rtl="1" eaLnBrk="1" latinLnBrk="0" hangingPunct="1">
+              <a:lnSpc>
+                <a:spcPct val="90000"/>
+              </a:lnSpc>
+              <a:spcBef>
+                <a:spcPts val="500"/>
+              </a:spcBef>
+              <a:buFont typeface="Arial" panose="020B0604020202020204" pitchFamily="34" charset="0"/>
+              <a:buNone/>
+              <a:defRPr sz="1600" kern="1200">
+                <a:solidFill>
+                  <a:schemeClr val="tx1"/>
+                </a:solidFill>
+                <a:latin typeface="+mn-lt"/>
+                <a:ea typeface="+mn-ea"/>
+                <a:cs typeface="+mn-cs"/>
+              </a:defRPr>
+            </a:lvl5pPr>
+            <a:lvl6pPr marL="2286000" indent="0" algn="ctr" defTabSz="914400" rtl="1" eaLnBrk="1" latinLnBrk="0" hangingPunct="1">
+              <a:lnSpc>
+                <a:spcPct val="90000"/>
+              </a:lnSpc>
+              <a:spcBef>
+                <a:spcPts val="500"/>
+              </a:spcBef>
+              <a:buFont typeface="Arial" panose="020B0604020202020204" pitchFamily="34" charset="0"/>
+              <a:buNone/>
+              <a:defRPr sz="1600" kern="1200">
+                <a:solidFill>
+                  <a:schemeClr val="tx1"/>
+                </a:solidFill>
+                <a:latin typeface="+mn-lt"/>
+                <a:ea typeface="+mn-ea"/>
+                <a:cs typeface="+mn-cs"/>
+              </a:defRPr>
+            </a:lvl6pPr>
+            <a:lvl7pPr marL="2743200" indent="0" algn="ctr" defTabSz="914400" rtl="1" eaLnBrk="1" latinLnBrk="0" hangingPunct="1">
+              <a:lnSpc>
+                <a:spcPct val="90000"/>
+              </a:lnSpc>
+              <a:spcBef>
+                <a:spcPts val="500"/>
+              </a:spcBef>
+              <a:buFont typeface="Arial" panose="020B0604020202020204" pitchFamily="34" charset="0"/>
+              <a:buNone/>
+              <a:defRPr sz="1600" kern="1200">
+                <a:solidFill>
+                  <a:schemeClr val="tx1"/>
+                </a:solidFill>
+                <a:latin typeface="+mn-lt"/>
+                <a:ea typeface="+mn-ea"/>
+                <a:cs typeface="+mn-cs"/>
+              </a:defRPr>
+            </a:lvl7pPr>
+            <a:lvl8pPr marL="3200400" indent="0" algn="ctr" defTabSz="914400" rtl="1" eaLnBrk="1" latinLnBrk="0" hangingPunct="1">
+              <a:lnSpc>
+                <a:spcPct val="90000"/>
+              </a:lnSpc>
+              <a:spcBef>
+                <a:spcPts val="500"/>
+              </a:spcBef>
+              <a:buFont typeface="Arial" panose="020B0604020202020204" pitchFamily="34" charset="0"/>
+              <a:buNone/>
+              <a:defRPr sz="1600" kern="1200">
+                <a:solidFill>
+                  <a:schemeClr val="tx1"/>
+                </a:solidFill>
+                <a:latin typeface="+mn-lt"/>
+                <a:ea typeface="+mn-ea"/>
+                <a:cs typeface="+mn-cs"/>
+              </a:defRPr>
+            </a:lvl8pPr>
+            <a:lvl9pPr marL="3657600" indent="0" algn="ctr" defTabSz="914400" rtl="1" eaLnBrk="1" latinLnBrk="0" hangingPunct="1">
+              <a:lnSpc>
+                <a:spcPct val="90000"/>
+              </a:lnSpc>
+              <a:spcBef>
+                <a:spcPts val="500"/>
+              </a:spcBef>
+              <a:buFont typeface="Arial" panose="020B0604020202020204" pitchFamily="34" charset="0"/>
+              <a:buNone/>
+              <a:defRPr sz="1600" kern="1200">
+                <a:solidFill>
+                  <a:schemeClr val="tx1"/>
+                </a:solidFill>
+                <a:latin typeface="+mn-lt"/>
+                <a:ea typeface="+mn-ea"/>
+                <a:cs typeface="+mn-cs"/>
+              </a:defRPr>
+            </a:lvl9pPr>
+          </a:lstStyle>
+          <a:p>
+            <a:pPr algn="l"/>
+            <a:r>
+              <a:rPr lang="en-US" sz="2000">
+                <a:latin typeface="Times New Roman" panose="02020603050405020304" pitchFamily="18" charset="0"/>
+                <a:cs typeface="Times New Roman" panose="02020603050405020304" pitchFamily="18" charset="0"/>
+              </a:rPr>
+              <a:t>• CIFAR-10 dataset integrated into the pipeline</a:t>
+            </a:r>
+          </a:p>
+          <a:p>
+            <a:pPr algn="l"/>
+            <a:r>
+              <a:rPr lang="en-US" sz="2000">
+                <a:latin typeface="Times New Roman" panose="02020603050405020304" pitchFamily="18" charset="0"/>
+                <a:cs typeface="Times New Roman" panose="02020603050405020304" pitchFamily="18" charset="0"/>
+              </a:rPr>
+              <a:t>• Image degradation simulation implemented</a:t>
+            </a:r>
+          </a:p>
+          <a:p>
+            <a:pPr algn="l"/>
+            <a:r>
+              <a:rPr lang="en-US" sz="2000">
+                <a:latin typeface="Times New Roman" panose="02020603050405020304" pitchFamily="18" charset="0"/>
+                <a:cs typeface="Times New Roman" panose="02020603050405020304" pitchFamily="18" charset="0"/>
+              </a:rPr>
+              <a:t>• Training framework implemented in PyTorch</a:t>
+            </a:r>
+          </a:p>
+          <a:p>
+            <a:pPr algn="l"/>
+            <a:r>
+              <a:rPr lang="en-US" sz="2000">
+                <a:latin typeface="Times New Roman" panose="02020603050405020304" pitchFamily="18" charset="0"/>
+                <a:cs typeface="Times New Roman" panose="02020603050405020304" pitchFamily="18" charset="0"/>
+              </a:rPr>
+              <a:t>• Experiments conducted with ResNet50 and DenseNet121</a:t>
+            </a:r>
+          </a:p>
+          <a:p>
+            <a:pPr algn="l"/>
+            <a:r>
+              <a:rPr lang="en-US" sz="2000">
+                <a:latin typeface="Times New Roman" panose="02020603050405020304" pitchFamily="18" charset="0"/>
+                <a:cs typeface="Times New Roman" panose="02020603050405020304" pitchFamily="18" charset="0"/>
+              </a:rPr>
+              <a:t>• Automatic experiment logging and result tracking</a:t>
+            </a:r>
+            <a:endParaRPr lang="he-IL" sz="2000" dirty="0">
+              <a:latin typeface="Times New Roman" panose="02020603050405020304" pitchFamily="18" charset="0"/>
+              <a:cs typeface="Times New Roman" panose="02020603050405020304" pitchFamily="18" charset="0"/>
+            </a:endParaRPr>
           </a:p>
         </p:txBody>
       </p:sp>
     </p:spTree>
     <p:extLst>
       <p:ext uri="{BB962C8B-B14F-4D97-AF65-F5344CB8AC3E}">
-        <p14:creationId xmlns:p14="http://schemas.microsoft.com/office/powerpoint/2010/main" val="3236459224"/>
+        <p14:creationId xmlns:p14="http://schemas.microsoft.com/office/powerpoint/2010/main" val="3183823398"/>
       </p:ext>
     </p:extLst>
   </p:cSld>
@@ -3837,7 +5356,7 @@
 </p:sld>
 </file>
 
-<file path=ppt/slides/slide4.xml><?xml version="1.0" encoding="utf-8"?>
+<file path=ppt/slides/slide15.xml><?xml version="1.0" encoding="utf-8"?>
 <p:sld xmlns:a="http://schemas.openxmlformats.org/drawingml/2006/main" xmlns:r="http://schemas.openxmlformats.org/officeDocument/2006/relationships" xmlns:p="http://schemas.openxmlformats.org/presentationml/2006/main">
   <p:cSld>
     <p:spTree>
@@ -3845,7 +5364,7 @@
         <p:cNvPr id="1" name="">
           <a:extLst>
             <a:ext uri="{FF2B5EF4-FFF2-40B4-BE49-F238E27FC236}">
-              <a16:creationId xmlns:a16="http://schemas.microsoft.com/office/drawing/2014/main" id="{D636582D-B195-EB68-E087-1416DF7AD581}"/>
+              <a16:creationId xmlns:a16="http://schemas.microsoft.com/office/drawing/2014/main" id="{9A1B3EBE-2BF2-88F1-595F-5CB7548ABFCF}"/>
             </a:ext>
           </a:extLst>
         </p:cNvPr>
@@ -3865,7 +5384,7 @@
           <p:cNvPr id="7" name="כותרת משנה 6">
             <a:extLst>
               <a:ext uri="{FF2B5EF4-FFF2-40B4-BE49-F238E27FC236}">
-                <a16:creationId xmlns:a16="http://schemas.microsoft.com/office/drawing/2014/main" id="{468485D9-25A8-FA0B-9DC6-131C077B1219}"/>
+                <a16:creationId xmlns:a16="http://schemas.microsoft.com/office/drawing/2014/main" id="{00A73E7E-42AC-7D67-E5C9-D82599C7675D}"/>
               </a:ext>
             </a:extLst>
           </p:cNvPr>
@@ -3876,19 +5395,277 @@
             <p:ph type="subTitle" idx="1"/>
           </p:nvPr>
         </p:nvSpPr>
-        <p:spPr/>
+        <p:spPr>
+          <a:xfrm>
+            <a:off x="1706880" y="658368"/>
+            <a:ext cx="9147048" cy="630936"/>
+          </a:xfrm>
+        </p:spPr>
         <p:txBody>
           <a:bodyPr/>
           <a:lstStyle/>
           <a:p>
-            <a:endParaRPr lang="he-IL" dirty="0"/>
+            <a:r>
+              <a:rPr lang="en-US" b="1" dirty="0">
+                <a:latin typeface="Times New Roman" panose="02020603050405020304" pitchFamily="18" charset="0"/>
+                <a:cs typeface="Times New Roman" panose="02020603050405020304" pitchFamily="18" charset="0"/>
+              </a:rPr>
+              <a:t>Future Work</a:t>
+            </a:r>
+            <a:endParaRPr lang="en-US" dirty="0">
+              <a:latin typeface="Times New Roman" panose="02020603050405020304" pitchFamily="18" charset="0"/>
+              <a:cs typeface="Times New Roman" panose="02020603050405020304" pitchFamily="18" charset="0"/>
+            </a:endParaRPr>
+          </a:p>
+          <a:p>
+            <a:endParaRPr lang="he-IL" b="1" dirty="0">
+              <a:latin typeface="Times New Roman" panose="02020603050405020304" pitchFamily="18" charset="0"/>
+              <a:cs typeface="Times New Roman" panose="02020603050405020304" pitchFamily="18" charset="0"/>
+            </a:endParaRPr>
+          </a:p>
+        </p:txBody>
+      </p:sp>
+      <p:sp>
+        <p:nvSpPr>
+          <p:cNvPr id="11" name="כותרת משנה 6">
+            <a:extLst>
+              <a:ext uri="{FF2B5EF4-FFF2-40B4-BE49-F238E27FC236}">
+                <a16:creationId xmlns:a16="http://schemas.microsoft.com/office/drawing/2014/main" id="{00B55ACF-5067-BCCB-9758-E2A0D2F6CE12}"/>
+              </a:ext>
+            </a:extLst>
+          </p:cNvPr>
+          <p:cNvSpPr txBox="1">
+            <a:spLocks/>
+          </p:cNvSpPr>
+          <p:nvPr/>
+        </p:nvSpPr>
+        <p:spPr>
+          <a:xfrm>
+            <a:off x="1706880" y="1837944"/>
+            <a:ext cx="9211056" cy="4242816"/>
+          </a:xfrm>
+          <a:prstGeom prst="rect">
+            <a:avLst/>
+          </a:prstGeom>
+        </p:spPr>
+        <p:txBody>
+          <a:bodyPr vert="horz" lIns="91440" tIns="45720" rIns="91440" bIns="45720" rtlCol="1">
+            <a:normAutofit/>
+          </a:bodyPr>
+          <a:lstStyle>
+            <a:lvl1pPr marL="0" indent="0" algn="ctr" defTabSz="914400" rtl="1" eaLnBrk="1" latinLnBrk="0" hangingPunct="1">
+              <a:lnSpc>
+                <a:spcPct val="90000"/>
+              </a:lnSpc>
+              <a:spcBef>
+                <a:spcPts val="1000"/>
+              </a:spcBef>
+              <a:buFont typeface="Arial" panose="020B0604020202020204" pitchFamily="34" charset="0"/>
+              <a:buNone/>
+              <a:defRPr sz="2400" kern="1200">
+                <a:solidFill>
+                  <a:schemeClr val="tx1"/>
+                </a:solidFill>
+                <a:latin typeface="+mn-lt"/>
+                <a:ea typeface="+mn-ea"/>
+                <a:cs typeface="+mn-cs"/>
+              </a:defRPr>
+            </a:lvl1pPr>
+            <a:lvl2pPr marL="457200" indent="0" algn="ctr" defTabSz="914400" rtl="1" eaLnBrk="1" latinLnBrk="0" hangingPunct="1">
+              <a:lnSpc>
+                <a:spcPct val="90000"/>
+              </a:lnSpc>
+              <a:spcBef>
+                <a:spcPts val="500"/>
+              </a:spcBef>
+              <a:buFont typeface="Arial" panose="020B0604020202020204" pitchFamily="34" charset="0"/>
+              <a:buNone/>
+              <a:defRPr sz="2000" kern="1200">
+                <a:solidFill>
+                  <a:schemeClr val="tx1"/>
+                </a:solidFill>
+                <a:latin typeface="+mn-lt"/>
+                <a:ea typeface="+mn-ea"/>
+                <a:cs typeface="+mn-cs"/>
+              </a:defRPr>
+            </a:lvl2pPr>
+            <a:lvl3pPr marL="914400" indent="0" algn="ctr" defTabSz="914400" rtl="1" eaLnBrk="1" latinLnBrk="0" hangingPunct="1">
+              <a:lnSpc>
+                <a:spcPct val="90000"/>
+              </a:lnSpc>
+              <a:spcBef>
+                <a:spcPts val="500"/>
+              </a:spcBef>
+              <a:buFont typeface="Arial" panose="020B0604020202020204" pitchFamily="34" charset="0"/>
+              <a:buNone/>
+              <a:defRPr sz="1800" kern="1200">
+                <a:solidFill>
+                  <a:schemeClr val="tx1"/>
+                </a:solidFill>
+                <a:latin typeface="+mn-lt"/>
+                <a:ea typeface="+mn-ea"/>
+                <a:cs typeface="+mn-cs"/>
+              </a:defRPr>
+            </a:lvl3pPr>
+            <a:lvl4pPr marL="1371600" indent="0" algn="ctr" defTabSz="914400" rtl="1" eaLnBrk="1" latinLnBrk="0" hangingPunct="1">
+              <a:lnSpc>
+                <a:spcPct val="90000"/>
+              </a:lnSpc>
+              <a:spcBef>
+                <a:spcPts val="500"/>
+              </a:spcBef>
+              <a:buFont typeface="Arial" panose="020B0604020202020204" pitchFamily="34" charset="0"/>
+              <a:buNone/>
+              <a:defRPr sz="1600" kern="1200">
+                <a:solidFill>
+                  <a:schemeClr val="tx1"/>
+                </a:solidFill>
+                <a:latin typeface="+mn-lt"/>
+                <a:ea typeface="+mn-ea"/>
+                <a:cs typeface="+mn-cs"/>
+              </a:defRPr>
+            </a:lvl4pPr>
+            <a:lvl5pPr marL="1828800" indent="0" algn="ctr" defTabSz="914400" rtl="1" eaLnBrk="1" latinLnBrk="0" hangingPunct="1">
+              <a:lnSpc>
+                <a:spcPct val="90000"/>
+              </a:lnSpc>
+              <a:spcBef>
+                <a:spcPts val="500"/>
+              </a:spcBef>
+              <a:buFont typeface="Arial" panose="020B0604020202020204" pitchFamily="34" charset="0"/>
+              <a:buNone/>
+              <a:defRPr sz="1600" kern="1200">
+                <a:solidFill>
+                  <a:schemeClr val="tx1"/>
+                </a:solidFill>
+                <a:latin typeface="+mn-lt"/>
+                <a:ea typeface="+mn-ea"/>
+                <a:cs typeface="+mn-cs"/>
+              </a:defRPr>
+            </a:lvl5pPr>
+            <a:lvl6pPr marL="2286000" indent="0" algn="ctr" defTabSz="914400" rtl="1" eaLnBrk="1" latinLnBrk="0" hangingPunct="1">
+              <a:lnSpc>
+                <a:spcPct val="90000"/>
+              </a:lnSpc>
+              <a:spcBef>
+                <a:spcPts val="500"/>
+              </a:spcBef>
+              <a:buFont typeface="Arial" panose="020B0604020202020204" pitchFamily="34" charset="0"/>
+              <a:buNone/>
+              <a:defRPr sz="1600" kern="1200">
+                <a:solidFill>
+                  <a:schemeClr val="tx1"/>
+                </a:solidFill>
+                <a:latin typeface="+mn-lt"/>
+                <a:ea typeface="+mn-ea"/>
+                <a:cs typeface="+mn-cs"/>
+              </a:defRPr>
+            </a:lvl6pPr>
+            <a:lvl7pPr marL="2743200" indent="0" algn="ctr" defTabSz="914400" rtl="1" eaLnBrk="1" latinLnBrk="0" hangingPunct="1">
+              <a:lnSpc>
+                <a:spcPct val="90000"/>
+              </a:lnSpc>
+              <a:spcBef>
+                <a:spcPts val="500"/>
+              </a:spcBef>
+              <a:buFont typeface="Arial" panose="020B0604020202020204" pitchFamily="34" charset="0"/>
+              <a:buNone/>
+              <a:defRPr sz="1600" kern="1200">
+                <a:solidFill>
+                  <a:schemeClr val="tx1"/>
+                </a:solidFill>
+                <a:latin typeface="+mn-lt"/>
+                <a:ea typeface="+mn-ea"/>
+                <a:cs typeface="+mn-cs"/>
+              </a:defRPr>
+            </a:lvl7pPr>
+            <a:lvl8pPr marL="3200400" indent="0" algn="ctr" defTabSz="914400" rtl="1" eaLnBrk="1" latinLnBrk="0" hangingPunct="1">
+              <a:lnSpc>
+                <a:spcPct val="90000"/>
+              </a:lnSpc>
+              <a:spcBef>
+                <a:spcPts val="500"/>
+              </a:spcBef>
+              <a:buFont typeface="Arial" panose="020B0604020202020204" pitchFamily="34" charset="0"/>
+              <a:buNone/>
+              <a:defRPr sz="1600" kern="1200">
+                <a:solidFill>
+                  <a:schemeClr val="tx1"/>
+                </a:solidFill>
+                <a:latin typeface="+mn-lt"/>
+                <a:ea typeface="+mn-ea"/>
+                <a:cs typeface="+mn-cs"/>
+              </a:defRPr>
+            </a:lvl8pPr>
+            <a:lvl9pPr marL="3657600" indent="0" algn="ctr" defTabSz="914400" rtl="1" eaLnBrk="1" latinLnBrk="0" hangingPunct="1">
+              <a:lnSpc>
+                <a:spcPct val="90000"/>
+              </a:lnSpc>
+              <a:spcBef>
+                <a:spcPts val="500"/>
+              </a:spcBef>
+              <a:buFont typeface="Arial" panose="020B0604020202020204" pitchFamily="34" charset="0"/>
+              <a:buNone/>
+              <a:defRPr sz="1600" kern="1200">
+                <a:solidFill>
+                  <a:schemeClr val="tx1"/>
+                </a:solidFill>
+                <a:latin typeface="+mn-lt"/>
+                <a:ea typeface="+mn-ea"/>
+                <a:cs typeface="+mn-cs"/>
+              </a:defRPr>
+            </a:lvl9pPr>
+          </a:lstStyle>
+          <a:p>
+            <a:pPr algn="l"/>
+            <a:r>
+              <a:rPr lang="en-US" sz="2000">
+                <a:latin typeface="Times New Roman" panose="02020603050405020304" pitchFamily="18" charset="0"/>
+                <a:cs typeface="Times New Roman" panose="02020603050405020304" pitchFamily="18" charset="0"/>
+              </a:rPr>
+              <a:t>• Additional experiments with the TransNeXt architecture</a:t>
+            </a:r>
+          </a:p>
+          <a:p>
+            <a:pPr algn="l"/>
+            <a:r>
+              <a:rPr lang="en-US" sz="2000">
+                <a:latin typeface="Times New Roman" panose="02020603050405020304" pitchFamily="18" charset="0"/>
+                <a:cs typeface="Times New Roman" panose="02020603050405020304" pitchFamily="18" charset="0"/>
+              </a:rPr>
+              <a:t>• Training with additional degradation levels</a:t>
+            </a:r>
+          </a:p>
+          <a:p>
+            <a:pPr algn="l"/>
+            <a:r>
+              <a:rPr lang="en-US" sz="2000">
+                <a:latin typeface="Times New Roman" panose="02020603050405020304" pitchFamily="18" charset="0"/>
+                <a:cs typeface="Times New Roman" panose="02020603050405020304" pitchFamily="18" charset="0"/>
+              </a:rPr>
+              <a:t>• Experiments on additional datasets (e.g., MNIST)</a:t>
+            </a:r>
+          </a:p>
+          <a:p>
+            <a:pPr algn="l"/>
+            <a:r>
+              <a:rPr lang="en-US" sz="2000">
+                <a:latin typeface="Times New Roman" panose="02020603050405020304" pitchFamily="18" charset="0"/>
+                <a:cs typeface="Times New Roman" panose="02020603050405020304" pitchFamily="18" charset="0"/>
+              </a:rPr>
+              <a:t>• Hyperparameter tuning and model optimization</a:t>
+            </a:r>
+            <a:endParaRPr lang="he-IL" sz="2000" dirty="0">
+              <a:latin typeface="Times New Roman" panose="02020603050405020304" pitchFamily="18" charset="0"/>
+              <a:cs typeface="Times New Roman" panose="02020603050405020304" pitchFamily="18" charset="0"/>
+            </a:endParaRPr>
           </a:p>
         </p:txBody>
       </p:sp>
     </p:spTree>
     <p:extLst>
       <p:ext uri="{BB962C8B-B14F-4D97-AF65-F5344CB8AC3E}">
-        <p14:creationId xmlns:p14="http://schemas.microsoft.com/office/powerpoint/2010/main" val="4088278371"/>
+        <p14:creationId xmlns:p14="http://schemas.microsoft.com/office/powerpoint/2010/main" val="2415514594"/>
       </p:ext>
     </p:extLst>
   </p:cSld>
@@ -3898,7 +5675,7 @@
 </p:sld>
 </file>
 
-<file path=ppt/slides/slide5.xml><?xml version="1.0" encoding="utf-8"?>
+<file path=ppt/slides/slide16.xml><?xml version="1.0" encoding="utf-8"?>
 <p:sld xmlns:a="http://schemas.openxmlformats.org/drawingml/2006/main" xmlns:r="http://schemas.openxmlformats.org/officeDocument/2006/relationships" xmlns:p="http://schemas.openxmlformats.org/presentationml/2006/main">
   <p:cSld>
     <p:spTree>
@@ -3906,7 +5683,7 @@
         <p:cNvPr id="1" name="">
           <a:extLst>
             <a:ext uri="{FF2B5EF4-FFF2-40B4-BE49-F238E27FC236}">
-              <a16:creationId xmlns:a16="http://schemas.microsoft.com/office/drawing/2014/main" id="{C56AE637-8554-DAB4-6FF5-967855696C81}"/>
+              <a16:creationId xmlns:a16="http://schemas.microsoft.com/office/drawing/2014/main" id="{7C7BD5A5-7DD3-327F-E70B-2F397715367D}"/>
             </a:ext>
           </a:extLst>
         </p:cNvPr>
@@ -3926,7 +5703,7 @@
           <p:cNvPr id="7" name="כותרת משנה 6">
             <a:extLst>
               <a:ext uri="{FF2B5EF4-FFF2-40B4-BE49-F238E27FC236}">
-                <a16:creationId xmlns:a16="http://schemas.microsoft.com/office/drawing/2014/main" id="{A4B54CA5-F8A7-D824-3D36-7332D3A08462}"/>
+                <a16:creationId xmlns:a16="http://schemas.microsoft.com/office/drawing/2014/main" id="{C9C2C2BF-36E6-54DD-B472-485423339D2E}"/>
               </a:ext>
             </a:extLst>
           </p:cNvPr>
@@ -3937,19 +5714,227 @@
             <p:ph type="subTitle" idx="1"/>
           </p:nvPr>
         </p:nvSpPr>
-        <p:spPr/>
+        <p:spPr>
+          <a:xfrm>
+            <a:off x="1706880" y="658368"/>
+            <a:ext cx="9144000" cy="978408"/>
+          </a:xfrm>
+        </p:spPr>
         <p:txBody>
           <a:bodyPr/>
           <a:lstStyle/>
           <a:p>
-            <a:endParaRPr lang="he-IL" dirty="0"/>
+            <a:endParaRPr lang="he-IL" b="1" dirty="0">
+              <a:latin typeface="Times New Roman" panose="02020603050405020304" pitchFamily="18" charset="0"/>
+              <a:cs typeface="Times New Roman" panose="02020603050405020304" pitchFamily="18" charset="0"/>
+            </a:endParaRPr>
+          </a:p>
+        </p:txBody>
+      </p:sp>
+      <p:sp>
+        <p:nvSpPr>
+          <p:cNvPr id="11" name="כותרת משנה 6">
+            <a:extLst>
+              <a:ext uri="{FF2B5EF4-FFF2-40B4-BE49-F238E27FC236}">
+                <a16:creationId xmlns:a16="http://schemas.microsoft.com/office/drawing/2014/main" id="{06AF8AF8-C260-ED8A-9893-826EC699CC11}"/>
+              </a:ext>
+            </a:extLst>
+          </p:cNvPr>
+          <p:cNvSpPr txBox="1">
+            <a:spLocks/>
+          </p:cNvSpPr>
+          <p:nvPr/>
+        </p:nvSpPr>
+        <p:spPr>
+          <a:xfrm>
+            <a:off x="1706880" y="1837944"/>
+            <a:ext cx="9211056" cy="4242816"/>
+          </a:xfrm>
+          <a:prstGeom prst="rect">
+            <a:avLst/>
+          </a:prstGeom>
+        </p:spPr>
+        <p:txBody>
+          <a:bodyPr vert="horz" lIns="91440" tIns="45720" rIns="91440" bIns="45720" rtlCol="1">
+            <a:normAutofit/>
+          </a:bodyPr>
+          <a:lstStyle>
+            <a:lvl1pPr marL="0" indent="0" algn="ctr" defTabSz="914400" rtl="1" eaLnBrk="1" latinLnBrk="0" hangingPunct="1">
+              <a:lnSpc>
+                <a:spcPct val="90000"/>
+              </a:lnSpc>
+              <a:spcBef>
+                <a:spcPts val="1000"/>
+              </a:spcBef>
+              <a:buFont typeface="Arial" panose="020B0604020202020204" pitchFamily="34" charset="0"/>
+              <a:buNone/>
+              <a:defRPr sz="2400" kern="1200">
+                <a:solidFill>
+                  <a:schemeClr val="tx1"/>
+                </a:solidFill>
+                <a:latin typeface="+mn-lt"/>
+                <a:ea typeface="+mn-ea"/>
+                <a:cs typeface="+mn-cs"/>
+              </a:defRPr>
+            </a:lvl1pPr>
+            <a:lvl2pPr marL="457200" indent="0" algn="ctr" defTabSz="914400" rtl="1" eaLnBrk="1" latinLnBrk="0" hangingPunct="1">
+              <a:lnSpc>
+                <a:spcPct val="90000"/>
+              </a:lnSpc>
+              <a:spcBef>
+                <a:spcPts val="500"/>
+              </a:spcBef>
+              <a:buFont typeface="Arial" panose="020B0604020202020204" pitchFamily="34" charset="0"/>
+              <a:buNone/>
+              <a:defRPr sz="2000" kern="1200">
+                <a:solidFill>
+                  <a:schemeClr val="tx1"/>
+                </a:solidFill>
+                <a:latin typeface="+mn-lt"/>
+                <a:ea typeface="+mn-ea"/>
+                <a:cs typeface="+mn-cs"/>
+              </a:defRPr>
+            </a:lvl2pPr>
+            <a:lvl3pPr marL="914400" indent="0" algn="ctr" defTabSz="914400" rtl="1" eaLnBrk="1" latinLnBrk="0" hangingPunct="1">
+              <a:lnSpc>
+                <a:spcPct val="90000"/>
+              </a:lnSpc>
+              <a:spcBef>
+                <a:spcPts val="500"/>
+              </a:spcBef>
+              <a:buFont typeface="Arial" panose="020B0604020202020204" pitchFamily="34" charset="0"/>
+              <a:buNone/>
+              <a:defRPr sz="1800" kern="1200">
+                <a:solidFill>
+                  <a:schemeClr val="tx1"/>
+                </a:solidFill>
+                <a:latin typeface="+mn-lt"/>
+                <a:ea typeface="+mn-ea"/>
+                <a:cs typeface="+mn-cs"/>
+              </a:defRPr>
+            </a:lvl3pPr>
+            <a:lvl4pPr marL="1371600" indent="0" algn="ctr" defTabSz="914400" rtl="1" eaLnBrk="1" latinLnBrk="0" hangingPunct="1">
+              <a:lnSpc>
+                <a:spcPct val="90000"/>
+              </a:lnSpc>
+              <a:spcBef>
+                <a:spcPts val="500"/>
+              </a:spcBef>
+              <a:buFont typeface="Arial" panose="020B0604020202020204" pitchFamily="34" charset="0"/>
+              <a:buNone/>
+              <a:defRPr sz="1600" kern="1200">
+                <a:solidFill>
+                  <a:schemeClr val="tx1"/>
+                </a:solidFill>
+                <a:latin typeface="+mn-lt"/>
+                <a:ea typeface="+mn-ea"/>
+                <a:cs typeface="+mn-cs"/>
+              </a:defRPr>
+            </a:lvl4pPr>
+            <a:lvl5pPr marL="1828800" indent="0" algn="ctr" defTabSz="914400" rtl="1" eaLnBrk="1" latinLnBrk="0" hangingPunct="1">
+              <a:lnSpc>
+                <a:spcPct val="90000"/>
+              </a:lnSpc>
+              <a:spcBef>
+                <a:spcPts val="500"/>
+              </a:spcBef>
+              <a:buFont typeface="Arial" panose="020B0604020202020204" pitchFamily="34" charset="0"/>
+              <a:buNone/>
+              <a:defRPr sz="1600" kern="1200">
+                <a:solidFill>
+                  <a:schemeClr val="tx1"/>
+                </a:solidFill>
+                <a:latin typeface="+mn-lt"/>
+                <a:ea typeface="+mn-ea"/>
+                <a:cs typeface="+mn-cs"/>
+              </a:defRPr>
+            </a:lvl5pPr>
+            <a:lvl6pPr marL="2286000" indent="0" algn="ctr" defTabSz="914400" rtl="1" eaLnBrk="1" latinLnBrk="0" hangingPunct="1">
+              <a:lnSpc>
+                <a:spcPct val="90000"/>
+              </a:lnSpc>
+              <a:spcBef>
+                <a:spcPts val="500"/>
+              </a:spcBef>
+              <a:buFont typeface="Arial" panose="020B0604020202020204" pitchFamily="34" charset="0"/>
+              <a:buNone/>
+              <a:defRPr sz="1600" kern="1200">
+                <a:solidFill>
+                  <a:schemeClr val="tx1"/>
+                </a:solidFill>
+                <a:latin typeface="+mn-lt"/>
+                <a:ea typeface="+mn-ea"/>
+                <a:cs typeface="+mn-cs"/>
+              </a:defRPr>
+            </a:lvl6pPr>
+            <a:lvl7pPr marL="2743200" indent="0" algn="ctr" defTabSz="914400" rtl="1" eaLnBrk="1" latinLnBrk="0" hangingPunct="1">
+              <a:lnSpc>
+                <a:spcPct val="90000"/>
+              </a:lnSpc>
+              <a:spcBef>
+                <a:spcPts val="500"/>
+              </a:spcBef>
+              <a:buFont typeface="Arial" panose="020B0604020202020204" pitchFamily="34" charset="0"/>
+              <a:buNone/>
+              <a:defRPr sz="1600" kern="1200">
+                <a:solidFill>
+                  <a:schemeClr val="tx1"/>
+                </a:solidFill>
+                <a:latin typeface="+mn-lt"/>
+                <a:ea typeface="+mn-ea"/>
+                <a:cs typeface="+mn-cs"/>
+              </a:defRPr>
+            </a:lvl7pPr>
+            <a:lvl8pPr marL="3200400" indent="0" algn="ctr" defTabSz="914400" rtl="1" eaLnBrk="1" latinLnBrk="0" hangingPunct="1">
+              <a:lnSpc>
+                <a:spcPct val="90000"/>
+              </a:lnSpc>
+              <a:spcBef>
+                <a:spcPts val="500"/>
+              </a:spcBef>
+              <a:buFont typeface="Arial" panose="020B0604020202020204" pitchFamily="34" charset="0"/>
+              <a:buNone/>
+              <a:defRPr sz="1600" kern="1200">
+                <a:solidFill>
+                  <a:schemeClr val="tx1"/>
+                </a:solidFill>
+                <a:latin typeface="+mn-lt"/>
+                <a:ea typeface="+mn-ea"/>
+                <a:cs typeface="+mn-cs"/>
+              </a:defRPr>
+            </a:lvl8pPr>
+            <a:lvl9pPr marL="3657600" indent="0" algn="ctr" defTabSz="914400" rtl="1" eaLnBrk="1" latinLnBrk="0" hangingPunct="1">
+              <a:lnSpc>
+                <a:spcPct val="90000"/>
+              </a:lnSpc>
+              <a:spcBef>
+                <a:spcPts val="500"/>
+              </a:spcBef>
+              <a:buFont typeface="Arial" panose="020B0604020202020204" pitchFamily="34" charset="0"/>
+              <a:buNone/>
+              <a:defRPr sz="1600" kern="1200">
+                <a:solidFill>
+                  <a:schemeClr val="tx1"/>
+                </a:solidFill>
+                <a:latin typeface="+mn-lt"/>
+                <a:ea typeface="+mn-ea"/>
+                <a:cs typeface="+mn-cs"/>
+              </a:defRPr>
+            </a:lvl9pPr>
+          </a:lstStyle>
+          <a:p>
+            <a:pPr algn="l"/>
+            <a:endParaRPr lang="he-IL" sz="2000" dirty="0">
+              <a:latin typeface="Times New Roman" panose="02020603050405020304" pitchFamily="18" charset="0"/>
+              <a:cs typeface="Times New Roman" panose="02020603050405020304" pitchFamily="18" charset="0"/>
+            </a:endParaRPr>
           </a:p>
         </p:txBody>
       </p:sp>
     </p:spTree>
     <p:extLst>
       <p:ext uri="{BB962C8B-B14F-4D97-AF65-F5344CB8AC3E}">
-        <p14:creationId xmlns:p14="http://schemas.microsoft.com/office/powerpoint/2010/main" val="957976967"/>
+        <p14:creationId xmlns:p14="http://schemas.microsoft.com/office/powerpoint/2010/main" val="1907182606"/>
       </p:ext>
     </p:extLst>
   </p:cSld>
@@ -3959,7 +5944,7 @@
 </p:sld>
 </file>
 
-<file path=ppt/slides/slide6.xml><?xml version="1.0" encoding="utf-8"?>
+<file path=ppt/slides/slide2.xml><?xml version="1.0" encoding="utf-8"?>
 <p:sld xmlns:a="http://schemas.openxmlformats.org/drawingml/2006/main" xmlns:r="http://schemas.openxmlformats.org/officeDocument/2006/relationships" xmlns:p="http://schemas.openxmlformats.org/presentationml/2006/main">
   <p:cSld>
     <p:spTree>
@@ -3967,7 +5952,7 @@
         <p:cNvPr id="1" name="">
           <a:extLst>
             <a:ext uri="{FF2B5EF4-FFF2-40B4-BE49-F238E27FC236}">
-              <a16:creationId xmlns:a16="http://schemas.microsoft.com/office/drawing/2014/main" id="{4B05D3B0-A449-DB74-E319-E7829C0C21F6}"/>
+              <a16:creationId xmlns:a16="http://schemas.microsoft.com/office/drawing/2014/main" id="{268B1C04-0EC1-BADD-7631-222C10788C25}"/>
             </a:ext>
           </a:extLst>
         </p:cNvPr>
@@ -3987,7 +5972,7 @@
           <p:cNvPr id="7" name="כותרת משנה 6">
             <a:extLst>
               <a:ext uri="{FF2B5EF4-FFF2-40B4-BE49-F238E27FC236}">
-                <a16:creationId xmlns:a16="http://schemas.microsoft.com/office/drawing/2014/main" id="{423774B6-5CAE-8E25-4988-DAB5C90F7A5A}"/>
+                <a16:creationId xmlns:a16="http://schemas.microsoft.com/office/drawing/2014/main" id="{664CCE51-4307-E5B9-39B4-2FBE39FD6CA8}"/>
               </a:ext>
             </a:extLst>
           </p:cNvPr>
@@ -3998,19 +5983,314 @@
             <p:ph type="subTitle" idx="1"/>
           </p:nvPr>
         </p:nvSpPr>
-        <p:spPr/>
+        <p:spPr>
+          <a:xfrm>
+            <a:off x="1706880" y="658368"/>
+            <a:ext cx="9144000" cy="978408"/>
+          </a:xfrm>
+        </p:spPr>
         <p:txBody>
           <a:bodyPr/>
           <a:lstStyle/>
           <a:p>
-            <a:endParaRPr lang="he-IL" dirty="0"/>
+            <a:r>
+              <a:rPr lang="en-US" b="1" dirty="0">
+                <a:latin typeface="Times New Roman" panose="02020603050405020304" pitchFamily="18" charset="0"/>
+                <a:cs typeface="Times New Roman" panose="02020603050405020304" pitchFamily="18" charset="0"/>
+              </a:rPr>
+              <a:t>Motivation</a:t>
+            </a:r>
+          </a:p>
+          <a:p>
+            <a:r>
+              <a:rPr lang="en-US" b="1" dirty="0">
+                <a:latin typeface="Times New Roman" panose="02020603050405020304" pitchFamily="18" charset="0"/>
+                <a:cs typeface="Times New Roman" panose="02020603050405020304" pitchFamily="18" charset="0"/>
+              </a:rPr>
+              <a:t>Image Classification under Severe Image Degradation</a:t>
+            </a:r>
+            <a:endParaRPr lang="he-IL" b="1" dirty="0">
+              <a:latin typeface="Times New Roman" panose="02020603050405020304" pitchFamily="18" charset="0"/>
+              <a:cs typeface="Times New Roman" panose="02020603050405020304" pitchFamily="18" charset="0"/>
+            </a:endParaRPr>
+          </a:p>
+        </p:txBody>
+      </p:sp>
+      <p:sp>
+        <p:nvSpPr>
+          <p:cNvPr id="11" name="כותרת משנה 6">
+            <a:extLst>
+              <a:ext uri="{FF2B5EF4-FFF2-40B4-BE49-F238E27FC236}">
+                <a16:creationId xmlns:a16="http://schemas.microsoft.com/office/drawing/2014/main" id="{577EFE44-6F8D-FE07-D250-DBFE36559CA9}"/>
+              </a:ext>
+            </a:extLst>
+          </p:cNvPr>
+          <p:cNvSpPr txBox="1">
+            <a:spLocks/>
+          </p:cNvSpPr>
+          <p:nvPr/>
+        </p:nvSpPr>
+        <p:spPr>
+          <a:xfrm>
+            <a:off x="1706880" y="1837944"/>
+            <a:ext cx="9211056" cy="4242816"/>
+          </a:xfrm>
+          <a:prstGeom prst="rect">
+            <a:avLst/>
+          </a:prstGeom>
+        </p:spPr>
+        <p:txBody>
+          <a:bodyPr vert="horz" lIns="91440" tIns="45720" rIns="91440" bIns="45720" rtlCol="1">
+            <a:normAutofit/>
+          </a:bodyPr>
+          <a:lstStyle>
+            <a:lvl1pPr marL="0" indent="0" algn="ctr" defTabSz="914400" rtl="1" eaLnBrk="1" latinLnBrk="0" hangingPunct="1">
+              <a:lnSpc>
+                <a:spcPct val="90000"/>
+              </a:lnSpc>
+              <a:spcBef>
+                <a:spcPts val="1000"/>
+              </a:spcBef>
+              <a:buFont typeface="Arial" panose="020B0604020202020204" pitchFamily="34" charset="0"/>
+              <a:buNone/>
+              <a:defRPr sz="2400" kern="1200">
+                <a:solidFill>
+                  <a:schemeClr val="tx1"/>
+                </a:solidFill>
+                <a:latin typeface="+mn-lt"/>
+                <a:ea typeface="+mn-ea"/>
+                <a:cs typeface="+mn-cs"/>
+              </a:defRPr>
+            </a:lvl1pPr>
+            <a:lvl2pPr marL="457200" indent="0" algn="ctr" defTabSz="914400" rtl="1" eaLnBrk="1" latinLnBrk="0" hangingPunct="1">
+              <a:lnSpc>
+                <a:spcPct val="90000"/>
+              </a:lnSpc>
+              <a:spcBef>
+                <a:spcPts val="500"/>
+              </a:spcBef>
+              <a:buFont typeface="Arial" panose="020B0604020202020204" pitchFamily="34" charset="0"/>
+              <a:buNone/>
+              <a:defRPr sz="2000" kern="1200">
+                <a:solidFill>
+                  <a:schemeClr val="tx1"/>
+                </a:solidFill>
+                <a:latin typeface="+mn-lt"/>
+                <a:ea typeface="+mn-ea"/>
+                <a:cs typeface="+mn-cs"/>
+              </a:defRPr>
+            </a:lvl2pPr>
+            <a:lvl3pPr marL="914400" indent="0" algn="ctr" defTabSz="914400" rtl="1" eaLnBrk="1" latinLnBrk="0" hangingPunct="1">
+              <a:lnSpc>
+                <a:spcPct val="90000"/>
+              </a:lnSpc>
+              <a:spcBef>
+                <a:spcPts val="500"/>
+              </a:spcBef>
+              <a:buFont typeface="Arial" panose="020B0604020202020204" pitchFamily="34" charset="0"/>
+              <a:buNone/>
+              <a:defRPr sz="1800" kern="1200">
+                <a:solidFill>
+                  <a:schemeClr val="tx1"/>
+                </a:solidFill>
+                <a:latin typeface="+mn-lt"/>
+                <a:ea typeface="+mn-ea"/>
+                <a:cs typeface="+mn-cs"/>
+              </a:defRPr>
+            </a:lvl3pPr>
+            <a:lvl4pPr marL="1371600" indent="0" algn="ctr" defTabSz="914400" rtl="1" eaLnBrk="1" latinLnBrk="0" hangingPunct="1">
+              <a:lnSpc>
+                <a:spcPct val="90000"/>
+              </a:lnSpc>
+              <a:spcBef>
+                <a:spcPts val="500"/>
+              </a:spcBef>
+              <a:buFont typeface="Arial" panose="020B0604020202020204" pitchFamily="34" charset="0"/>
+              <a:buNone/>
+              <a:defRPr sz="1600" kern="1200">
+                <a:solidFill>
+                  <a:schemeClr val="tx1"/>
+                </a:solidFill>
+                <a:latin typeface="+mn-lt"/>
+                <a:ea typeface="+mn-ea"/>
+                <a:cs typeface="+mn-cs"/>
+              </a:defRPr>
+            </a:lvl4pPr>
+            <a:lvl5pPr marL="1828800" indent="0" algn="ctr" defTabSz="914400" rtl="1" eaLnBrk="1" latinLnBrk="0" hangingPunct="1">
+              <a:lnSpc>
+                <a:spcPct val="90000"/>
+              </a:lnSpc>
+              <a:spcBef>
+                <a:spcPts val="500"/>
+              </a:spcBef>
+              <a:buFont typeface="Arial" panose="020B0604020202020204" pitchFamily="34" charset="0"/>
+              <a:buNone/>
+              <a:defRPr sz="1600" kern="1200">
+                <a:solidFill>
+                  <a:schemeClr val="tx1"/>
+                </a:solidFill>
+                <a:latin typeface="+mn-lt"/>
+                <a:ea typeface="+mn-ea"/>
+                <a:cs typeface="+mn-cs"/>
+              </a:defRPr>
+            </a:lvl5pPr>
+            <a:lvl6pPr marL="2286000" indent="0" algn="ctr" defTabSz="914400" rtl="1" eaLnBrk="1" latinLnBrk="0" hangingPunct="1">
+              <a:lnSpc>
+                <a:spcPct val="90000"/>
+              </a:lnSpc>
+              <a:spcBef>
+                <a:spcPts val="500"/>
+              </a:spcBef>
+              <a:buFont typeface="Arial" panose="020B0604020202020204" pitchFamily="34" charset="0"/>
+              <a:buNone/>
+              <a:defRPr sz="1600" kern="1200">
+                <a:solidFill>
+                  <a:schemeClr val="tx1"/>
+                </a:solidFill>
+                <a:latin typeface="+mn-lt"/>
+                <a:ea typeface="+mn-ea"/>
+                <a:cs typeface="+mn-cs"/>
+              </a:defRPr>
+            </a:lvl6pPr>
+            <a:lvl7pPr marL="2743200" indent="0" algn="ctr" defTabSz="914400" rtl="1" eaLnBrk="1" latinLnBrk="0" hangingPunct="1">
+              <a:lnSpc>
+                <a:spcPct val="90000"/>
+              </a:lnSpc>
+              <a:spcBef>
+                <a:spcPts val="500"/>
+              </a:spcBef>
+              <a:buFont typeface="Arial" panose="020B0604020202020204" pitchFamily="34" charset="0"/>
+              <a:buNone/>
+              <a:defRPr sz="1600" kern="1200">
+                <a:solidFill>
+                  <a:schemeClr val="tx1"/>
+                </a:solidFill>
+                <a:latin typeface="+mn-lt"/>
+                <a:ea typeface="+mn-ea"/>
+                <a:cs typeface="+mn-cs"/>
+              </a:defRPr>
+            </a:lvl7pPr>
+            <a:lvl8pPr marL="3200400" indent="0" algn="ctr" defTabSz="914400" rtl="1" eaLnBrk="1" latinLnBrk="0" hangingPunct="1">
+              <a:lnSpc>
+                <a:spcPct val="90000"/>
+              </a:lnSpc>
+              <a:spcBef>
+                <a:spcPts val="500"/>
+              </a:spcBef>
+              <a:buFont typeface="Arial" panose="020B0604020202020204" pitchFamily="34" charset="0"/>
+              <a:buNone/>
+              <a:defRPr sz="1600" kern="1200">
+                <a:solidFill>
+                  <a:schemeClr val="tx1"/>
+                </a:solidFill>
+                <a:latin typeface="+mn-lt"/>
+                <a:ea typeface="+mn-ea"/>
+                <a:cs typeface="+mn-cs"/>
+              </a:defRPr>
+            </a:lvl8pPr>
+            <a:lvl9pPr marL="3657600" indent="0" algn="ctr" defTabSz="914400" rtl="1" eaLnBrk="1" latinLnBrk="0" hangingPunct="1">
+              <a:lnSpc>
+                <a:spcPct val="90000"/>
+              </a:lnSpc>
+              <a:spcBef>
+                <a:spcPts val="500"/>
+              </a:spcBef>
+              <a:buFont typeface="Arial" panose="020B0604020202020204" pitchFamily="34" charset="0"/>
+              <a:buNone/>
+              <a:defRPr sz="1600" kern="1200">
+                <a:solidFill>
+                  <a:schemeClr val="tx1"/>
+                </a:solidFill>
+                <a:latin typeface="+mn-lt"/>
+                <a:ea typeface="+mn-ea"/>
+                <a:cs typeface="+mn-cs"/>
+              </a:defRPr>
+            </a:lvl9pPr>
+          </a:lstStyle>
+          <a:p>
+            <a:pPr algn="l"/>
+            <a:r>
+              <a:rPr lang="en-US" sz="2000" dirty="0">
+                <a:latin typeface="Times New Roman" panose="02020603050405020304" pitchFamily="18" charset="0"/>
+                <a:cs typeface="Times New Roman" panose="02020603050405020304" pitchFamily="18" charset="0"/>
+              </a:rPr>
+              <a:t>Modern image classification systems assume high-quality images</a:t>
+            </a:r>
+          </a:p>
+          <a:p>
+            <a:pPr algn="l"/>
+            <a:endParaRPr lang="en-US" sz="2000" dirty="0">
+              <a:latin typeface="Times New Roman" panose="02020603050405020304" pitchFamily="18" charset="0"/>
+              <a:cs typeface="Times New Roman" panose="02020603050405020304" pitchFamily="18" charset="0"/>
+            </a:endParaRPr>
+          </a:p>
+          <a:p>
+            <a:pPr algn="l"/>
+            <a:r>
+              <a:rPr lang="en-US" sz="2000" dirty="0">
+                <a:latin typeface="Times New Roman" panose="02020603050405020304" pitchFamily="18" charset="0"/>
+                <a:cs typeface="Times New Roman" panose="02020603050405020304" pitchFamily="18" charset="0"/>
+              </a:rPr>
+              <a:t>However, many real-world sensors produce degraded images:</a:t>
+            </a:r>
+          </a:p>
+          <a:p>
+            <a:pPr algn="l"/>
+            <a:r>
+              <a:rPr lang="en-US" sz="2000" dirty="0">
+                <a:latin typeface="Times New Roman" panose="02020603050405020304" pitchFamily="18" charset="0"/>
+                <a:cs typeface="Times New Roman" panose="02020603050405020304" pitchFamily="18" charset="0"/>
+              </a:rPr>
+              <a:t>• Low resolution</a:t>
+            </a:r>
+          </a:p>
+          <a:p>
+            <a:pPr algn="l"/>
+            <a:r>
+              <a:rPr lang="en-US" sz="2000" dirty="0">
+                <a:latin typeface="Times New Roman" panose="02020603050405020304" pitchFamily="18" charset="0"/>
+                <a:cs typeface="Times New Roman" panose="02020603050405020304" pitchFamily="18" charset="0"/>
+              </a:rPr>
+              <a:t>• High noise</a:t>
+            </a:r>
+          </a:p>
+          <a:p>
+            <a:pPr algn="l"/>
+            <a:r>
+              <a:rPr lang="en-US" sz="2000" dirty="0">
+                <a:latin typeface="Times New Roman" panose="02020603050405020304" pitchFamily="18" charset="0"/>
+                <a:cs typeface="Times New Roman" panose="02020603050405020304" pitchFamily="18" charset="0"/>
+              </a:rPr>
+              <a:t>• Blurring and loss of details</a:t>
+            </a:r>
+          </a:p>
+          <a:p>
+            <a:pPr algn="l"/>
+            <a:endParaRPr lang="en-US" sz="2000" dirty="0">
+              <a:latin typeface="Times New Roman" panose="02020603050405020304" pitchFamily="18" charset="0"/>
+              <a:cs typeface="Times New Roman" panose="02020603050405020304" pitchFamily="18" charset="0"/>
+            </a:endParaRPr>
+          </a:p>
+          <a:p>
+            <a:pPr algn="l"/>
+            <a:r>
+              <a:rPr lang="en-US" sz="2000" dirty="0">
+                <a:latin typeface="Times New Roman" panose="02020603050405020304" pitchFamily="18" charset="0"/>
+                <a:cs typeface="Times New Roman" panose="02020603050405020304" pitchFamily="18" charset="0"/>
+              </a:rPr>
+              <a:t>This significantly reduces classification accuracy</a:t>
+            </a:r>
+            <a:endParaRPr lang="he-IL" sz="2000" dirty="0">
+              <a:latin typeface="Times New Roman" panose="02020603050405020304" pitchFamily="18" charset="0"/>
+              <a:cs typeface="Times New Roman" panose="02020603050405020304" pitchFamily="18" charset="0"/>
+            </a:endParaRPr>
           </a:p>
         </p:txBody>
       </p:sp>
     </p:spTree>
     <p:extLst>
       <p:ext uri="{BB962C8B-B14F-4D97-AF65-F5344CB8AC3E}">
-        <p14:creationId xmlns:p14="http://schemas.microsoft.com/office/powerpoint/2010/main" val="2591954172"/>
+        <p14:creationId xmlns:p14="http://schemas.microsoft.com/office/powerpoint/2010/main" val="4087681218"/>
       </p:ext>
     </p:extLst>
   </p:cSld>
@@ -4020,7 +6300,7 @@
 </p:sld>
 </file>
 
-<file path=ppt/slides/slide7.xml><?xml version="1.0" encoding="utf-8"?>
+<file path=ppt/slides/slide3.xml><?xml version="1.0" encoding="utf-8"?>
 <p:sld xmlns:a="http://schemas.openxmlformats.org/drawingml/2006/main" xmlns:r="http://schemas.openxmlformats.org/officeDocument/2006/relationships" xmlns:p="http://schemas.openxmlformats.org/presentationml/2006/main">
   <p:cSld>
     <p:spTree>
@@ -4028,7 +6308,7 @@
         <p:cNvPr id="1" name="">
           <a:extLst>
             <a:ext uri="{FF2B5EF4-FFF2-40B4-BE49-F238E27FC236}">
-              <a16:creationId xmlns:a16="http://schemas.microsoft.com/office/drawing/2014/main" id="{04493C51-C374-D00F-84ED-81DB664E1E24}"/>
+              <a16:creationId xmlns:a16="http://schemas.microsoft.com/office/drawing/2014/main" id="{A453B24D-A8FA-5C7A-8704-7D9641473554}"/>
             </a:ext>
           </a:extLst>
         </p:cNvPr>
@@ -4048,7 +6328,7 @@
           <p:cNvPr id="7" name="כותרת משנה 6">
             <a:extLst>
               <a:ext uri="{FF2B5EF4-FFF2-40B4-BE49-F238E27FC236}">
-                <a16:creationId xmlns:a16="http://schemas.microsoft.com/office/drawing/2014/main" id="{3EB059D6-2145-0C02-B1D0-471A9CA79645}"/>
+                <a16:creationId xmlns:a16="http://schemas.microsoft.com/office/drawing/2014/main" id="{5643296E-E44C-D0B6-7CFD-E832A4C48005}"/>
               </a:ext>
             </a:extLst>
           </p:cNvPr>
@@ -4059,19 +6339,338 @@
             <p:ph type="subTitle" idx="1"/>
           </p:nvPr>
         </p:nvSpPr>
-        <p:spPr/>
+        <p:spPr>
+          <a:xfrm>
+            <a:off x="1706880" y="658368"/>
+            <a:ext cx="9144000" cy="978408"/>
+          </a:xfrm>
+        </p:spPr>
         <p:txBody>
           <a:bodyPr/>
           <a:lstStyle/>
           <a:p>
-            <a:endParaRPr lang="he-IL" dirty="0"/>
+            <a:r>
+              <a:rPr lang="en-US" b="1" dirty="0">
+                <a:latin typeface="Times New Roman" panose="02020603050405020304" pitchFamily="18" charset="0"/>
+                <a:cs typeface="Times New Roman" panose="02020603050405020304" pitchFamily="18" charset="0"/>
+              </a:rPr>
+              <a:t>Research Problem</a:t>
+            </a:r>
+            <a:endParaRPr lang="he-IL" b="1" dirty="0">
+              <a:latin typeface="Times New Roman" panose="02020603050405020304" pitchFamily="18" charset="0"/>
+              <a:cs typeface="Times New Roman" panose="02020603050405020304" pitchFamily="18" charset="0"/>
+            </a:endParaRPr>
+          </a:p>
+        </p:txBody>
+      </p:sp>
+      <p:sp>
+        <p:nvSpPr>
+          <p:cNvPr id="11" name="כותרת משנה 6">
+            <a:extLst>
+              <a:ext uri="{FF2B5EF4-FFF2-40B4-BE49-F238E27FC236}">
+                <a16:creationId xmlns:a16="http://schemas.microsoft.com/office/drawing/2014/main" id="{4B286F4F-DAFF-EA7A-B286-FC497EF63EA5}"/>
+              </a:ext>
+            </a:extLst>
+          </p:cNvPr>
+          <p:cNvSpPr txBox="1">
+            <a:spLocks/>
+          </p:cNvSpPr>
+          <p:nvPr/>
+        </p:nvSpPr>
+        <p:spPr>
+          <a:xfrm>
+            <a:off x="1706880" y="1837944"/>
+            <a:ext cx="9211056" cy="4242816"/>
+          </a:xfrm>
+          <a:prstGeom prst="rect">
+            <a:avLst/>
+          </a:prstGeom>
+        </p:spPr>
+        <p:txBody>
+          <a:bodyPr vert="horz" lIns="91440" tIns="45720" rIns="91440" bIns="45720" rtlCol="1">
+            <a:normAutofit fontScale="92500" lnSpcReduction="10000"/>
+          </a:bodyPr>
+          <a:lstStyle>
+            <a:lvl1pPr marL="0" indent="0" algn="ctr" defTabSz="914400" rtl="1" eaLnBrk="1" latinLnBrk="0" hangingPunct="1">
+              <a:lnSpc>
+                <a:spcPct val="90000"/>
+              </a:lnSpc>
+              <a:spcBef>
+                <a:spcPts val="1000"/>
+              </a:spcBef>
+              <a:buFont typeface="Arial" panose="020B0604020202020204" pitchFamily="34" charset="0"/>
+              <a:buNone/>
+              <a:defRPr sz="2400" kern="1200">
+                <a:solidFill>
+                  <a:schemeClr val="tx1"/>
+                </a:solidFill>
+                <a:latin typeface="+mn-lt"/>
+                <a:ea typeface="+mn-ea"/>
+                <a:cs typeface="+mn-cs"/>
+              </a:defRPr>
+            </a:lvl1pPr>
+            <a:lvl2pPr marL="457200" indent="0" algn="ctr" defTabSz="914400" rtl="1" eaLnBrk="1" latinLnBrk="0" hangingPunct="1">
+              <a:lnSpc>
+                <a:spcPct val="90000"/>
+              </a:lnSpc>
+              <a:spcBef>
+                <a:spcPts val="500"/>
+              </a:spcBef>
+              <a:buFont typeface="Arial" panose="020B0604020202020204" pitchFamily="34" charset="0"/>
+              <a:buNone/>
+              <a:defRPr sz="2000" kern="1200">
+                <a:solidFill>
+                  <a:schemeClr val="tx1"/>
+                </a:solidFill>
+                <a:latin typeface="+mn-lt"/>
+                <a:ea typeface="+mn-ea"/>
+                <a:cs typeface="+mn-cs"/>
+              </a:defRPr>
+            </a:lvl2pPr>
+            <a:lvl3pPr marL="914400" indent="0" algn="ctr" defTabSz="914400" rtl="1" eaLnBrk="1" latinLnBrk="0" hangingPunct="1">
+              <a:lnSpc>
+                <a:spcPct val="90000"/>
+              </a:lnSpc>
+              <a:spcBef>
+                <a:spcPts val="500"/>
+              </a:spcBef>
+              <a:buFont typeface="Arial" panose="020B0604020202020204" pitchFamily="34" charset="0"/>
+              <a:buNone/>
+              <a:defRPr sz="1800" kern="1200">
+                <a:solidFill>
+                  <a:schemeClr val="tx1"/>
+                </a:solidFill>
+                <a:latin typeface="+mn-lt"/>
+                <a:ea typeface="+mn-ea"/>
+                <a:cs typeface="+mn-cs"/>
+              </a:defRPr>
+            </a:lvl3pPr>
+            <a:lvl4pPr marL="1371600" indent="0" algn="ctr" defTabSz="914400" rtl="1" eaLnBrk="1" latinLnBrk="0" hangingPunct="1">
+              <a:lnSpc>
+                <a:spcPct val="90000"/>
+              </a:lnSpc>
+              <a:spcBef>
+                <a:spcPts val="500"/>
+              </a:spcBef>
+              <a:buFont typeface="Arial" panose="020B0604020202020204" pitchFamily="34" charset="0"/>
+              <a:buNone/>
+              <a:defRPr sz="1600" kern="1200">
+                <a:solidFill>
+                  <a:schemeClr val="tx1"/>
+                </a:solidFill>
+                <a:latin typeface="+mn-lt"/>
+                <a:ea typeface="+mn-ea"/>
+                <a:cs typeface="+mn-cs"/>
+              </a:defRPr>
+            </a:lvl4pPr>
+            <a:lvl5pPr marL="1828800" indent="0" algn="ctr" defTabSz="914400" rtl="1" eaLnBrk="1" latinLnBrk="0" hangingPunct="1">
+              <a:lnSpc>
+                <a:spcPct val="90000"/>
+              </a:lnSpc>
+              <a:spcBef>
+                <a:spcPts val="500"/>
+              </a:spcBef>
+              <a:buFont typeface="Arial" panose="020B0604020202020204" pitchFamily="34" charset="0"/>
+              <a:buNone/>
+              <a:defRPr sz="1600" kern="1200">
+                <a:solidFill>
+                  <a:schemeClr val="tx1"/>
+                </a:solidFill>
+                <a:latin typeface="+mn-lt"/>
+                <a:ea typeface="+mn-ea"/>
+                <a:cs typeface="+mn-cs"/>
+              </a:defRPr>
+            </a:lvl5pPr>
+            <a:lvl6pPr marL="2286000" indent="0" algn="ctr" defTabSz="914400" rtl="1" eaLnBrk="1" latinLnBrk="0" hangingPunct="1">
+              <a:lnSpc>
+                <a:spcPct val="90000"/>
+              </a:lnSpc>
+              <a:spcBef>
+                <a:spcPts val="500"/>
+              </a:spcBef>
+              <a:buFont typeface="Arial" panose="020B0604020202020204" pitchFamily="34" charset="0"/>
+              <a:buNone/>
+              <a:defRPr sz="1600" kern="1200">
+                <a:solidFill>
+                  <a:schemeClr val="tx1"/>
+                </a:solidFill>
+                <a:latin typeface="+mn-lt"/>
+                <a:ea typeface="+mn-ea"/>
+                <a:cs typeface="+mn-cs"/>
+              </a:defRPr>
+            </a:lvl6pPr>
+            <a:lvl7pPr marL="2743200" indent="0" algn="ctr" defTabSz="914400" rtl="1" eaLnBrk="1" latinLnBrk="0" hangingPunct="1">
+              <a:lnSpc>
+                <a:spcPct val="90000"/>
+              </a:lnSpc>
+              <a:spcBef>
+                <a:spcPts val="500"/>
+              </a:spcBef>
+              <a:buFont typeface="Arial" panose="020B0604020202020204" pitchFamily="34" charset="0"/>
+              <a:buNone/>
+              <a:defRPr sz="1600" kern="1200">
+                <a:solidFill>
+                  <a:schemeClr val="tx1"/>
+                </a:solidFill>
+                <a:latin typeface="+mn-lt"/>
+                <a:ea typeface="+mn-ea"/>
+                <a:cs typeface="+mn-cs"/>
+              </a:defRPr>
+            </a:lvl7pPr>
+            <a:lvl8pPr marL="3200400" indent="0" algn="ctr" defTabSz="914400" rtl="1" eaLnBrk="1" latinLnBrk="0" hangingPunct="1">
+              <a:lnSpc>
+                <a:spcPct val="90000"/>
+              </a:lnSpc>
+              <a:spcBef>
+                <a:spcPts val="500"/>
+              </a:spcBef>
+              <a:buFont typeface="Arial" panose="020B0604020202020204" pitchFamily="34" charset="0"/>
+              <a:buNone/>
+              <a:defRPr sz="1600" kern="1200">
+                <a:solidFill>
+                  <a:schemeClr val="tx1"/>
+                </a:solidFill>
+                <a:latin typeface="+mn-lt"/>
+                <a:ea typeface="+mn-ea"/>
+                <a:cs typeface="+mn-cs"/>
+              </a:defRPr>
+            </a:lvl8pPr>
+            <a:lvl9pPr marL="3657600" indent="0" algn="ctr" defTabSz="914400" rtl="1" eaLnBrk="1" latinLnBrk="0" hangingPunct="1">
+              <a:lnSpc>
+                <a:spcPct val="90000"/>
+              </a:lnSpc>
+              <a:spcBef>
+                <a:spcPts val="500"/>
+              </a:spcBef>
+              <a:buFont typeface="Arial" panose="020B0604020202020204" pitchFamily="34" charset="0"/>
+              <a:buNone/>
+              <a:defRPr sz="1600" kern="1200">
+                <a:solidFill>
+                  <a:schemeClr val="tx1"/>
+                </a:solidFill>
+                <a:latin typeface="+mn-lt"/>
+                <a:ea typeface="+mn-ea"/>
+                <a:cs typeface="+mn-cs"/>
+              </a:defRPr>
+            </a:lvl9pPr>
+          </a:lstStyle>
+          <a:p>
+            <a:pPr algn="l"/>
+            <a:r>
+              <a:rPr lang="en-US" sz="2000" dirty="0">
+                <a:latin typeface="Times New Roman" panose="02020603050405020304" pitchFamily="18" charset="0"/>
+                <a:cs typeface="Times New Roman" panose="02020603050405020304" pitchFamily="18" charset="0"/>
+              </a:rPr>
+              <a:t>Standard CNN classifiers rely on high-frequency visual details</a:t>
+            </a:r>
+          </a:p>
+          <a:p>
+            <a:pPr algn="l"/>
+            <a:endParaRPr lang="en-US" sz="2000" dirty="0">
+              <a:latin typeface="Times New Roman" panose="02020603050405020304" pitchFamily="18" charset="0"/>
+              <a:cs typeface="Times New Roman" panose="02020603050405020304" pitchFamily="18" charset="0"/>
+            </a:endParaRPr>
+          </a:p>
+          <a:p>
+            <a:pPr algn="l"/>
+            <a:r>
+              <a:rPr lang="en-US" sz="2000" dirty="0">
+                <a:latin typeface="Times New Roman" panose="02020603050405020304" pitchFamily="18" charset="0"/>
+                <a:cs typeface="Times New Roman" panose="02020603050405020304" pitchFamily="18" charset="0"/>
+              </a:rPr>
+              <a:t>When images are heavily degraded:</a:t>
+            </a:r>
+          </a:p>
+          <a:p>
+            <a:pPr algn="l"/>
+            <a:br>
+              <a:rPr lang="en-US" sz="2000" dirty="0">
+                <a:latin typeface="Times New Roman" panose="02020603050405020304" pitchFamily="18" charset="0"/>
+                <a:cs typeface="Times New Roman" panose="02020603050405020304" pitchFamily="18" charset="0"/>
+              </a:rPr>
+            </a:br>
+            <a:r>
+              <a:rPr lang="en-US" sz="2000" dirty="0">
+                <a:latin typeface="Times New Roman" panose="02020603050405020304" pitchFamily="18" charset="0"/>
+                <a:cs typeface="Times New Roman" panose="02020603050405020304" pitchFamily="18" charset="0"/>
+              </a:rPr>
+              <a:t>• textures and edges are lost</a:t>
+            </a:r>
+          </a:p>
+          <a:p>
+            <a:pPr algn="l"/>
+            <a:r>
+              <a:rPr lang="en-US" sz="2000" dirty="0">
+                <a:latin typeface="Times New Roman" panose="02020603050405020304" pitchFamily="18" charset="0"/>
+                <a:cs typeface="Times New Roman" panose="02020603050405020304" pitchFamily="18" charset="0"/>
+              </a:rPr>
+              <a:t>• spatial information is reduced</a:t>
+            </a:r>
+          </a:p>
+          <a:p>
+            <a:pPr algn="l"/>
+            <a:endParaRPr lang="en-US" sz="2000" dirty="0">
+              <a:latin typeface="Times New Roman" panose="02020603050405020304" pitchFamily="18" charset="0"/>
+              <a:cs typeface="Times New Roman" panose="02020603050405020304" pitchFamily="18" charset="0"/>
+            </a:endParaRPr>
+          </a:p>
+          <a:p>
+            <a:pPr algn="l"/>
+            <a:r>
+              <a:rPr lang="en-US" sz="2000" dirty="0">
+                <a:latin typeface="Times New Roman" panose="02020603050405020304" pitchFamily="18" charset="0"/>
+                <a:cs typeface="Times New Roman" panose="02020603050405020304" pitchFamily="18" charset="0"/>
+              </a:rPr>
+              <a:t>As a result, classification accuracy drops significantly</a:t>
+            </a:r>
+          </a:p>
+          <a:p>
+            <a:pPr algn="l"/>
+            <a:endParaRPr lang="en-US" sz="2000" dirty="0">
+              <a:latin typeface="Times New Roman" panose="02020603050405020304" pitchFamily="18" charset="0"/>
+              <a:cs typeface="Times New Roman" panose="02020603050405020304" pitchFamily="18" charset="0"/>
+            </a:endParaRPr>
+          </a:p>
+          <a:p>
+            <a:pPr algn="l"/>
+            <a:r>
+              <a:rPr lang="en-US" sz="2000" b="1" dirty="0">
+                <a:latin typeface="Times New Roman" panose="02020603050405020304" pitchFamily="18" charset="0"/>
+                <a:cs typeface="Times New Roman" panose="02020603050405020304" pitchFamily="18" charset="0"/>
+              </a:rPr>
+              <a:t>Research Question:</a:t>
+            </a:r>
+          </a:p>
+          <a:p>
+            <a:pPr algn="l"/>
+            <a:r>
+              <a:rPr lang="en-US" sz="2000" b="1" dirty="0">
+                <a:latin typeface="Times New Roman" panose="02020603050405020304" pitchFamily="18" charset="0"/>
+                <a:cs typeface="Times New Roman" panose="02020603050405020304" pitchFamily="18" charset="0"/>
+              </a:rPr>
+              <a:t>How robust are modern deep learning models</a:t>
+            </a:r>
+          </a:p>
+          <a:p>
+            <a:pPr algn="l"/>
+            <a:r>
+              <a:rPr lang="en-US" sz="2000" b="1" dirty="0">
+                <a:latin typeface="Times New Roman" panose="02020603050405020304" pitchFamily="18" charset="0"/>
+                <a:cs typeface="Times New Roman" panose="02020603050405020304" pitchFamily="18" charset="0"/>
+              </a:rPr>
+              <a:t>to severe image degradation?</a:t>
+            </a:r>
+            <a:endParaRPr lang="he-IL" sz="2000" b="1" dirty="0">
+              <a:latin typeface="Times New Roman" panose="02020603050405020304" pitchFamily="18" charset="0"/>
+              <a:cs typeface="Times New Roman" panose="02020603050405020304" pitchFamily="18" charset="0"/>
+            </a:endParaRPr>
           </a:p>
         </p:txBody>
       </p:sp>
     </p:spTree>
     <p:extLst>
       <p:ext uri="{BB962C8B-B14F-4D97-AF65-F5344CB8AC3E}">
-        <p14:creationId xmlns:p14="http://schemas.microsoft.com/office/powerpoint/2010/main" val="3187046741"/>
+        <p14:creationId xmlns:p14="http://schemas.microsoft.com/office/powerpoint/2010/main" val="1530091220"/>
       </p:ext>
     </p:extLst>
   </p:cSld>
@@ -4081,7 +6680,7 @@
 </p:sld>
 </file>
 
-<file path=ppt/slides/slide8.xml><?xml version="1.0" encoding="utf-8"?>
+<file path=ppt/slides/slide4.xml><?xml version="1.0" encoding="utf-8"?>
 <p:sld xmlns:a="http://schemas.openxmlformats.org/drawingml/2006/main" xmlns:r="http://schemas.openxmlformats.org/officeDocument/2006/relationships" xmlns:p="http://schemas.openxmlformats.org/presentationml/2006/main">
   <p:cSld>
     <p:spTree>
@@ -4089,7 +6688,7 @@
         <p:cNvPr id="1" name="">
           <a:extLst>
             <a:ext uri="{FF2B5EF4-FFF2-40B4-BE49-F238E27FC236}">
-              <a16:creationId xmlns:a16="http://schemas.microsoft.com/office/drawing/2014/main" id="{A1509E32-3DE2-C535-3180-44445FF75CF6}"/>
+              <a16:creationId xmlns:a16="http://schemas.microsoft.com/office/drawing/2014/main" id="{05A66A81-283F-BFB7-EF2A-84D08A9C6F59}"/>
             </a:ext>
           </a:extLst>
         </p:cNvPr>
@@ -4109,7 +6708,7 @@
           <p:cNvPr id="7" name="כותרת משנה 6">
             <a:extLst>
               <a:ext uri="{FF2B5EF4-FFF2-40B4-BE49-F238E27FC236}">
-                <a16:creationId xmlns:a16="http://schemas.microsoft.com/office/drawing/2014/main" id="{6CD48EBF-5C16-EA43-6626-C4172A7D5AD1}"/>
+                <a16:creationId xmlns:a16="http://schemas.microsoft.com/office/drawing/2014/main" id="{01BEBA7F-EAB1-C168-8B5B-3730C1F4C3D9}"/>
               </a:ext>
             </a:extLst>
           </p:cNvPr>
@@ -4120,19 +6719,389 @@
             <p:ph type="subTitle" idx="1"/>
           </p:nvPr>
         </p:nvSpPr>
-        <p:spPr/>
+        <p:spPr>
+          <a:xfrm>
+            <a:off x="1706880" y="658368"/>
+            <a:ext cx="9144000" cy="978408"/>
+          </a:xfrm>
+        </p:spPr>
         <p:txBody>
           <a:bodyPr/>
           <a:lstStyle/>
           <a:p>
-            <a:endParaRPr lang="he-IL" dirty="0"/>
+            <a:r>
+              <a:rPr lang="en-US" b="1" dirty="0">
+                <a:latin typeface="Times New Roman" panose="02020603050405020304" pitchFamily="18" charset="0"/>
+                <a:cs typeface="Times New Roman" panose="02020603050405020304" pitchFamily="18" charset="0"/>
+              </a:rPr>
+              <a:t>Project Goals</a:t>
+            </a:r>
+            <a:endParaRPr lang="he-IL" b="1" dirty="0">
+              <a:latin typeface="Times New Roman" panose="02020603050405020304" pitchFamily="18" charset="0"/>
+              <a:cs typeface="Times New Roman" panose="02020603050405020304" pitchFamily="18" charset="0"/>
+            </a:endParaRPr>
+          </a:p>
+        </p:txBody>
+      </p:sp>
+      <p:sp>
+        <p:nvSpPr>
+          <p:cNvPr id="11" name="כותרת משנה 6">
+            <a:extLst>
+              <a:ext uri="{FF2B5EF4-FFF2-40B4-BE49-F238E27FC236}">
+                <a16:creationId xmlns:a16="http://schemas.microsoft.com/office/drawing/2014/main" id="{96C8098C-E6F7-A4A3-3094-CEB34BC10876}"/>
+              </a:ext>
+            </a:extLst>
+          </p:cNvPr>
+          <p:cNvSpPr txBox="1">
+            <a:spLocks/>
+          </p:cNvSpPr>
+          <p:nvPr/>
+        </p:nvSpPr>
+        <p:spPr>
+          <a:xfrm>
+            <a:off x="1706880" y="1837944"/>
+            <a:ext cx="9211056" cy="4242816"/>
+          </a:xfrm>
+          <a:prstGeom prst="rect">
+            <a:avLst/>
+          </a:prstGeom>
+        </p:spPr>
+        <p:txBody>
+          <a:bodyPr vert="horz" lIns="91440" tIns="45720" rIns="91440" bIns="45720" rtlCol="1">
+            <a:normAutofit fontScale="92500" lnSpcReduction="20000"/>
+          </a:bodyPr>
+          <a:lstStyle>
+            <a:lvl1pPr marL="0" indent="0" algn="ctr" defTabSz="914400" rtl="1" eaLnBrk="1" latinLnBrk="0" hangingPunct="1">
+              <a:lnSpc>
+                <a:spcPct val="90000"/>
+              </a:lnSpc>
+              <a:spcBef>
+                <a:spcPts val="1000"/>
+              </a:spcBef>
+              <a:buFont typeface="Arial" panose="020B0604020202020204" pitchFamily="34" charset="0"/>
+              <a:buNone/>
+              <a:defRPr sz="2400" kern="1200">
+                <a:solidFill>
+                  <a:schemeClr val="tx1"/>
+                </a:solidFill>
+                <a:latin typeface="+mn-lt"/>
+                <a:ea typeface="+mn-ea"/>
+                <a:cs typeface="+mn-cs"/>
+              </a:defRPr>
+            </a:lvl1pPr>
+            <a:lvl2pPr marL="457200" indent="0" algn="ctr" defTabSz="914400" rtl="1" eaLnBrk="1" latinLnBrk="0" hangingPunct="1">
+              <a:lnSpc>
+                <a:spcPct val="90000"/>
+              </a:lnSpc>
+              <a:spcBef>
+                <a:spcPts val="500"/>
+              </a:spcBef>
+              <a:buFont typeface="Arial" panose="020B0604020202020204" pitchFamily="34" charset="0"/>
+              <a:buNone/>
+              <a:defRPr sz="2000" kern="1200">
+                <a:solidFill>
+                  <a:schemeClr val="tx1"/>
+                </a:solidFill>
+                <a:latin typeface="+mn-lt"/>
+                <a:ea typeface="+mn-ea"/>
+                <a:cs typeface="+mn-cs"/>
+              </a:defRPr>
+            </a:lvl2pPr>
+            <a:lvl3pPr marL="914400" indent="0" algn="ctr" defTabSz="914400" rtl="1" eaLnBrk="1" latinLnBrk="0" hangingPunct="1">
+              <a:lnSpc>
+                <a:spcPct val="90000"/>
+              </a:lnSpc>
+              <a:spcBef>
+                <a:spcPts val="500"/>
+              </a:spcBef>
+              <a:buFont typeface="Arial" panose="020B0604020202020204" pitchFamily="34" charset="0"/>
+              <a:buNone/>
+              <a:defRPr sz="1800" kern="1200">
+                <a:solidFill>
+                  <a:schemeClr val="tx1"/>
+                </a:solidFill>
+                <a:latin typeface="+mn-lt"/>
+                <a:ea typeface="+mn-ea"/>
+                <a:cs typeface="+mn-cs"/>
+              </a:defRPr>
+            </a:lvl3pPr>
+            <a:lvl4pPr marL="1371600" indent="0" algn="ctr" defTabSz="914400" rtl="1" eaLnBrk="1" latinLnBrk="0" hangingPunct="1">
+              <a:lnSpc>
+                <a:spcPct val="90000"/>
+              </a:lnSpc>
+              <a:spcBef>
+                <a:spcPts val="500"/>
+              </a:spcBef>
+              <a:buFont typeface="Arial" panose="020B0604020202020204" pitchFamily="34" charset="0"/>
+              <a:buNone/>
+              <a:defRPr sz="1600" kern="1200">
+                <a:solidFill>
+                  <a:schemeClr val="tx1"/>
+                </a:solidFill>
+                <a:latin typeface="+mn-lt"/>
+                <a:ea typeface="+mn-ea"/>
+                <a:cs typeface="+mn-cs"/>
+              </a:defRPr>
+            </a:lvl4pPr>
+            <a:lvl5pPr marL="1828800" indent="0" algn="ctr" defTabSz="914400" rtl="1" eaLnBrk="1" latinLnBrk="0" hangingPunct="1">
+              <a:lnSpc>
+                <a:spcPct val="90000"/>
+              </a:lnSpc>
+              <a:spcBef>
+                <a:spcPts val="500"/>
+              </a:spcBef>
+              <a:buFont typeface="Arial" panose="020B0604020202020204" pitchFamily="34" charset="0"/>
+              <a:buNone/>
+              <a:defRPr sz="1600" kern="1200">
+                <a:solidFill>
+                  <a:schemeClr val="tx1"/>
+                </a:solidFill>
+                <a:latin typeface="+mn-lt"/>
+                <a:ea typeface="+mn-ea"/>
+                <a:cs typeface="+mn-cs"/>
+              </a:defRPr>
+            </a:lvl5pPr>
+            <a:lvl6pPr marL="2286000" indent="0" algn="ctr" defTabSz="914400" rtl="1" eaLnBrk="1" latinLnBrk="0" hangingPunct="1">
+              <a:lnSpc>
+                <a:spcPct val="90000"/>
+              </a:lnSpc>
+              <a:spcBef>
+                <a:spcPts val="500"/>
+              </a:spcBef>
+              <a:buFont typeface="Arial" panose="020B0604020202020204" pitchFamily="34" charset="0"/>
+              <a:buNone/>
+              <a:defRPr sz="1600" kern="1200">
+                <a:solidFill>
+                  <a:schemeClr val="tx1"/>
+                </a:solidFill>
+                <a:latin typeface="+mn-lt"/>
+                <a:ea typeface="+mn-ea"/>
+                <a:cs typeface="+mn-cs"/>
+              </a:defRPr>
+            </a:lvl6pPr>
+            <a:lvl7pPr marL="2743200" indent="0" algn="ctr" defTabSz="914400" rtl="1" eaLnBrk="1" latinLnBrk="0" hangingPunct="1">
+              <a:lnSpc>
+                <a:spcPct val="90000"/>
+              </a:lnSpc>
+              <a:spcBef>
+                <a:spcPts val="500"/>
+              </a:spcBef>
+              <a:buFont typeface="Arial" panose="020B0604020202020204" pitchFamily="34" charset="0"/>
+              <a:buNone/>
+              <a:defRPr sz="1600" kern="1200">
+                <a:solidFill>
+                  <a:schemeClr val="tx1"/>
+                </a:solidFill>
+                <a:latin typeface="+mn-lt"/>
+                <a:ea typeface="+mn-ea"/>
+                <a:cs typeface="+mn-cs"/>
+              </a:defRPr>
+            </a:lvl7pPr>
+            <a:lvl8pPr marL="3200400" indent="0" algn="ctr" defTabSz="914400" rtl="1" eaLnBrk="1" latinLnBrk="0" hangingPunct="1">
+              <a:lnSpc>
+                <a:spcPct val="90000"/>
+              </a:lnSpc>
+              <a:spcBef>
+                <a:spcPts val="500"/>
+              </a:spcBef>
+              <a:buFont typeface="Arial" panose="020B0604020202020204" pitchFamily="34" charset="0"/>
+              <a:buNone/>
+              <a:defRPr sz="1600" kern="1200">
+                <a:solidFill>
+                  <a:schemeClr val="tx1"/>
+                </a:solidFill>
+                <a:latin typeface="+mn-lt"/>
+                <a:ea typeface="+mn-ea"/>
+                <a:cs typeface="+mn-cs"/>
+              </a:defRPr>
+            </a:lvl8pPr>
+            <a:lvl9pPr marL="3657600" indent="0" algn="ctr" defTabSz="914400" rtl="1" eaLnBrk="1" latinLnBrk="0" hangingPunct="1">
+              <a:lnSpc>
+                <a:spcPct val="90000"/>
+              </a:lnSpc>
+              <a:spcBef>
+                <a:spcPts val="500"/>
+              </a:spcBef>
+              <a:buFont typeface="Arial" panose="020B0604020202020204" pitchFamily="34" charset="0"/>
+              <a:buNone/>
+              <a:defRPr sz="1600" kern="1200">
+                <a:solidFill>
+                  <a:schemeClr val="tx1"/>
+                </a:solidFill>
+                <a:latin typeface="+mn-lt"/>
+                <a:ea typeface="+mn-ea"/>
+                <a:cs typeface="+mn-cs"/>
+              </a:defRPr>
+            </a:lvl9pPr>
+          </a:lstStyle>
+          <a:p>
+            <a:pPr algn="l"/>
+            <a:r>
+              <a:rPr lang="en-US" sz="2000" dirty="0">
+                <a:latin typeface="Times New Roman" panose="02020603050405020304" pitchFamily="18" charset="0"/>
+                <a:cs typeface="Times New Roman" panose="02020603050405020304" pitchFamily="18" charset="0"/>
+              </a:rPr>
+              <a:t>Evaluate the </a:t>
+            </a:r>
+            <a:r>
+              <a:rPr lang="en-US" sz="2000" b="1" dirty="0">
+                <a:latin typeface="Times New Roman" panose="02020603050405020304" pitchFamily="18" charset="0"/>
+                <a:cs typeface="Times New Roman" panose="02020603050405020304" pitchFamily="18" charset="0"/>
+              </a:rPr>
+              <a:t>robustness</a:t>
+            </a:r>
+            <a:r>
+              <a:rPr lang="en-US" sz="2000" dirty="0">
+                <a:latin typeface="Times New Roman" panose="02020603050405020304" pitchFamily="18" charset="0"/>
+                <a:cs typeface="Times New Roman" panose="02020603050405020304" pitchFamily="18" charset="0"/>
+              </a:rPr>
+              <a:t> of deep learning models</a:t>
+            </a:r>
+          </a:p>
+          <a:p>
+            <a:pPr algn="l"/>
+            <a:r>
+              <a:rPr lang="en-US" sz="2000" dirty="0">
+                <a:latin typeface="Times New Roman" panose="02020603050405020304" pitchFamily="18" charset="0"/>
+                <a:cs typeface="Times New Roman" panose="02020603050405020304" pitchFamily="18" charset="0"/>
+              </a:rPr>
+              <a:t>under severe image degradation</a:t>
+            </a:r>
+          </a:p>
+          <a:p>
+            <a:pPr algn="l"/>
+            <a:endParaRPr lang="en-US" sz="2000" dirty="0">
+              <a:latin typeface="Times New Roman" panose="02020603050405020304" pitchFamily="18" charset="0"/>
+              <a:cs typeface="Times New Roman" panose="02020603050405020304" pitchFamily="18" charset="0"/>
+            </a:endParaRPr>
+          </a:p>
+          <a:p>
+            <a:pPr algn="l"/>
+            <a:r>
+              <a:rPr lang="en-US" sz="2000" dirty="0">
+                <a:latin typeface="Times New Roman" panose="02020603050405020304" pitchFamily="18" charset="0"/>
+                <a:cs typeface="Times New Roman" panose="02020603050405020304" pitchFamily="18" charset="0"/>
+              </a:rPr>
+              <a:t>Compare different model architectures:</a:t>
+            </a:r>
+          </a:p>
+          <a:p>
+            <a:pPr algn="l"/>
+            <a:r>
+              <a:rPr lang="en-US" sz="2000" dirty="0">
+                <a:latin typeface="Times New Roman" panose="02020603050405020304" pitchFamily="18" charset="0"/>
+                <a:cs typeface="Times New Roman" panose="02020603050405020304" pitchFamily="18" charset="0"/>
+              </a:rPr>
+              <a:t>• </a:t>
+            </a:r>
+            <a:r>
+              <a:rPr lang="en-US" sz="2000" dirty="0" err="1">
+                <a:latin typeface="Times New Roman" panose="02020603050405020304" pitchFamily="18" charset="0"/>
+                <a:cs typeface="Times New Roman" panose="02020603050405020304" pitchFamily="18" charset="0"/>
+              </a:rPr>
+              <a:t>ResNet</a:t>
+            </a:r>
+            <a:endParaRPr lang="en-US" sz="2000" dirty="0">
+              <a:latin typeface="Times New Roman" panose="02020603050405020304" pitchFamily="18" charset="0"/>
+              <a:cs typeface="Times New Roman" panose="02020603050405020304" pitchFamily="18" charset="0"/>
+            </a:endParaRPr>
+          </a:p>
+          <a:p>
+            <a:pPr algn="l"/>
+            <a:r>
+              <a:rPr lang="en-US" sz="2000" dirty="0">
+                <a:latin typeface="Times New Roman" panose="02020603050405020304" pitchFamily="18" charset="0"/>
+                <a:cs typeface="Times New Roman" panose="02020603050405020304" pitchFamily="18" charset="0"/>
+              </a:rPr>
+              <a:t>• </a:t>
+            </a:r>
+            <a:r>
+              <a:rPr lang="en-US" sz="2000" dirty="0" err="1">
+                <a:latin typeface="Times New Roman" panose="02020603050405020304" pitchFamily="18" charset="0"/>
+                <a:cs typeface="Times New Roman" panose="02020603050405020304" pitchFamily="18" charset="0"/>
+              </a:rPr>
+              <a:t>DenseNet</a:t>
+            </a:r>
+            <a:endParaRPr lang="en-US" sz="2000" dirty="0">
+              <a:latin typeface="Times New Roman" panose="02020603050405020304" pitchFamily="18" charset="0"/>
+              <a:cs typeface="Times New Roman" panose="02020603050405020304" pitchFamily="18" charset="0"/>
+            </a:endParaRPr>
+          </a:p>
+          <a:p>
+            <a:pPr algn="l"/>
+            <a:r>
+              <a:rPr lang="en-US" sz="2000" dirty="0">
+                <a:latin typeface="Times New Roman" panose="02020603050405020304" pitchFamily="18" charset="0"/>
+                <a:cs typeface="Times New Roman" panose="02020603050405020304" pitchFamily="18" charset="0"/>
+              </a:rPr>
+              <a:t>• </a:t>
+            </a:r>
+            <a:r>
+              <a:rPr lang="en-US" sz="2000" dirty="0" err="1">
+                <a:latin typeface="Times New Roman" panose="02020603050405020304" pitchFamily="18" charset="0"/>
+                <a:cs typeface="Times New Roman" panose="02020603050405020304" pitchFamily="18" charset="0"/>
+              </a:rPr>
+              <a:t>TransNeXt</a:t>
+            </a:r>
+            <a:endParaRPr lang="en-US" sz="2000" dirty="0">
+              <a:latin typeface="Times New Roman" panose="02020603050405020304" pitchFamily="18" charset="0"/>
+              <a:cs typeface="Times New Roman" panose="02020603050405020304" pitchFamily="18" charset="0"/>
+            </a:endParaRPr>
+          </a:p>
+          <a:p>
+            <a:pPr algn="l"/>
+            <a:endParaRPr lang="en-US" sz="2000" dirty="0">
+              <a:latin typeface="Times New Roman" panose="02020603050405020304" pitchFamily="18" charset="0"/>
+              <a:cs typeface="Times New Roman" panose="02020603050405020304" pitchFamily="18" charset="0"/>
+            </a:endParaRPr>
+          </a:p>
+          <a:p>
+            <a:pPr algn="l"/>
+            <a:r>
+              <a:rPr lang="en-US" sz="2000" dirty="0">
+                <a:latin typeface="Times New Roman" panose="02020603050405020304" pitchFamily="18" charset="0"/>
+                <a:cs typeface="Times New Roman" panose="02020603050405020304" pitchFamily="18" charset="0"/>
+              </a:rPr>
+              <a:t>Study the effect of degradation on classification accuracy</a:t>
+            </a:r>
+          </a:p>
+          <a:p>
+            <a:pPr algn="l"/>
+            <a:endParaRPr lang="en-US" sz="2000" dirty="0">
+              <a:latin typeface="Times New Roman" panose="02020603050405020304" pitchFamily="18" charset="0"/>
+              <a:cs typeface="Times New Roman" panose="02020603050405020304" pitchFamily="18" charset="0"/>
+            </a:endParaRPr>
+          </a:p>
+          <a:p>
+            <a:pPr algn="l"/>
+            <a:r>
+              <a:rPr lang="en-US" sz="2000" dirty="0">
+                <a:latin typeface="Times New Roman" panose="02020603050405020304" pitchFamily="18" charset="0"/>
+                <a:cs typeface="Times New Roman" panose="02020603050405020304" pitchFamily="18" charset="0"/>
+              </a:rPr>
+              <a:t>Achieve high classification performance</a:t>
+            </a:r>
+          </a:p>
+          <a:p>
+            <a:pPr algn="l"/>
+            <a:r>
+              <a:rPr lang="en-US" sz="2000" dirty="0">
+                <a:latin typeface="Times New Roman" panose="02020603050405020304" pitchFamily="18" charset="0"/>
+                <a:cs typeface="Times New Roman" panose="02020603050405020304" pitchFamily="18" charset="0"/>
+              </a:rPr>
+              <a:t>even with degraded inputs</a:t>
+            </a:r>
+            <a:endParaRPr lang="he-IL" sz="2000" dirty="0">
+              <a:latin typeface="Times New Roman" panose="02020603050405020304" pitchFamily="18" charset="0"/>
+              <a:cs typeface="Times New Roman" panose="02020603050405020304" pitchFamily="18" charset="0"/>
+            </a:endParaRPr>
           </a:p>
         </p:txBody>
       </p:sp>
     </p:spTree>
     <p:extLst>
       <p:ext uri="{BB962C8B-B14F-4D97-AF65-F5344CB8AC3E}">
-        <p14:creationId xmlns:p14="http://schemas.microsoft.com/office/powerpoint/2010/main" val="3641385731"/>
+        <p14:creationId xmlns:p14="http://schemas.microsoft.com/office/powerpoint/2010/main" val="920273169"/>
       </p:ext>
     </p:extLst>
   </p:cSld>
@@ -4142,7 +7111,7 @@
 </p:sld>
 </file>
 
-<file path=ppt/slides/slide9.xml><?xml version="1.0" encoding="utf-8"?>
+<file path=ppt/slides/slide5.xml><?xml version="1.0" encoding="utf-8"?>
 <p:sld xmlns:a="http://schemas.openxmlformats.org/drawingml/2006/main" xmlns:r="http://schemas.openxmlformats.org/officeDocument/2006/relationships" xmlns:p="http://schemas.openxmlformats.org/presentationml/2006/main">
   <p:cSld>
     <p:spTree>
@@ -4150,7 +7119,7 @@
         <p:cNvPr id="1" name="">
           <a:extLst>
             <a:ext uri="{FF2B5EF4-FFF2-40B4-BE49-F238E27FC236}">
-              <a16:creationId xmlns:a16="http://schemas.microsoft.com/office/drawing/2014/main" id="{B8539120-515C-279C-0C33-D22F28CA0272}"/>
+              <a16:creationId xmlns:a16="http://schemas.microsoft.com/office/drawing/2014/main" id="{01A46BA3-0A8E-3675-4309-E88AC63AC764}"/>
             </a:ext>
           </a:extLst>
         </p:cNvPr>
@@ -4170,7 +7139,7 @@
           <p:cNvPr id="7" name="כותרת משנה 6">
             <a:extLst>
               <a:ext uri="{FF2B5EF4-FFF2-40B4-BE49-F238E27FC236}">
-                <a16:creationId xmlns:a16="http://schemas.microsoft.com/office/drawing/2014/main" id="{3524C3AB-76F0-7E6E-E1CB-AEE20435F3A0}"/>
+                <a16:creationId xmlns:a16="http://schemas.microsoft.com/office/drawing/2014/main" id="{5B6DC6C4-6E4D-2099-6AE2-57B17E3E2217}"/>
               </a:ext>
             </a:extLst>
           </p:cNvPr>
@@ -4181,19 +7150,3682 @@
             <p:ph type="subTitle" idx="1"/>
           </p:nvPr>
         </p:nvSpPr>
-        <p:spPr/>
+        <p:spPr>
+          <a:xfrm>
+            <a:off x="1706880" y="658368"/>
+            <a:ext cx="9144000" cy="978408"/>
+          </a:xfrm>
+        </p:spPr>
         <p:txBody>
           <a:bodyPr/>
           <a:lstStyle/>
           <a:p>
-            <a:endParaRPr lang="he-IL" dirty="0"/>
+            <a:r>
+              <a:rPr lang="en-US" b="1" dirty="0">
+                <a:latin typeface="Times New Roman" panose="02020603050405020304" pitchFamily="18" charset="0"/>
+                <a:cs typeface="Times New Roman" panose="02020603050405020304" pitchFamily="18" charset="0"/>
+              </a:rPr>
+              <a:t>Dataset</a:t>
+            </a:r>
+          </a:p>
+          <a:p>
+            <a:endParaRPr lang="he-IL" b="1" dirty="0">
+              <a:latin typeface="Times New Roman" panose="02020603050405020304" pitchFamily="18" charset="0"/>
+              <a:cs typeface="Times New Roman" panose="02020603050405020304" pitchFamily="18" charset="0"/>
+            </a:endParaRPr>
+          </a:p>
+        </p:txBody>
+      </p:sp>
+      <p:sp>
+        <p:nvSpPr>
+          <p:cNvPr id="11" name="כותרת משנה 6">
+            <a:extLst>
+              <a:ext uri="{FF2B5EF4-FFF2-40B4-BE49-F238E27FC236}">
+                <a16:creationId xmlns:a16="http://schemas.microsoft.com/office/drawing/2014/main" id="{6863F4B2-F4F5-4C5D-970C-F91E2D523BA4}"/>
+              </a:ext>
+            </a:extLst>
+          </p:cNvPr>
+          <p:cNvSpPr txBox="1">
+            <a:spLocks/>
+          </p:cNvSpPr>
+          <p:nvPr/>
+        </p:nvSpPr>
+        <p:spPr>
+          <a:xfrm>
+            <a:off x="1207008" y="1248156"/>
+            <a:ext cx="9012936" cy="4690872"/>
+          </a:xfrm>
+          <a:prstGeom prst="rect">
+            <a:avLst/>
+          </a:prstGeom>
+        </p:spPr>
+        <p:txBody>
+          <a:bodyPr vert="horz" lIns="91440" tIns="45720" rIns="91440" bIns="45720" rtlCol="1">
+            <a:normAutofit fontScale="92500" lnSpcReduction="20000"/>
+          </a:bodyPr>
+          <a:lstStyle>
+            <a:lvl1pPr marL="0" indent="0" algn="ctr" defTabSz="914400" rtl="1" eaLnBrk="1" latinLnBrk="0" hangingPunct="1">
+              <a:lnSpc>
+                <a:spcPct val="90000"/>
+              </a:lnSpc>
+              <a:spcBef>
+                <a:spcPts val="1000"/>
+              </a:spcBef>
+              <a:buFont typeface="Arial" panose="020B0604020202020204" pitchFamily="34" charset="0"/>
+              <a:buNone/>
+              <a:defRPr sz="2400" kern="1200">
+                <a:solidFill>
+                  <a:schemeClr val="tx1"/>
+                </a:solidFill>
+                <a:latin typeface="+mn-lt"/>
+                <a:ea typeface="+mn-ea"/>
+                <a:cs typeface="+mn-cs"/>
+              </a:defRPr>
+            </a:lvl1pPr>
+            <a:lvl2pPr marL="457200" indent="0" algn="ctr" defTabSz="914400" rtl="1" eaLnBrk="1" latinLnBrk="0" hangingPunct="1">
+              <a:lnSpc>
+                <a:spcPct val="90000"/>
+              </a:lnSpc>
+              <a:spcBef>
+                <a:spcPts val="500"/>
+              </a:spcBef>
+              <a:buFont typeface="Arial" panose="020B0604020202020204" pitchFamily="34" charset="0"/>
+              <a:buNone/>
+              <a:defRPr sz="2000" kern="1200">
+                <a:solidFill>
+                  <a:schemeClr val="tx1"/>
+                </a:solidFill>
+                <a:latin typeface="+mn-lt"/>
+                <a:ea typeface="+mn-ea"/>
+                <a:cs typeface="+mn-cs"/>
+              </a:defRPr>
+            </a:lvl2pPr>
+            <a:lvl3pPr marL="914400" indent="0" algn="ctr" defTabSz="914400" rtl="1" eaLnBrk="1" latinLnBrk="0" hangingPunct="1">
+              <a:lnSpc>
+                <a:spcPct val="90000"/>
+              </a:lnSpc>
+              <a:spcBef>
+                <a:spcPts val="500"/>
+              </a:spcBef>
+              <a:buFont typeface="Arial" panose="020B0604020202020204" pitchFamily="34" charset="0"/>
+              <a:buNone/>
+              <a:defRPr sz="1800" kern="1200">
+                <a:solidFill>
+                  <a:schemeClr val="tx1"/>
+                </a:solidFill>
+                <a:latin typeface="+mn-lt"/>
+                <a:ea typeface="+mn-ea"/>
+                <a:cs typeface="+mn-cs"/>
+              </a:defRPr>
+            </a:lvl3pPr>
+            <a:lvl4pPr marL="1371600" indent="0" algn="ctr" defTabSz="914400" rtl="1" eaLnBrk="1" latinLnBrk="0" hangingPunct="1">
+              <a:lnSpc>
+                <a:spcPct val="90000"/>
+              </a:lnSpc>
+              <a:spcBef>
+                <a:spcPts val="500"/>
+              </a:spcBef>
+              <a:buFont typeface="Arial" panose="020B0604020202020204" pitchFamily="34" charset="0"/>
+              <a:buNone/>
+              <a:defRPr sz="1600" kern="1200">
+                <a:solidFill>
+                  <a:schemeClr val="tx1"/>
+                </a:solidFill>
+                <a:latin typeface="+mn-lt"/>
+                <a:ea typeface="+mn-ea"/>
+                <a:cs typeface="+mn-cs"/>
+              </a:defRPr>
+            </a:lvl4pPr>
+            <a:lvl5pPr marL="1828800" indent="0" algn="ctr" defTabSz="914400" rtl="1" eaLnBrk="1" latinLnBrk="0" hangingPunct="1">
+              <a:lnSpc>
+                <a:spcPct val="90000"/>
+              </a:lnSpc>
+              <a:spcBef>
+                <a:spcPts val="500"/>
+              </a:spcBef>
+              <a:buFont typeface="Arial" panose="020B0604020202020204" pitchFamily="34" charset="0"/>
+              <a:buNone/>
+              <a:defRPr sz="1600" kern="1200">
+                <a:solidFill>
+                  <a:schemeClr val="tx1"/>
+                </a:solidFill>
+                <a:latin typeface="+mn-lt"/>
+                <a:ea typeface="+mn-ea"/>
+                <a:cs typeface="+mn-cs"/>
+              </a:defRPr>
+            </a:lvl5pPr>
+            <a:lvl6pPr marL="2286000" indent="0" algn="ctr" defTabSz="914400" rtl="1" eaLnBrk="1" latinLnBrk="0" hangingPunct="1">
+              <a:lnSpc>
+                <a:spcPct val="90000"/>
+              </a:lnSpc>
+              <a:spcBef>
+                <a:spcPts val="500"/>
+              </a:spcBef>
+              <a:buFont typeface="Arial" panose="020B0604020202020204" pitchFamily="34" charset="0"/>
+              <a:buNone/>
+              <a:defRPr sz="1600" kern="1200">
+                <a:solidFill>
+                  <a:schemeClr val="tx1"/>
+                </a:solidFill>
+                <a:latin typeface="+mn-lt"/>
+                <a:ea typeface="+mn-ea"/>
+                <a:cs typeface="+mn-cs"/>
+              </a:defRPr>
+            </a:lvl6pPr>
+            <a:lvl7pPr marL="2743200" indent="0" algn="ctr" defTabSz="914400" rtl="1" eaLnBrk="1" latinLnBrk="0" hangingPunct="1">
+              <a:lnSpc>
+                <a:spcPct val="90000"/>
+              </a:lnSpc>
+              <a:spcBef>
+                <a:spcPts val="500"/>
+              </a:spcBef>
+              <a:buFont typeface="Arial" panose="020B0604020202020204" pitchFamily="34" charset="0"/>
+              <a:buNone/>
+              <a:defRPr sz="1600" kern="1200">
+                <a:solidFill>
+                  <a:schemeClr val="tx1"/>
+                </a:solidFill>
+                <a:latin typeface="+mn-lt"/>
+                <a:ea typeface="+mn-ea"/>
+                <a:cs typeface="+mn-cs"/>
+              </a:defRPr>
+            </a:lvl7pPr>
+            <a:lvl8pPr marL="3200400" indent="0" algn="ctr" defTabSz="914400" rtl="1" eaLnBrk="1" latinLnBrk="0" hangingPunct="1">
+              <a:lnSpc>
+                <a:spcPct val="90000"/>
+              </a:lnSpc>
+              <a:spcBef>
+                <a:spcPts val="500"/>
+              </a:spcBef>
+              <a:buFont typeface="Arial" panose="020B0604020202020204" pitchFamily="34" charset="0"/>
+              <a:buNone/>
+              <a:defRPr sz="1600" kern="1200">
+                <a:solidFill>
+                  <a:schemeClr val="tx1"/>
+                </a:solidFill>
+                <a:latin typeface="+mn-lt"/>
+                <a:ea typeface="+mn-ea"/>
+                <a:cs typeface="+mn-cs"/>
+              </a:defRPr>
+            </a:lvl8pPr>
+            <a:lvl9pPr marL="3657600" indent="0" algn="ctr" defTabSz="914400" rtl="1" eaLnBrk="1" latinLnBrk="0" hangingPunct="1">
+              <a:lnSpc>
+                <a:spcPct val="90000"/>
+              </a:lnSpc>
+              <a:spcBef>
+                <a:spcPts val="500"/>
+              </a:spcBef>
+              <a:buFont typeface="Arial" panose="020B0604020202020204" pitchFamily="34" charset="0"/>
+              <a:buNone/>
+              <a:defRPr sz="1600" kern="1200">
+                <a:solidFill>
+                  <a:schemeClr val="tx1"/>
+                </a:solidFill>
+                <a:latin typeface="+mn-lt"/>
+                <a:ea typeface="+mn-ea"/>
+                <a:cs typeface="+mn-cs"/>
+              </a:defRPr>
+            </a:lvl9pPr>
+          </a:lstStyle>
+          <a:p>
+            <a:pPr algn="l"/>
+            <a:r>
+              <a:rPr lang="en-US" sz="2000" dirty="0">
+                <a:latin typeface="Times New Roman" panose="02020603050405020304" pitchFamily="18" charset="0"/>
+                <a:cs typeface="Times New Roman" panose="02020603050405020304" pitchFamily="18" charset="0"/>
+              </a:rPr>
+              <a:t>Primary dataset used in the current experiments: </a:t>
+            </a:r>
+            <a:r>
+              <a:rPr lang="en-US" sz="2000" b="1" dirty="0">
+                <a:latin typeface="Times New Roman" panose="02020603050405020304" pitchFamily="18" charset="0"/>
+                <a:cs typeface="Times New Roman" panose="02020603050405020304" pitchFamily="18" charset="0"/>
+              </a:rPr>
+              <a:t>CIFAR-10</a:t>
+            </a:r>
+          </a:p>
+          <a:p>
+            <a:pPr algn="l"/>
+            <a:endParaRPr lang="en-US" sz="2000" dirty="0">
+              <a:latin typeface="Times New Roman" panose="02020603050405020304" pitchFamily="18" charset="0"/>
+              <a:cs typeface="Times New Roman" panose="02020603050405020304" pitchFamily="18" charset="0"/>
+            </a:endParaRPr>
+          </a:p>
+          <a:p>
+            <a:pPr algn="l"/>
+            <a:r>
+              <a:rPr lang="en-US" sz="2000" dirty="0">
+                <a:latin typeface="Times New Roman" panose="02020603050405020304" pitchFamily="18" charset="0"/>
+                <a:cs typeface="Times New Roman" panose="02020603050405020304" pitchFamily="18" charset="0"/>
+              </a:rPr>
+              <a:t>• 60,000 labeled images</a:t>
+            </a:r>
+          </a:p>
+          <a:p>
+            <a:pPr algn="l"/>
+            <a:r>
+              <a:rPr lang="en-US" sz="2000" dirty="0">
+                <a:latin typeface="Times New Roman" panose="02020603050405020304" pitchFamily="18" charset="0"/>
+                <a:cs typeface="Times New Roman" panose="02020603050405020304" pitchFamily="18" charset="0"/>
+              </a:rPr>
+              <a:t>• 10 object classes</a:t>
+            </a:r>
+          </a:p>
+          <a:p>
+            <a:pPr algn="l"/>
+            <a:r>
+              <a:rPr lang="en-US" sz="2000" dirty="0">
+                <a:latin typeface="Times New Roman" panose="02020603050405020304" pitchFamily="18" charset="0"/>
+                <a:cs typeface="Times New Roman" panose="02020603050405020304" pitchFamily="18" charset="0"/>
+              </a:rPr>
+              <a:t>• Image resolution: 32 × 32 pixels</a:t>
+            </a:r>
+          </a:p>
+          <a:p>
+            <a:pPr algn="l"/>
+            <a:endParaRPr lang="en-US" sz="2000" dirty="0">
+              <a:latin typeface="Times New Roman" panose="02020603050405020304" pitchFamily="18" charset="0"/>
+              <a:cs typeface="Times New Roman" panose="02020603050405020304" pitchFamily="18" charset="0"/>
+            </a:endParaRPr>
+          </a:p>
+          <a:p>
+            <a:pPr algn="l"/>
+            <a:r>
+              <a:rPr lang="en-US" sz="2000" dirty="0">
+                <a:latin typeface="Times New Roman" panose="02020603050405020304" pitchFamily="18" charset="0"/>
+                <a:cs typeface="Times New Roman" panose="02020603050405020304" pitchFamily="18" charset="0"/>
+              </a:rPr>
+              <a:t>Dataset split:</a:t>
+            </a:r>
+          </a:p>
+          <a:p>
+            <a:pPr algn="l"/>
+            <a:r>
+              <a:rPr lang="en-US" sz="2000" dirty="0">
+                <a:latin typeface="Times New Roman" panose="02020603050405020304" pitchFamily="18" charset="0"/>
+                <a:cs typeface="Times New Roman" panose="02020603050405020304" pitchFamily="18" charset="0"/>
+              </a:rPr>
+              <a:t>• 50,000 training images</a:t>
+            </a:r>
+          </a:p>
+          <a:p>
+            <a:pPr algn="l"/>
+            <a:r>
+              <a:rPr lang="en-US" sz="2000" dirty="0">
+                <a:latin typeface="Times New Roman" panose="02020603050405020304" pitchFamily="18" charset="0"/>
+                <a:cs typeface="Times New Roman" panose="02020603050405020304" pitchFamily="18" charset="0"/>
+              </a:rPr>
+              <a:t>• 10,000 test images</a:t>
+            </a:r>
+          </a:p>
+          <a:p>
+            <a:pPr algn="l"/>
+            <a:r>
+              <a:rPr lang="en-US" sz="2000" dirty="0">
+                <a:latin typeface="Times New Roman" panose="02020603050405020304" pitchFamily="18" charset="0"/>
+                <a:cs typeface="Times New Roman" panose="02020603050405020304" pitchFamily="18" charset="0"/>
+              </a:rPr>
+              <a:t>Chosen due to its small resolution</a:t>
+            </a:r>
+          </a:p>
+          <a:p>
+            <a:pPr algn="l"/>
+            <a:r>
+              <a:rPr lang="en-US" sz="2000" dirty="0">
+                <a:latin typeface="Times New Roman" panose="02020603050405020304" pitchFamily="18" charset="0"/>
+                <a:cs typeface="Times New Roman" panose="02020603050405020304" pitchFamily="18" charset="0"/>
+              </a:rPr>
+              <a:t>which fits low-resolution classification research</a:t>
+            </a:r>
+          </a:p>
+          <a:p>
+            <a:pPr algn="l"/>
+            <a:endParaRPr lang="en-US" sz="2000" dirty="0">
+              <a:latin typeface="Times New Roman" panose="02020603050405020304" pitchFamily="18" charset="0"/>
+              <a:cs typeface="Times New Roman" panose="02020603050405020304" pitchFamily="18" charset="0"/>
+            </a:endParaRPr>
+          </a:p>
+          <a:p>
+            <a:pPr algn="l"/>
+            <a:r>
+              <a:rPr lang="en-US" sz="2000" dirty="0">
+                <a:latin typeface="Times New Roman" panose="02020603050405020304" pitchFamily="18" charset="0"/>
+                <a:cs typeface="Times New Roman" panose="02020603050405020304" pitchFamily="18" charset="0"/>
+              </a:rPr>
+              <a:t>Future work:</a:t>
+            </a:r>
+          </a:p>
+          <a:p>
+            <a:pPr algn="l"/>
+            <a:r>
+              <a:rPr lang="en-US" sz="2000" dirty="0">
+                <a:latin typeface="Times New Roman" panose="02020603050405020304" pitchFamily="18" charset="0"/>
+                <a:cs typeface="Times New Roman" panose="02020603050405020304" pitchFamily="18" charset="0"/>
+              </a:rPr>
+              <a:t>• Additional experiments on </a:t>
+            </a:r>
+            <a:r>
+              <a:rPr lang="en-US" sz="2000" b="1" dirty="0">
+                <a:latin typeface="Times New Roman" panose="02020603050405020304" pitchFamily="18" charset="0"/>
+                <a:cs typeface="Times New Roman" panose="02020603050405020304" pitchFamily="18" charset="0"/>
+              </a:rPr>
+              <a:t>MNIST</a:t>
+            </a:r>
+            <a:endParaRPr lang="he-IL" sz="2000" b="1" dirty="0">
+              <a:latin typeface="Times New Roman" panose="02020603050405020304" pitchFamily="18" charset="0"/>
+              <a:cs typeface="Times New Roman" panose="02020603050405020304" pitchFamily="18" charset="0"/>
+            </a:endParaRPr>
           </a:p>
         </p:txBody>
       </p:sp>
     </p:spTree>
     <p:extLst>
       <p:ext uri="{BB962C8B-B14F-4D97-AF65-F5344CB8AC3E}">
-        <p14:creationId xmlns:p14="http://schemas.microsoft.com/office/powerpoint/2010/main" val="300376388"/>
+        <p14:creationId xmlns:p14="http://schemas.microsoft.com/office/powerpoint/2010/main" val="388990675"/>
+      </p:ext>
+    </p:extLst>
+  </p:cSld>
+  <p:clrMapOvr>
+    <a:masterClrMapping/>
+  </p:clrMapOvr>
+</p:sld>
+</file>
+
+<file path=ppt/slides/slide6.xml><?xml version="1.0" encoding="utf-8"?>
+<p:sld xmlns:a="http://schemas.openxmlformats.org/drawingml/2006/main" xmlns:r="http://schemas.openxmlformats.org/officeDocument/2006/relationships" xmlns:p="http://schemas.openxmlformats.org/presentationml/2006/main">
+  <p:cSld>
+    <p:spTree>
+      <p:nvGrpSpPr>
+        <p:cNvPr id="1" name="">
+          <a:extLst>
+            <a:ext uri="{FF2B5EF4-FFF2-40B4-BE49-F238E27FC236}">
+              <a16:creationId xmlns:a16="http://schemas.microsoft.com/office/drawing/2014/main" id="{5DF48FC4-3560-ECA0-F924-153A65C2A0C5}"/>
+            </a:ext>
+          </a:extLst>
+        </p:cNvPr>
+        <p:cNvGrpSpPr/>
+        <p:nvPr/>
+      </p:nvGrpSpPr>
+      <p:grpSpPr>
+        <a:xfrm>
+          <a:off x="0" y="0"/>
+          <a:ext cx="0" cy="0"/>
+          <a:chOff x="0" y="0"/>
+          <a:chExt cx="0" cy="0"/>
+        </a:xfrm>
+      </p:grpSpPr>
+      <p:sp>
+        <p:nvSpPr>
+          <p:cNvPr id="7" name="כותרת משנה 6">
+            <a:extLst>
+              <a:ext uri="{FF2B5EF4-FFF2-40B4-BE49-F238E27FC236}">
+                <a16:creationId xmlns:a16="http://schemas.microsoft.com/office/drawing/2014/main" id="{07C8E569-3BC7-45BD-9BB4-B3C66D324ABE}"/>
+              </a:ext>
+            </a:extLst>
+          </p:cNvPr>
+          <p:cNvSpPr>
+            <a:spLocks noGrp="1"/>
+          </p:cNvSpPr>
+          <p:nvPr>
+            <p:ph type="subTitle" idx="1"/>
+          </p:nvPr>
+        </p:nvSpPr>
+        <p:spPr>
+          <a:xfrm>
+            <a:off x="1706880" y="658368"/>
+            <a:ext cx="9144000" cy="978408"/>
+          </a:xfrm>
+        </p:spPr>
+        <p:txBody>
+          <a:bodyPr/>
+          <a:lstStyle/>
+          <a:p>
+            <a:r>
+              <a:rPr lang="en-US" b="1" dirty="0">
+                <a:latin typeface="Times New Roman" panose="02020603050405020304" pitchFamily="18" charset="0"/>
+                <a:cs typeface="Times New Roman" panose="02020603050405020304" pitchFamily="18" charset="0"/>
+              </a:rPr>
+              <a:t>THz-Like Image Degradation Simulation</a:t>
+            </a:r>
+            <a:endParaRPr lang="he-IL" b="1" dirty="0">
+              <a:latin typeface="Times New Roman" panose="02020603050405020304" pitchFamily="18" charset="0"/>
+              <a:cs typeface="Times New Roman" panose="02020603050405020304" pitchFamily="18" charset="0"/>
+            </a:endParaRPr>
+          </a:p>
+        </p:txBody>
+      </p:sp>
+      <p:sp>
+        <p:nvSpPr>
+          <p:cNvPr id="11" name="כותרת משנה 6">
+            <a:extLst>
+              <a:ext uri="{FF2B5EF4-FFF2-40B4-BE49-F238E27FC236}">
+                <a16:creationId xmlns:a16="http://schemas.microsoft.com/office/drawing/2014/main" id="{FDCD09A2-85D8-D608-0F22-5C8FFDE6E769}"/>
+              </a:ext>
+            </a:extLst>
+          </p:cNvPr>
+          <p:cNvSpPr txBox="1">
+            <a:spLocks/>
+          </p:cNvSpPr>
+          <p:nvPr/>
+        </p:nvSpPr>
+        <p:spPr>
+          <a:xfrm>
+            <a:off x="1633728" y="1435608"/>
+            <a:ext cx="4968240" cy="4242816"/>
+          </a:xfrm>
+          <a:prstGeom prst="rect">
+            <a:avLst/>
+          </a:prstGeom>
+        </p:spPr>
+        <p:txBody>
+          <a:bodyPr vert="horz" lIns="91440" tIns="45720" rIns="91440" bIns="45720" rtlCol="1">
+            <a:normAutofit/>
+          </a:bodyPr>
+          <a:lstStyle>
+            <a:lvl1pPr marL="0" indent="0" algn="ctr" defTabSz="914400" rtl="1" eaLnBrk="1" latinLnBrk="0" hangingPunct="1">
+              <a:lnSpc>
+                <a:spcPct val="90000"/>
+              </a:lnSpc>
+              <a:spcBef>
+                <a:spcPts val="1000"/>
+              </a:spcBef>
+              <a:buFont typeface="Arial" panose="020B0604020202020204" pitchFamily="34" charset="0"/>
+              <a:buNone/>
+              <a:defRPr sz="2400" kern="1200">
+                <a:solidFill>
+                  <a:schemeClr val="tx1"/>
+                </a:solidFill>
+                <a:latin typeface="+mn-lt"/>
+                <a:ea typeface="+mn-ea"/>
+                <a:cs typeface="+mn-cs"/>
+              </a:defRPr>
+            </a:lvl1pPr>
+            <a:lvl2pPr marL="457200" indent="0" algn="ctr" defTabSz="914400" rtl="1" eaLnBrk="1" latinLnBrk="0" hangingPunct="1">
+              <a:lnSpc>
+                <a:spcPct val="90000"/>
+              </a:lnSpc>
+              <a:spcBef>
+                <a:spcPts val="500"/>
+              </a:spcBef>
+              <a:buFont typeface="Arial" panose="020B0604020202020204" pitchFamily="34" charset="0"/>
+              <a:buNone/>
+              <a:defRPr sz="2000" kern="1200">
+                <a:solidFill>
+                  <a:schemeClr val="tx1"/>
+                </a:solidFill>
+                <a:latin typeface="+mn-lt"/>
+                <a:ea typeface="+mn-ea"/>
+                <a:cs typeface="+mn-cs"/>
+              </a:defRPr>
+            </a:lvl2pPr>
+            <a:lvl3pPr marL="914400" indent="0" algn="ctr" defTabSz="914400" rtl="1" eaLnBrk="1" latinLnBrk="0" hangingPunct="1">
+              <a:lnSpc>
+                <a:spcPct val="90000"/>
+              </a:lnSpc>
+              <a:spcBef>
+                <a:spcPts val="500"/>
+              </a:spcBef>
+              <a:buFont typeface="Arial" panose="020B0604020202020204" pitchFamily="34" charset="0"/>
+              <a:buNone/>
+              <a:defRPr sz="1800" kern="1200">
+                <a:solidFill>
+                  <a:schemeClr val="tx1"/>
+                </a:solidFill>
+                <a:latin typeface="+mn-lt"/>
+                <a:ea typeface="+mn-ea"/>
+                <a:cs typeface="+mn-cs"/>
+              </a:defRPr>
+            </a:lvl3pPr>
+            <a:lvl4pPr marL="1371600" indent="0" algn="ctr" defTabSz="914400" rtl="1" eaLnBrk="1" latinLnBrk="0" hangingPunct="1">
+              <a:lnSpc>
+                <a:spcPct val="90000"/>
+              </a:lnSpc>
+              <a:spcBef>
+                <a:spcPts val="500"/>
+              </a:spcBef>
+              <a:buFont typeface="Arial" panose="020B0604020202020204" pitchFamily="34" charset="0"/>
+              <a:buNone/>
+              <a:defRPr sz="1600" kern="1200">
+                <a:solidFill>
+                  <a:schemeClr val="tx1"/>
+                </a:solidFill>
+                <a:latin typeface="+mn-lt"/>
+                <a:ea typeface="+mn-ea"/>
+                <a:cs typeface="+mn-cs"/>
+              </a:defRPr>
+            </a:lvl4pPr>
+            <a:lvl5pPr marL="1828800" indent="0" algn="ctr" defTabSz="914400" rtl="1" eaLnBrk="1" latinLnBrk="0" hangingPunct="1">
+              <a:lnSpc>
+                <a:spcPct val="90000"/>
+              </a:lnSpc>
+              <a:spcBef>
+                <a:spcPts val="500"/>
+              </a:spcBef>
+              <a:buFont typeface="Arial" panose="020B0604020202020204" pitchFamily="34" charset="0"/>
+              <a:buNone/>
+              <a:defRPr sz="1600" kern="1200">
+                <a:solidFill>
+                  <a:schemeClr val="tx1"/>
+                </a:solidFill>
+                <a:latin typeface="+mn-lt"/>
+                <a:ea typeface="+mn-ea"/>
+                <a:cs typeface="+mn-cs"/>
+              </a:defRPr>
+            </a:lvl5pPr>
+            <a:lvl6pPr marL="2286000" indent="0" algn="ctr" defTabSz="914400" rtl="1" eaLnBrk="1" latinLnBrk="0" hangingPunct="1">
+              <a:lnSpc>
+                <a:spcPct val="90000"/>
+              </a:lnSpc>
+              <a:spcBef>
+                <a:spcPts val="500"/>
+              </a:spcBef>
+              <a:buFont typeface="Arial" panose="020B0604020202020204" pitchFamily="34" charset="0"/>
+              <a:buNone/>
+              <a:defRPr sz="1600" kern="1200">
+                <a:solidFill>
+                  <a:schemeClr val="tx1"/>
+                </a:solidFill>
+                <a:latin typeface="+mn-lt"/>
+                <a:ea typeface="+mn-ea"/>
+                <a:cs typeface="+mn-cs"/>
+              </a:defRPr>
+            </a:lvl6pPr>
+            <a:lvl7pPr marL="2743200" indent="0" algn="ctr" defTabSz="914400" rtl="1" eaLnBrk="1" latinLnBrk="0" hangingPunct="1">
+              <a:lnSpc>
+                <a:spcPct val="90000"/>
+              </a:lnSpc>
+              <a:spcBef>
+                <a:spcPts val="500"/>
+              </a:spcBef>
+              <a:buFont typeface="Arial" panose="020B0604020202020204" pitchFamily="34" charset="0"/>
+              <a:buNone/>
+              <a:defRPr sz="1600" kern="1200">
+                <a:solidFill>
+                  <a:schemeClr val="tx1"/>
+                </a:solidFill>
+                <a:latin typeface="+mn-lt"/>
+                <a:ea typeface="+mn-ea"/>
+                <a:cs typeface="+mn-cs"/>
+              </a:defRPr>
+            </a:lvl7pPr>
+            <a:lvl8pPr marL="3200400" indent="0" algn="ctr" defTabSz="914400" rtl="1" eaLnBrk="1" latinLnBrk="0" hangingPunct="1">
+              <a:lnSpc>
+                <a:spcPct val="90000"/>
+              </a:lnSpc>
+              <a:spcBef>
+                <a:spcPts val="500"/>
+              </a:spcBef>
+              <a:buFont typeface="Arial" panose="020B0604020202020204" pitchFamily="34" charset="0"/>
+              <a:buNone/>
+              <a:defRPr sz="1600" kern="1200">
+                <a:solidFill>
+                  <a:schemeClr val="tx1"/>
+                </a:solidFill>
+                <a:latin typeface="+mn-lt"/>
+                <a:ea typeface="+mn-ea"/>
+                <a:cs typeface="+mn-cs"/>
+              </a:defRPr>
+            </a:lvl8pPr>
+            <a:lvl9pPr marL="3657600" indent="0" algn="ctr" defTabSz="914400" rtl="1" eaLnBrk="1" latinLnBrk="0" hangingPunct="1">
+              <a:lnSpc>
+                <a:spcPct val="90000"/>
+              </a:lnSpc>
+              <a:spcBef>
+                <a:spcPts val="500"/>
+              </a:spcBef>
+              <a:buFont typeface="Arial" panose="020B0604020202020204" pitchFamily="34" charset="0"/>
+              <a:buNone/>
+              <a:defRPr sz="1600" kern="1200">
+                <a:solidFill>
+                  <a:schemeClr val="tx1"/>
+                </a:solidFill>
+                <a:latin typeface="+mn-lt"/>
+                <a:ea typeface="+mn-ea"/>
+                <a:cs typeface="+mn-cs"/>
+              </a:defRPr>
+            </a:lvl9pPr>
+          </a:lstStyle>
+          <a:p>
+            <a:pPr algn="l"/>
+            <a:r>
+              <a:rPr lang="en-US" sz="2000" dirty="0">
+                <a:latin typeface="Times New Roman" panose="02020603050405020304" pitchFamily="18" charset="0"/>
+                <a:cs typeface="Times New Roman" panose="02020603050405020304" pitchFamily="18" charset="0"/>
+              </a:rPr>
+              <a:t>To simulate THz imaging conditions,</a:t>
+            </a:r>
+          </a:p>
+          <a:p>
+            <a:pPr algn="l"/>
+            <a:r>
+              <a:rPr lang="en-US" sz="2000" dirty="0">
+                <a:latin typeface="Times New Roman" panose="02020603050405020304" pitchFamily="18" charset="0"/>
+                <a:cs typeface="Times New Roman" panose="02020603050405020304" pitchFamily="18" charset="0"/>
+              </a:rPr>
+              <a:t>we apply controlled degradation to the images.</a:t>
+            </a:r>
+          </a:p>
+          <a:p>
+            <a:pPr algn="l"/>
+            <a:endParaRPr lang="en-US" sz="2000" dirty="0">
+              <a:latin typeface="Times New Roman" panose="02020603050405020304" pitchFamily="18" charset="0"/>
+              <a:cs typeface="Times New Roman" panose="02020603050405020304" pitchFamily="18" charset="0"/>
+            </a:endParaRPr>
+          </a:p>
+          <a:p>
+            <a:pPr algn="l"/>
+            <a:r>
+              <a:rPr lang="en-US" sz="2000" dirty="0">
+                <a:latin typeface="Times New Roman" panose="02020603050405020304" pitchFamily="18" charset="0"/>
+                <a:cs typeface="Times New Roman" panose="02020603050405020304" pitchFamily="18" charset="0"/>
+              </a:rPr>
+              <a:t>Degradation operations include:</a:t>
+            </a:r>
+          </a:p>
+          <a:p>
+            <a:pPr algn="l"/>
+            <a:endParaRPr lang="en-US" sz="2000" dirty="0">
+              <a:latin typeface="Times New Roman" panose="02020603050405020304" pitchFamily="18" charset="0"/>
+              <a:cs typeface="Times New Roman" panose="02020603050405020304" pitchFamily="18" charset="0"/>
+            </a:endParaRPr>
+          </a:p>
+          <a:p>
+            <a:pPr algn="l"/>
+            <a:r>
+              <a:rPr lang="en-US" sz="2000" dirty="0">
+                <a:latin typeface="Times New Roman" panose="02020603050405020304" pitchFamily="18" charset="0"/>
+                <a:cs typeface="Times New Roman" panose="02020603050405020304" pitchFamily="18" charset="0"/>
+              </a:rPr>
+              <a:t>• Resolution reduction (</a:t>
+            </a:r>
+            <a:r>
+              <a:rPr lang="en-US" sz="2000" dirty="0" err="1">
+                <a:latin typeface="Times New Roman" panose="02020603050405020304" pitchFamily="18" charset="0"/>
+                <a:cs typeface="Times New Roman" panose="02020603050405020304" pitchFamily="18" charset="0"/>
+              </a:rPr>
+              <a:t>downsampling</a:t>
+            </a:r>
+            <a:r>
+              <a:rPr lang="en-US" sz="2000" dirty="0">
+                <a:latin typeface="Times New Roman" panose="02020603050405020304" pitchFamily="18" charset="0"/>
+                <a:cs typeface="Times New Roman" panose="02020603050405020304" pitchFamily="18" charset="0"/>
+              </a:rPr>
+              <a:t>)</a:t>
+            </a:r>
+          </a:p>
+          <a:p>
+            <a:pPr algn="l"/>
+            <a:r>
+              <a:rPr lang="en-US" sz="2000" dirty="0">
+                <a:latin typeface="Times New Roman" panose="02020603050405020304" pitchFamily="18" charset="0"/>
+                <a:cs typeface="Times New Roman" panose="02020603050405020304" pitchFamily="18" charset="0"/>
+              </a:rPr>
+              <a:t>• Gaussian blur</a:t>
+            </a:r>
+          </a:p>
+          <a:p>
+            <a:pPr algn="l"/>
+            <a:r>
+              <a:rPr lang="en-US" sz="2000" dirty="0">
+                <a:latin typeface="Times New Roman" panose="02020603050405020304" pitchFamily="18" charset="0"/>
+                <a:cs typeface="Times New Roman" panose="02020603050405020304" pitchFamily="18" charset="0"/>
+              </a:rPr>
+              <a:t>• Noise injection</a:t>
+            </a:r>
+          </a:p>
+          <a:p>
+            <a:pPr algn="l"/>
+            <a:r>
+              <a:rPr lang="en-US" sz="2000" dirty="0">
+                <a:latin typeface="Times New Roman" panose="02020603050405020304" pitchFamily="18" charset="0"/>
+                <a:cs typeface="Times New Roman" panose="02020603050405020304" pitchFamily="18" charset="0"/>
+              </a:rPr>
+              <a:t>• Color information removal</a:t>
+            </a:r>
+          </a:p>
+          <a:p>
+            <a:pPr algn="l"/>
+            <a:r>
+              <a:rPr lang="en-US" sz="2000" dirty="0">
+                <a:solidFill>
+                  <a:srgbClr val="FF0000"/>
+                </a:solidFill>
+              </a:rPr>
+              <a:t>[Images showing degradation pipeline]</a:t>
+            </a:r>
+            <a:endParaRPr lang="he-IL" sz="2000" dirty="0">
+              <a:solidFill>
+                <a:srgbClr val="FF0000"/>
+              </a:solidFill>
+              <a:latin typeface="Times New Roman" panose="02020603050405020304" pitchFamily="18" charset="0"/>
+              <a:cs typeface="Times New Roman" panose="02020603050405020304" pitchFamily="18" charset="0"/>
+            </a:endParaRPr>
+          </a:p>
+        </p:txBody>
+      </p:sp>
+      <p:sp>
+        <p:nvSpPr>
+          <p:cNvPr id="2" name="כותרת משנה 6">
+            <a:extLst>
+              <a:ext uri="{FF2B5EF4-FFF2-40B4-BE49-F238E27FC236}">
+                <a16:creationId xmlns:a16="http://schemas.microsoft.com/office/drawing/2014/main" id="{FF564FB0-B24A-E90C-8867-99CC31277C86}"/>
+              </a:ext>
+            </a:extLst>
+          </p:cNvPr>
+          <p:cNvSpPr txBox="1">
+            <a:spLocks/>
+          </p:cNvSpPr>
+          <p:nvPr/>
+        </p:nvSpPr>
+        <p:spPr>
+          <a:xfrm>
+            <a:off x="7744968" y="1435608"/>
+            <a:ext cx="2898648" cy="4242816"/>
+          </a:xfrm>
+          <a:prstGeom prst="rect">
+            <a:avLst/>
+          </a:prstGeom>
+        </p:spPr>
+        <p:txBody>
+          <a:bodyPr vert="horz" lIns="91440" tIns="45720" rIns="91440" bIns="45720" rtlCol="1">
+            <a:normAutofit/>
+          </a:bodyPr>
+          <a:lstStyle>
+            <a:lvl1pPr marL="0" indent="0" algn="ctr" defTabSz="914400" rtl="1" eaLnBrk="1" latinLnBrk="0" hangingPunct="1">
+              <a:lnSpc>
+                <a:spcPct val="90000"/>
+              </a:lnSpc>
+              <a:spcBef>
+                <a:spcPts val="1000"/>
+              </a:spcBef>
+              <a:buFont typeface="Arial" panose="020B0604020202020204" pitchFamily="34" charset="0"/>
+              <a:buNone/>
+              <a:defRPr sz="2400" kern="1200">
+                <a:solidFill>
+                  <a:schemeClr val="tx1"/>
+                </a:solidFill>
+                <a:latin typeface="+mn-lt"/>
+                <a:ea typeface="+mn-ea"/>
+                <a:cs typeface="+mn-cs"/>
+              </a:defRPr>
+            </a:lvl1pPr>
+            <a:lvl2pPr marL="457200" indent="0" algn="ctr" defTabSz="914400" rtl="1" eaLnBrk="1" latinLnBrk="0" hangingPunct="1">
+              <a:lnSpc>
+                <a:spcPct val="90000"/>
+              </a:lnSpc>
+              <a:spcBef>
+                <a:spcPts val="500"/>
+              </a:spcBef>
+              <a:buFont typeface="Arial" panose="020B0604020202020204" pitchFamily="34" charset="0"/>
+              <a:buNone/>
+              <a:defRPr sz="2000" kern="1200">
+                <a:solidFill>
+                  <a:schemeClr val="tx1"/>
+                </a:solidFill>
+                <a:latin typeface="+mn-lt"/>
+                <a:ea typeface="+mn-ea"/>
+                <a:cs typeface="+mn-cs"/>
+              </a:defRPr>
+            </a:lvl2pPr>
+            <a:lvl3pPr marL="914400" indent="0" algn="ctr" defTabSz="914400" rtl="1" eaLnBrk="1" latinLnBrk="0" hangingPunct="1">
+              <a:lnSpc>
+                <a:spcPct val="90000"/>
+              </a:lnSpc>
+              <a:spcBef>
+                <a:spcPts val="500"/>
+              </a:spcBef>
+              <a:buFont typeface="Arial" panose="020B0604020202020204" pitchFamily="34" charset="0"/>
+              <a:buNone/>
+              <a:defRPr sz="1800" kern="1200">
+                <a:solidFill>
+                  <a:schemeClr val="tx1"/>
+                </a:solidFill>
+                <a:latin typeface="+mn-lt"/>
+                <a:ea typeface="+mn-ea"/>
+                <a:cs typeface="+mn-cs"/>
+              </a:defRPr>
+            </a:lvl3pPr>
+            <a:lvl4pPr marL="1371600" indent="0" algn="ctr" defTabSz="914400" rtl="1" eaLnBrk="1" latinLnBrk="0" hangingPunct="1">
+              <a:lnSpc>
+                <a:spcPct val="90000"/>
+              </a:lnSpc>
+              <a:spcBef>
+                <a:spcPts val="500"/>
+              </a:spcBef>
+              <a:buFont typeface="Arial" panose="020B0604020202020204" pitchFamily="34" charset="0"/>
+              <a:buNone/>
+              <a:defRPr sz="1600" kern="1200">
+                <a:solidFill>
+                  <a:schemeClr val="tx1"/>
+                </a:solidFill>
+                <a:latin typeface="+mn-lt"/>
+                <a:ea typeface="+mn-ea"/>
+                <a:cs typeface="+mn-cs"/>
+              </a:defRPr>
+            </a:lvl4pPr>
+            <a:lvl5pPr marL="1828800" indent="0" algn="ctr" defTabSz="914400" rtl="1" eaLnBrk="1" latinLnBrk="0" hangingPunct="1">
+              <a:lnSpc>
+                <a:spcPct val="90000"/>
+              </a:lnSpc>
+              <a:spcBef>
+                <a:spcPts val="500"/>
+              </a:spcBef>
+              <a:buFont typeface="Arial" panose="020B0604020202020204" pitchFamily="34" charset="0"/>
+              <a:buNone/>
+              <a:defRPr sz="1600" kern="1200">
+                <a:solidFill>
+                  <a:schemeClr val="tx1"/>
+                </a:solidFill>
+                <a:latin typeface="+mn-lt"/>
+                <a:ea typeface="+mn-ea"/>
+                <a:cs typeface="+mn-cs"/>
+              </a:defRPr>
+            </a:lvl5pPr>
+            <a:lvl6pPr marL="2286000" indent="0" algn="ctr" defTabSz="914400" rtl="1" eaLnBrk="1" latinLnBrk="0" hangingPunct="1">
+              <a:lnSpc>
+                <a:spcPct val="90000"/>
+              </a:lnSpc>
+              <a:spcBef>
+                <a:spcPts val="500"/>
+              </a:spcBef>
+              <a:buFont typeface="Arial" panose="020B0604020202020204" pitchFamily="34" charset="0"/>
+              <a:buNone/>
+              <a:defRPr sz="1600" kern="1200">
+                <a:solidFill>
+                  <a:schemeClr val="tx1"/>
+                </a:solidFill>
+                <a:latin typeface="+mn-lt"/>
+                <a:ea typeface="+mn-ea"/>
+                <a:cs typeface="+mn-cs"/>
+              </a:defRPr>
+            </a:lvl6pPr>
+            <a:lvl7pPr marL="2743200" indent="0" algn="ctr" defTabSz="914400" rtl="1" eaLnBrk="1" latinLnBrk="0" hangingPunct="1">
+              <a:lnSpc>
+                <a:spcPct val="90000"/>
+              </a:lnSpc>
+              <a:spcBef>
+                <a:spcPts val="500"/>
+              </a:spcBef>
+              <a:buFont typeface="Arial" panose="020B0604020202020204" pitchFamily="34" charset="0"/>
+              <a:buNone/>
+              <a:defRPr sz="1600" kern="1200">
+                <a:solidFill>
+                  <a:schemeClr val="tx1"/>
+                </a:solidFill>
+                <a:latin typeface="+mn-lt"/>
+                <a:ea typeface="+mn-ea"/>
+                <a:cs typeface="+mn-cs"/>
+              </a:defRPr>
+            </a:lvl7pPr>
+            <a:lvl8pPr marL="3200400" indent="0" algn="ctr" defTabSz="914400" rtl="1" eaLnBrk="1" latinLnBrk="0" hangingPunct="1">
+              <a:lnSpc>
+                <a:spcPct val="90000"/>
+              </a:lnSpc>
+              <a:spcBef>
+                <a:spcPts val="500"/>
+              </a:spcBef>
+              <a:buFont typeface="Arial" panose="020B0604020202020204" pitchFamily="34" charset="0"/>
+              <a:buNone/>
+              <a:defRPr sz="1600" kern="1200">
+                <a:solidFill>
+                  <a:schemeClr val="tx1"/>
+                </a:solidFill>
+                <a:latin typeface="+mn-lt"/>
+                <a:ea typeface="+mn-ea"/>
+                <a:cs typeface="+mn-cs"/>
+              </a:defRPr>
+            </a:lvl8pPr>
+            <a:lvl9pPr marL="3657600" indent="0" algn="ctr" defTabSz="914400" rtl="1" eaLnBrk="1" latinLnBrk="0" hangingPunct="1">
+              <a:lnSpc>
+                <a:spcPct val="90000"/>
+              </a:lnSpc>
+              <a:spcBef>
+                <a:spcPts val="500"/>
+              </a:spcBef>
+              <a:buFont typeface="Arial" panose="020B0604020202020204" pitchFamily="34" charset="0"/>
+              <a:buNone/>
+              <a:defRPr sz="1600" kern="1200">
+                <a:solidFill>
+                  <a:schemeClr val="tx1"/>
+                </a:solidFill>
+                <a:latin typeface="+mn-lt"/>
+                <a:ea typeface="+mn-ea"/>
+                <a:cs typeface="+mn-cs"/>
+              </a:defRPr>
+            </a:lvl9pPr>
+          </a:lstStyle>
+          <a:p>
+            <a:pPr algn="l"/>
+            <a:r>
+              <a:rPr lang="he-IL" sz="2000" dirty="0">
+                <a:solidFill>
+                  <a:srgbClr val="FF0000"/>
+                </a:solidFill>
+                <a:latin typeface="Times New Roman" panose="02020603050405020304" pitchFamily="18" charset="0"/>
+                <a:cs typeface="Times New Roman" panose="02020603050405020304" pitchFamily="18" charset="0"/>
+              </a:rPr>
+              <a:t>לשים תרשים:</a:t>
+            </a:r>
+            <a:br>
+              <a:rPr lang="en-US" sz="2000" dirty="0">
+                <a:solidFill>
+                  <a:srgbClr val="FF0000"/>
+                </a:solidFill>
+                <a:latin typeface="Times New Roman" panose="02020603050405020304" pitchFamily="18" charset="0"/>
+                <a:cs typeface="Times New Roman" panose="02020603050405020304" pitchFamily="18" charset="0"/>
+              </a:rPr>
+            </a:br>
+            <a:r>
+              <a:rPr lang="en-US" sz="2000" dirty="0">
+                <a:solidFill>
+                  <a:srgbClr val="FF0000"/>
+                </a:solidFill>
+                <a:latin typeface="Times New Roman" panose="02020603050405020304" pitchFamily="18" charset="0"/>
+                <a:cs typeface="Times New Roman" panose="02020603050405020304" pitchFamily="18" charset="0"/>
+              </a:rPr>
+              <a:t>Original Image</a:t>
+            </a:r>
+          </a:p>
+          <a:p>
+            <a:pPr algn="l"/>
+            <a:r>
+              <a:rPr lang="en-US" sz="2000" dirty="0">
+                <a:solidFill>
+                  <a:srgbClr val="FF0000"/>
+                </a:solidFill>
+                <a:latin typeface="Times New Roman" panose="02020603050405020304" pitchFamily="18" charset="0"/>
+                <a:cs typeface="Times New Roman" panose="02020603050405020304" pitchFamily="18" charset="0"/>
+              </a:rPr>
+              <a:t>      ↓</a:t>
+            </a:r>
+          </a:p>
+          <a:p>
+            <a:pPr algn="l"/>
+            <a:r>
+              <a:rPr lang="en-US" sz="2000" dirty="0" err="1">
+                <a:solidFill>
+                  <a:srgbClr val="FF0000"/>
+                </a:solidFill>
+                <a:latin typeface="Times New Roman" panose="02020603050405020304" pitchFamily="18" charset="0"/>
+                <a:cs typeface="Times New Roman" panose="02020603050405020304" pitchFamily="18" charset="0"/>
+              </a:rPr>
+              <a:t>Downsample</a:t>
+            </a:r>
+            <a:r>
+              <a:rPr lang="en-US" sz="2000" dirty="0">
+                <a:solidFill>
+                  <a:srgbClr val="FF0000"/>
+                </a:solidFill>
+                <a:latin typeface="Times New Roman" panose="02020603050405020304" pitchFamily="18" charset="0"/>
+                <a:cs typeface="Times New Roman" panose="02020603050405020304" pitchFamily="18" charset="0"/>
+              </a:rPr>
+              <a:t> (</a:t>
+            </a:r>
+            <a:r>
+              <a:rPr lang="en-US" sz="2000" dirty="0">
+                <a:solidFill>
+                  <a:srgbClr val="FF0000"/>
+                </a:solidFill>
+              </a:rPr>
+              <a:t>Low Resolution)</a:t>
+            </a:r>
+            <a:endParaRPr lang="en-US" sz="2000" dirty="0">
+              <a:solidFill>
+                <a:srgbClr val="FF0000"/>
+              </a:solidFill>
+              <a:latin typeface="Times New Roman" panose="02020603050405020304" pitchFamily="18" charset="0"/>
+              <a:cs typeface="Times New Roman" panose="02020603050405020304" pitchFamily="18" charset="0"/>
+            </a:endParaRPr>
+          </a:p>
+          <a:p>
+            <a:pPr algn="l"/>
+            <a:r>
+              <a:rPr lang="en-US" sz="2000" dirty="0">
+                <a:solidFill>
+                  <a:srgbClr val="FF0000"/>
+                </a:solidFill>
+                <a:latin typeface="Times New Roman" panose="02020603050405020304" pitchFamily="18" charset="0"/>
+                <a:cs typeface="Times New Roman" panose="02020603050405020304" pitchFamily="18" charset="0"/>
+              </a:rPr>
+              <a:t>      ↓</a:t>
+            </a:r>
+          </a:p>
+          <a:p>
+            <a:pPr algn="l"/>
+            <a:r>
+              <a:rPr lang="en-US" sz="2000" dirty="0">
+                <a:solidFill>
+                  <a:srgbClr val="FF0000"/>
+                </a:solidFill>
+                <a:latin typeface="Times New Roman" panose="02020603050405020304" pitchFamily="18" charset="0"/>
+                <a:cs typeface="Times New Roman" panose="02020603050405020304" pitchFamily="18" charset="0"/>
+              </a:rPr>
+              <a:t>Blurred</a:t>
+            </a:r>
+          </a:p>
+          <a:p>
+            <a:pPr algn="l"/>
+            <a:r>
+              <a:rPr lang="en-US" sz="2000" dirty="0">
+                <a:solidFill>
+                  <a:srgbClr val="FF0000"/>
+                </a:solidFill>
+                <a:latin typeface="Times New Roman" panose="02020603050405020304" pitchFamily="18" charset="0"/>
+                <a:cs typeface="Times New Roman" panose="02020603050405020304" pitchFamily="18" charset="0"/>
+              </a:rPr>
+              <a:t>      ↓</a:t>
+            </a:r>
+          </a:p>
+          <a:p>
+            <a:pPr algn="l"/>
+            <a:r>
+              <a:rPr lang="en-US" sz="2000" dirty="0">
+                <a:solidFill>
+                  <a:srgbClr val="FF0000"/>
+                </a:solidFill>
+                <a:latin typeface="Times New Roman" panose="02020603050405020304" pitchFamily="18" charset="0"/>
+                <a:cs typeface="Times New Roman" panose="02020603050405020304" pitchFamily="18" charset="0"/>
+              </a:rPr>
+              <a:t>Noisy</a:t>
+            </a:r>
+          </a:p>
+        </p:txBody>
+      </p:sp>
+    </p:spTree>
+    <p:extLst>
+      <p:ext uri="{BB962C8B-B14F-4D97-AF65-F5344CB8AC3E}">
+        <p14:creationId xmlns:p14="http://schemas.microsoft.com/office/powerpoint/2010/main" val="511982932"/>
+      </p:ext>
+    </p:extLst>
+  </p:cSld>
+  <p:clrMapOvr>
+    <a:masterClrMapping/>
+  </p:clrMapOvr>
+</p:sld>
+</file>
+
+<file path=ppt/slides/slide7.xml><?xml version="1.0" encoding="utf-8"?>
+<p:sld xmlns:a="http://schemas.openxmlformats.org/drawingml/2006/main" xmlns:r="http://schemas.openxmlformats.org/officeDocument/2006/relationships" xmlns:p="http://schemas.openxmlformats.org/presentationml/2006/main">
+  <p:cSld>
+    <p:spTree>
+      <p:nvGrpSpPr>
+        <p:cNvPr id="1" name="">
+          <a:extLst>
+            <a:ext uri="{FF2B5EF4-FFF2-40B4-BE49-F238E27FC236}">
+              <a16:creationId xmlns:a16="http://schemas.microsoft.com/office/drawing/2014/main" id="{4C22B38A-73C5-C008-7561-DD1590E848BE}"/>
+            </a:ext>
+          </a:extLst>
+        </p:cNvPr>
+        <p:cNvGrpSpPr/>
+        <p:nvPr/>
+      </p:nvGrpSpPr>
+      <p:grpSpPr>
+        <a:xfrm>
+          <a:off x="0" y="0"/>
+          <a:ext cx="0" cy="0"/>
+          <a:chOff x="0" y="0"/>
+          <a:chExt cx="0" cy="0"/>
+        </a:xfrm>
+      </p:grpSpPr>
+      <p:sp>
+        <p:nvSpPr>
+          <p:cNvPr id="7" name="כותרת משנה 6">
+            <a:extLst>
+              <a:ext uri="{FF2B5EF4-FFF2-40B4-BE49-F238E27FC236}">
+                <a16:creationId xmlns:a16="http://schemas.microsoft.com/office/drawing/2014/main" id="{662ED99C-AEE1-BF44-09F2-52B955FF1101}"/>
+              </a:ext>
+            </a:extLst>
+          </p:cNvPr>
+          <p:cNvSpPr>
+            <a:spLocks noGrp="1"/>
+          </p:cNvSpPr>
+          <p:nvPr>
+            <p:ph type="subTitle" idx="1"/>
+          </p:nvPr>
+        </p:nvSpPr>
+        <p:spPr>
+          <a:xfrm>
+            <a:off x="1706880" y="658368"/>
+            <a:ext cx="9144000" cy="978408"/>
+          </a:xfrm>
+        </p:spPr>
+        <p:txBody>
+          <a:bodyPr/>
+          <a:lstStyle/>
+          <a:p>
+            <a:r>
+              <a:rPr lang="en-US" b="1">
+                <a:latin typeface="Times New Roman" panose="02020603050405020304" pitchFamily="18" charset="0"/>
+                <a:cs typeface="Times New Roman" panose="02020603050405020304" pitchFamily="18" charset="0"/>
+              </a:rPr>
+              <a:t>System Pipeline</a:t>
+            </a:r>
+            <a:endParaRPr lang="he-IL" b="1" dirty="0">
+              <a:latin typeface="Times New Roman" panose="02020603050405020304" pitchFamily="18" charset="0"/>
+              <a:cs typeface="Times New Roman" panose="02020603050405020304" pitchFamily="18" charset="0"/>
+            </a:endParaRPr>
+          </a:p>
+        </p:txBody>
+      </p:sp>
+      <p:sp>
+        <p:nvSpPr>
+          <p:cNvPr id="11" name="כותרת משנה 6">
+            <a:extLst>
+              <a:ext uri="{FF2B5EF4-FFF2-40B4-BE49-F238E27FC236}">
+                <a16:creationId xmlns:a16="http://schemas.microsoft.com/office/drawing/2014/main" id="{2EE2EBB1-0076-3A3E-151B-E5897E12BAB3}"/>
+              </a:ext>
+            </a:extLst>
+          </p:cNvPr>
+          <p:cNvSpPr txBox="1">
+            <a:spLocks/>
+          </p:cNvSpPr>
+          <p:nvPr/>
+        </p:nvSpPr>
+        <p:spPr>
+          <a:xfrm>
+            <a:off x="6501384" y="1069848"/>
+            <a:ext cx="5111496" cy="5724144"/>
+          </a:xfrm>
+          <a:prstGeom prst="rect">
+            <a:avLst/>
+          </a:prstGeom>
+        </p:spPr>
+        <p:txBody>
+          <a:bodyPr vert="horz" lIns="91440" tIns="45720" rIns="91440" bIns="45720" rtlCol="1">
+            <a:normAutofit fontScale="92500" lnSpcReduction="10000"/>
+          </a:bodyPr>
+          <a:lstStyle>
+            <a:lvl1pPr marL="0" indent="0" algn="ctr" defTabSz="914400" rtl="1" eaLnBrk="1" latinLnBrk="0" hangingPunct="1">
+              <a:lnSpc>
+                <a:spcPct val="90000"/>
+              </a:lnSpc>
+              <a:spcBef>
+                <a:spcPts val="1000"/>
+              </a:spcBef>
+              <a:buFont typeface="Arial" panose="020B0604020202020204" pitchFamily="34" charset="0"/>
+              <a:buNone/>
+              <a:defRPr sz="2400" kern="1200">
+                <a:solidFill>
+                  <a:schemeClr val="tx1"/>
+                </a:solidFill>
+                <a:latin typeface="+mn-lt"/>
+                <a:ea typeface="+mn-ea"/>
+                <a:cs typeface="+mn-cs"/>
+              </a:defRPr>
+            </a:lvl1pPr>
+            <a:lvl2pPr marL="457200" indent="0" algn="ctr" defTabSz="914400" rtl="1" eaLnBrk="1" latinLnBrk="0" hangingPunct="1">
+              <a:lnSpc>
+                <a:spcPct val="90000"/>
+              </a:lnSpc>
+              <a:spcBef>
+                <a:spcPts val="500"/>
+              </a:spcBef>
+              <a:buFont typeface="Arial" panose="020B0604020202020204" pitchFamily="34" charset="0"/>
+              <a:buNone/>
+              <a:defRPr sz="2000" kern="1200">
+                <a:solidFill>
+                  <a:schemeClr val="tx1"/>
+                </a:solidFill>
+                <a:latin typeface="+mn-lt"/>
+                <a:ea typeface="+mn-ea"/>
+                <a:cs typeface="+mn-cs"/>
+              </a:defRPr>
+            </a:lvl2pPr>
+            <a:lvl3pPr marL="914400" indent="0" algn="ctr" defTabSz="914400" rtl="1" eaLnBrk="1" latinLnBrk="0" hangingPunct="1">
+              <a:lnSpc>
+                <a:spcPct val="90000"/>
+              </a:lnSpc>
+              <a:spcBef>
+                <a:spcPts val="500"/>
+              </a:spcBef>
+              <a:buFont typeface="Arial" panose="020B0604020202020204" pitchFamily="34" charset="0"/>
+              <a:buNone/>
+              <a:defRPr sz="1800" kern="1200">
+                <a:solidFill>
+                  <a:schemeClr val="tx1"/>
+                </a:solidFill>
+                <a:latin typeface="+mn-lt"/>
+                <a:ea typeface="+mn-ea"/>
+                <a:cs typeface="+mn-cs"/>
+              </a:defRPr>
+            </a:lvl3pPr>
+            <a:lvl4pPr marL="1371600" indent="0" algn="ctr" defTabSz="914400" rtl="1" eaLnBrk="1" latinLnBrk="0" hangingPunct="1">
+              <a:lnSpc>
+                <a:spcPct val="90000"/>
+              </a:lnSpc>
+              <a:spcBef>
+                <a:spcPts val="500"/>
+              </a:spcBef>
+              <a:buFont typeface="Arial" panose="020B0604020202020204" pitchFamily="34" charset="0"/>
+              <a:buNone/>
+              <a:defRPr sz="1600" kern="1200">
+                <a:solidFill>
+                  <a:schemeClr val="tx1"/>
+                </a:solidFill>
+                <a:latin typeface="+mn-lt"/>
+                <a:ea typeface="+mn-ea"/>
+                <a:cs typeface="+mn-cs"/>
+              </a:defRPr>
+            </a:lvl4pPr>
+            <a:lvl5pPr marL="1828800" indent="0" algn="ctr" defTabSz="914400" rtl="1" eaLnBrk="1" latinLnBrk="0" hangingPunct="1">
+              <a:lnSpc>
+                <a:spcPct val="90000"/>
+              </a:lnSpc>
+              <a:spcBef>
+                <a:spcPts val="500"/>
+              </a:spcBef>
+              <a:buFont typeface="Arial" panose="020B0604020202020204" pitchFamily="34" charset="0"/>
+              <a:buNone/>
+              <a:defRPr sz="1600" kern="1200">
+                <a:solidFill>
+                  <a:schemeClr val="tx1"/>
+                </a:solidFill>
+                <a:latin typeface="+mn-lt"/>
+                <a:ea typeface="+mn-ea"/>
+                <a:cs typeface="+mn-cs"/>
+              </a:defRPr>
+            </a:lvl5pPr>
+            <a:lvl6pPr marL="2286000" indent="0" algn="ctr" defTabSz="914400" rtl="1" eaLnBrk="1" latinLnBrk="0" hangingPunct="1">
+              <a:lnSpc>
+                <a:spcPct val="90000"/>
+              </a:lnSpc>
+              <a:spcBef>
+                <a:spcPts val="500"/>
+              </a:spcBef>
+              <a:buFont typeface="Arial" panose="020B0604020202020204" pitchFamily="34" charset="0"/>
+              <a:buNone/>
+              <a:defRPr sz="1600" kern="1200">
+                <a:solidFill>
+                  <a:schemeClr val="tx1"/>
+                </a:solidFill>
+                <a:latin typeface="+mn-lt"/>
+                <a:ea typeface="+mn-ea"/>
+                <a:cs typeface="+mn-cs"/>
+              </a:defRPr>
+            </a:lvl6pPr>
+            <a:lvl7pPr marL="2743200" indent="0" algn="ctr" defTabSz="914400" rtl="1" eaLnBrk="1" latinLnBrk="0" hangingPunct="1">
+              <a:lnSpc>
+                <a:spcPct val="90000"/>
+              </a:lnSpc>
+              <a:spcBef>
+                <a:spcPts val="500"/>
+              </a:spcBef>
+              <a:buFont typeface="Arial" panose="020B0604020202020204" pitchFamily="34" charset="0"/>
+              <a:buNone/>
+              <a:defRPr sz="1600" kern="1200">
+                <a:solidFill>
+                  <a:schemeClr val="tx1"/>
+                </a:solidFill>
+                <a:latin typeface="+mn-lt"/>
+                <a:ea typeface="+mn-ea"/>
+                <a:cs typeface="+mn-cs"/>
+              </a:defRPr>
+            </a:lvl7pPr>
+            <a:lvl8pPr marL="3200400" indent="0" algn="ctr" defTabSz="914400" rtl="1" eaLnBrk="1" latinLnBrk="0" hangingPunct="1">
+              <a:lnSpc>
+                <a:spcPct val="90000"/>
+              </a:lnSpc>
+              <a:spcBef>
+                <a:spcPts val="500"/>
+              </a:spcBef>
+              <a:buFont typeface="Arial" panose="020B0604020202020204" pitchFamily="34" charset="0"/>
+              <a:buNone/>
+              <a:defRPr sz="1600" kern="1200">
+                <a:solidFill>
+                  <a:schemeClr val="tx1"/>
+                </a:solidFill>
+                <a:latin typeface="+mn-lt"/>
+                <a:ea typeface="+mn-ea"/>
+                <a:cs typeface="+mn-cs"/>
+              </a:defRPr>
+            </a:lvl8pPr>
+            <a:lvl9pPr marL="3657600" indent="0" algn="ctr" defTabSz="914400" rtl="1" eaLnBrk="1" latinLnBrk="0" hangingPunct="1">
+              <a:lnSpc>
+                <a:spcPct val="90000"/>
+              </a:lnSpc>
+              <a:spcBef>
+                <a:spcPts val="500"/>
+              </a:spcBef>
+              <a:buFont typeface="Arial" panose="020B0604020202020204" pitchFamily="34" charset="0"/>
+              <a:buNone/>
+              <a:defRPr sz="1600" kern="1200">
+                <a:solidFill>
+                  <a:schemeClr val="tx1"/>
+                </a:solidFill>
+                <a:latin typeface="+mn-lt"/>
+                <a:ea typeface="+mn-ea"/>
+                <a:cs typeface="+mn-cs"/>
+              </a:defRPr>
+            </a:lvl9pPr>
+          </a:lstStyle>
+          <a:p>
+            <a:pPr algn="r"/>
+            <a:r>
+              <a:rPr lang="he-IL" sz="1200" dirty="0">
+                <a:solidFill>
+                  <a:srgbClr val="FF0000"/>
+                </a:solidFill>
+              </a:rPr>
+              <a:t>במצגת עדיף </a:t>
+            </a:r>
+            <a:r>
+              <a:rPr lang="he-IL" sz="1200" b="1" dirty="0">
+                <a:solidFill>
+                  <a:srgbClr val="FF0000"/>
+                </a:solidFill>
+              </a:rPr>
+              <a:t>תרשים אופקי</a:t>
+            </a:r>
+            <a:r>
+              <a:rPr lang="he-IL" sz="1200" dirty="0">
+                <a:solidFill>
+                  <a:srgbClr val="FF0000"/>
+                </a:solidFill>
+              </a:rPr>
+              <a:t>.</a:t>
+            </a:r>
+            <a:br>
+              <a:rPr lang="en-US" sz="1200" dirty="0">
+                <a:solidFill>
+                  <a:srgbClr val="FF0000"/>
+                </a:solidFill>
+              </a:rPr>
+            </a:br>
+            <a:r>
+              <a:rPr lang="en-US" sz="1400" dirty="0">
+                <a:solidFill>
+                  <a:srgbClr val="FF0000"/>
+                </a:solidFill>
+              </a:rPr>
+              <a:t>Original Image</a:t>
+            </a:r>
+            <a:br>
+              <a:rPr lang="en-US" sz="1400" dirty="0">
+                <a:solidFill>
+                  <a:srgbClr val="FF0000"/>
+                </a:solidFill>
+              </a:rPr>
+            </a:br>
+            <a:r>
+              <a:rPr lang="en-US" sz="1400" dirty="0">
+                <a:solidFill>
+                  <a:srgbClr val="FF0000"/>
+                </a:solidFill>
+              </a:rPr>
+              <a:t>      ↓</a:t>
+            </a:r>
+            <a:br>
+              <a:rPr lang="en-US" sz="1400" dirty="0">
+                <a:solidFill>
+                  <a:srgbClr val="FF0000"/>
+                </a:solidFill>
+              </a:rPr>
+            </a:br>
+            <a:r>
+              <a:rPr lang="en-US" sz="1400" dirty="0">
+                <a:solidFill>
+                  <a:srgbClr val="FF0000"/>
+                </a:solidFill>
+              </a:rPr>
+              <a:t>Image Degradation</a:t>
+            </a:r>
+            <a:br>
+              <a:rPr lang="en-US" sz="1400" dirty="0">
+                <a:solidFill>
+                  <a:srgbClr val="FF0000"/>
+                </a:solidFill>
+              </a:rPr>
+            </a:br>
+            <a:r>
+              <a:rPr lang="en-US" sz="1400" dirty="0">
+                <a:solidFill>
+                  <a:srgbClr val="FF0000"/>
+                </a:solidFill>
+              </a:rPr>
+              <a:t>(simulated THz conditions)</a:t>
+            </a:r>
+            <a:br>
+              <a:rPr lang="en-US" sz="1400" dirty="0">
+                <a:solidFill>
+                  <a:srgbClr val="FF0000"/>
+                </a:solidFill>
+              </a:rPr>
+            </a:br>
+            <a:r>
+              <a:rPr lang="en-US" sz="1400" dirty="0">
+                <a:solidFill>
+                  <a:srgbClr val="FF0000"/>
+                </a:solidFill>
+              </a:rPr>
+              <a:t>      ↓</a:t>
+            </a:r>
+            <a:br>
+              <a:rPr lang="en-US" sz="1400" dirty="0">
+                <a:solidFill>
+                  <a:srgbClr val="FF0000"/>
+                </a:solidFill>
+              </a:rPr>
+            </a:br>
+            <a:r>
+              <a:rPr lang="en-US" sz="1400" dirty="0" err="1">
+                <a:solidFill>
+                  <a:srgbClr val="FF0000"/>
+                </a:solidFill>
+              </a:rPr>
+              <a:t>Upsampling</a:t>
+            </a:r>
+            <a:br>
+              <a:rPr lang="en-US" sz="1400" dirty="0">
+                <a:solidFill>
+                  <a:srgbClr val="FF0000"/>
+                </a:solidFill>
+              </a:rPr>
+            </a:br>
+            <a:r>
+              <a:rPr lang="en-US" sz="1400" dirty="0">
+                <a:solidFill>
+                  <a:srgbClr val="FF0000"/>
+                </a:solidFill>
+              </a:rPr>
+              <a:t>      ↓</a:t>
+            </a:r>
+            <a:br>
+              <a:rPr lang="en-US" sz="1400" dirty="0">
+                <a:solidFill>
+                  <a:srgbClr val="FF0000"/>
+                </a:solidFill>
+              </a:rPr>
+            </a:br>
+            <a:r>
+              <a:rPr lang="en-US" sz="1400" dirty="0">
+                <a:solidFill>
+                  <a:srgbClr val="FF0000"/>
+                </a:solidFill>
+              </a:rPr>
+              <a:t>ImageNet Normalization</a:t>
+            </a:r>
+            <a:br>
+              <a:rPr lang="en-US" sz="1400" dirty="0">
+                <a:solidFill>
+                  <a:srgbClr val="FF0000"/>
+                </a:solidFill>
+              </a:rPr>
+            </a:br>
+            <a:r>
+              <a:rPr lang="en-US" sz="1400" dirty="0">
+                <a:solidFill>
+                  <a:srgbClr val="FF0000"/>
+                </a:solidFill>
+              </a:rPr>
+              <a:t>      ↓</a:t>
+            </a:r>
+            <a:br>
+              <a:rPr lang="en-US" sz="1400" dirty="0">
+                <a:solidFill>
+                  <a:srgbClr val="FF0000"/>
+                </a:solidFill>
+              </a:rPr>
+            </a:br>
+            <a:r>
+              <a:rPr lang="en-US" sz="1400" dirty="0">
+                <a:solidFill>
+                  <a:srgbClr val="FF0000"/>
+                </a:solidFill>
+              </a:rPr>
+              <a:t>Deep Learning Model</a:t>
+            </a:r>
+            <a:br>
+              <a:rPr lang="en-US" sz="1400" dirty="0">
+                <a:solidFill>
+                  <a:srgbClr val="FF0000"/>
+                </a:solidFill>
+              </a:rPr>
+            </a:br>
+            <a:r>
+              <a:rPr lang="en-US" sz="1400" dirty="0">
+                <a:solidFill>
+                  <a:srgbClr val="FF0000"/>
+                </a:solidFill>
+              </a:rPr>
+              <a:t>(</a:t>
+            </a:r>
+            <a:r>
+              <a:rPr lang="en-US" sz="1400" dirty="0" err="1">
+                <a:solidFill>
+                  <a:srgbClr val="FF0000"/>
+                </a:solidFill>
+              </a:rPr>
+              <a:t>ResNet</a:t>
+            </a:r>
+            <a:r>
+              <a:rPr lang="en-US" sz="1400" dirty="0">
+                <a:solidFill>
+                  <a:srgbClr val="FF0000"/>
+                </a:solidFill>
+              </a:rPr>
+              <a:t> / </a:t>
+            </a:r>
+            <a:r>
+              <a:rPr lang="en-US" sz="1400" dirty="0" err="1">
+                <a:solidFill>
+                  <a:srgbClr val="FF0000"/>
+                </a:solidFill>
+              </a:rPr>
+              <a:t>DenseNet</a:t>
+            </a:r>
+            <a:r>
+              <a:rPr lang="en-US" sz="1400" dirty="0">
+                <a:solidFill>
+                  <a:srgbClr val="FF0000"/>
+                </a:solidFill>
+              </a:rPr>
+              <a:t> / </a:t>
+            </a:r>
+            <a:r>
+              <a:rPr lang="en-US" sz="1400" dirty="0" err="1">
+                <a:solidFill>
+                  <a:srgbClr val="FF0000"/>
+                </a:solidFill>
+              </a:rPr>
+              <a:t>TransNeXt</a:t>
+            </a:r>
+            <a:r>
+              <a:rPr lang="en-US" sz="1400" dirty="0">
+                <a:solidFill>
+                  <a:srgbClr val="FF0000"/>
+                </a:solidFill>
+              </a:rPr>
+              <a:t>)</a:t>
+            </a:r>
+            <a:br>
+              <a:rPr lang="en-US" sz="1400" dirty="0">
+                <a:solidFill>
+                  <a:srgbClr val="FF0000"/>
+                </a:solidFill>
+              </a:rPr>
+            </a:br>
+            <a:r>
+              <a:rPr lang="en-US" sz="1400" dirty="0">
+                <a:solidFill>
+                  <a:srgbClr val="FF0000"/>
+                </a:solidFill>
+              </a:rPr>
+              <a:t>      ↓</a:t>
+            </a:r>
+            <a:br>
+              <a:rPr lang="en-US" sz="1400" dirty="0">
+                <a:solidFill>
+                  <a:srgbClr val="FF0000"/>
+                </a:solidFill>
+              </a:rPr>
+            </a:br>
+            <a:r>
+              <a:rPr lang="en-US" sz="1400" dirty="0">
+                <a:solidFill>
+                  <a:srgbClr val="FF0000"/>
+                </a:solidFill>
+              </a:rPr>
+              <a:t>Classification Output</a:t>
+            </a:r>
+          </a:p>
+          <a:p>
+            <a:pPr algn="r"/>
+            <a:r>
+              <a:rPr lang="he-IL" sz="1200" dirty="0">
+                <a:solidFill>
+                  <a:srgbClr val="FF0000"/>
+                </a:solidFill>
+              </a:rPr>
+              <a:t>ב-</a:t>
+            </a:r>
+            <a:r>
+              <a:rPr lang="en-US" sz="1200" dirty="0">
+                <a:solidFill>
+                  <a:srgbClr val="FF0000"/>
+                </a:solidFill>
+              </a:rPr>
+              <a:t>PowerPoint </a:t>
+            </a:r>
+            <a:r>
+              <a:rPr lang="he-IL" sz="1200" dirty="0">
+                <a:solidFill>
+                  <a:srgbClr val="FF0000"/>
+                </a:solidFill>
+              </a:rPr>
+              <a:t>כדאי להציג את זה כ-</a:t>
+            </a:r>
+            <a:r>
+              <a:rPr lang="en-US" sz="1200" dirty="0">
+                <a:solidFill>
+                  <a:srgbClr val="FF0000"/>
+                </a:solidFill>
+              </a:rPr>
+              <a:t>boxes </a:t>
+            </a:r>
+            <a:r>
+              <a:rPr lang="he-IL" sz="1200" dirty="0">
+                <a:solidFill>
+                  <a:srgbClr val="FF0000"/>
+                </a:solidFill>
+              </a:rPr>
+              <a:t>מחוברים </a:t>
+            </a:r>
+            <a:r>
+              <a:rPr lang="he-IL" sz="1200" dirty="0" err="1">
+                <a:solidFill>
+                  <a:srgbClr val="FF0000"/>
+                </a:solidFill>
+              </a:rPr>
+              <a:t>בחצים</a:t>
+            </a:r>
+            <a:r>
+              <a:rPr lang="he-IL" sz="1200" dirty="0">
+                <a:solidFill>
+                  <a:srgbClr val="FF0000"/>
+                </a:solidFill>
+              </a:rPr>
+              <a:t>.</a:t>
+            </a:r>
+          </a:p>
+          <a:p>
+            <a:pPr algn="r"/>
+            <a:br>
+              <a:rPr lang="he-IL" sz="1200" dirty="0">
+                <a:solidFill>
+                  <a:srgbClr val="FF0000"/>
+                </a:solidFill>
+              </a:rPr>
+            </a:br>
+            <a:r>
+              <a:rPr lang="he-IL" sz="1200" b="1" dirty="0">
+                <a:solidFill>
+                  <a:srgbClr val="FF0000"/>
+                </a:solidFill>
+              </a:rPr>
+              <a:t>גרסה ויזואלית מומלצת לשקופית</a:t>
+            </a:r>
+          </a:p>
+          <a:p>
+            <a:pPr algn="r" rtl="0"/>
+            <a:r>
+              <a:rPr lang="en-US" sz="1400" dirty="0">
+                <a:solidFill>
+                  <a:srgbClr val="FF0000"/>
+                </a:solidFill>
+              </a:rPr>
+              <a:t>Original Image</a:t>
+            </a:r>
+            <a:br>
+              <a:rPr lang="en-US" sz="1400" dirty="0">
+                <a:solidFill>
+                  <a:srgbClr val="FF0000"/>
+                </a:solidFill>
+              </a:rPr>
+            </a:br>
+            <a:r>
+              <a:rPr lang="en-US" sz="1400" dirty="0">
+                <a:solidFill>
+                  <a:srgbClr val="FF0000"/>
+                </a:solidFill>
+              </a:rPr>
+              <a:t>      ↓</a:t>
+            </a:r>
+            <a:br>
+              <a:rPr lang="en-US" sz="1400" dirty="0">
+                <a:solidFill>
+                  <a:srgbClr val="FF0000"/>
+                </a:solidFill>
+              </a:rPr>
+            </a:br>
+            <a:r>
+              <a:rPr lang="en-US" sz="1400" dirty="0">
+                <a:solidFill>
+                  <a:srgbClr val="FF0000"/>
+                </a:solidFill>
+              </a:rPr>
+              <a:t>Degradation</a:t>
+            </a:r>
+            <a:br>
+              <a:rPr lang="en-US" sz="1400" dirty="0">
+                <a:solidFill>
+                  <a:srgbClr val="FF0000"/>
+                </a:solidFill>
+              </a:rPr>
+            </a:br>
+            <a:r>
+              <a:rPr lang="en-US" sz="1400" dirty="0">
+                <a:solidFill>
+                  <a:srgbClr val="FF0000"/>
+                </a:solidFill>
+              </a:rPr>
+              <a:t>↓ resolution + noise + blur</a:t>
+            </a:r>
+            <a:br>
+              <a:rPr lang="en-US" sz="1400" dirty="0">
+                <a:solidFill>
+                  <a:srgbClr val="FF0000"/>
+                </a:solidFill>
+              </a:rPr>
+            </a:br>
+            <a:r>
+              <a:rPr lang="en-US" sz="1400" dirty="0">
+                <a:solidFill>
+                  <a:srgbClr val="FF0000"/>
+                </a:solidFill>
+              </a:rPr>
+              <a:t>      ↓</a:t>
+            </a:r>
+            <a:br>
+              <a:rPr lang="en-US" sz="1400" dirty="0">
+                <a:solidFill>
+                  <a:srgbClr val="FF0000"/>
+                </a:solidFill>
+              </a:rPr>
+            </a:br>
+            <a:r>
+              <a:rPr lang="en-US" sz="1400" dirty="0" err="1">
+                <a:solidFill>
+                  <a:srgbClr val="FF0000"/>
+                </a:solidFill>
+              </a:rPr>
+              <a:t>Upsample</a:t>
+            </a:r>
+            <a:br>
+              <a:rPr lang="en-US" sz="1400" dirty="0">
+                <a:solidFill>
+                  <a:srgbClr val="FF0000"/>
+                </a:solidFill>
+              </a:rPr>
+            </a:br>
+            <a:r>
+              <a:rPr lang="en-US" sz="1400" dirty="0">
+                <a:solidFill>
+                  <a:srgbClr val="FF0000"/>
+                </a:solidFill>
+              </a:rPr>
+              <a:t>to network input size</a:t>
+            </a:r>
+            <a:br>
+              <a:rPr lang="en-US" sz="1400" dirty="0">
+                <a:solidFill>
+                  <a:srgbClr val="FF0000"/>
+                </a:solidFill>
+              </a:rPr>
+            </a:br>
+            <a:r>
+              <a:rPr lang="en-US" sz="1400" dirty="0">
+                <a:solidFill>
+                  <a:srgbClr val="FF0000"/>
+                </a:solidFill>
+              </a:rPr>
+              <a:t>      ↓</a:t>
+            </a:r>
+            <a:br>
+              <a:rPr lang="en-US" sz="1400" dirty="0">
+                <a:solidFill>
+                  <a:srgbClr val="FF0000"/>
+                </a:solidFill>
+              </a:rPr>
+            </a:br>
+            <a:r>
+              <a:rPr lang="en-US" sz="1400" dirty="0">
+                <a:solidFill>
+                  <a:srgbClr val="FF0000"/>
+                </a:solidFill>
+              </a:rPr>
+              <a:t>ImageNet Normalization</a:t>
+            </a:r>
+            <a:br>
+              <a:rPr lang="en-US" sz="1400" dirty="0">
+                <a:solidFill>
+                  <a:srgbClr val="FF0000"/>
+                </a:solidFill>
+              </a:rPr>
+            </a:br>
+            <a:r>
+              <a:rPr lang="en-US" sz="1400" dirty="0">
+                <a:solidFill>
+                  <a:srgbClr val="FF0000"/>
+                </a:solidFill>
+              </a:rPr>
+              <a:t>      ↓</a:t>
+            </a:r>
+            <a:br>
+              <a:rPr lang="en-US" sz="1400" dirty="0">
+                <a:solidFill>
+                  <a:srgbClr val="FF0000"/>
+                </a:solidFill>
+              </a:rPr>
+            </a:br>
+            <a:r>
+              <a:rPr lang="en-US" sz="1400" dirty="0">
+                <a:solidFill>
+                  <a:srgbClr val="FF0000"/>
+                </a:solidFill>
+              </a:rPr>
+              <a:t>Model</a:t>
+            </a:r>
+            <a:br>
+              <a:rPr lang="en-US" sz="1400" dirty="0">
+                <a:solidFill>
+                  <a:srgbClr val="FF0000"/>
+                </a:solidFill>
+              </a:rPr>
+            </a:br>
+            <a:r>
+              <a:rPr lang="en-US" sz="1400" dirty="0" err="1">
+                <a:solidFill>
+                  <a:srgbClr val="FF0000"/>
+                </a:solidFill>
+              </a:rPr>
+              <a:t>ResNet</a:t>
+            </a:r>
+            <a:r>
+              <a:rPr lang="en-US" sz="1400" dirty="0">
+                <a:solidFill>
+                  <a:srgbClr val="FF0000"/>
+                </a:solidFill>
+              </a:rPr>
+              <a:t> / </a:t>
+            </a:r>
+            <a:r>
+              <a:rPr lang="en-US" sz="1400" dirty="0" err="1">
+                <a:solidFill>
+                  <a:srgbClr val="FF0000"/>
+                </a:solidFill>
+              </a:rPr>
+              <a:t>DenseNet</a:t>
+            </a:r>
+            <a:r>
+              <a:rPr lang="en-US" sz="1400" dirty="0">
+                <a:solidFill>
+                  <a:srgbClr val="FF0000"/>
+                </a:solidFill>
+              </a:rPr>
+              <a:t> / </a:t>
+            </a:r>
+            <a:r>
+              <a:rPr lang="en-US" sz="1400" dirty="0" err="1">
+                <a:solidFill>
+                  <a:srgbClr val="FF0000"/>
+                </a:solidFill>
+              </a:rPr>
+              <a:t>TransNeXt</a:t>
+            </a:r>
+            <a:br>
+              <a:rPr lang="en-US" sz="1400" dirty="0">
+                <a:solidFill>
+                  <a:srgbClr val="FF0000"/>
+                </a:solidFill>
+              </a:rPr>
+            </a:br>
+            <a:r>
+              <a:rPr lang="en-US" sz="1400" dirty="0">
+                <a:solidFill>
+                  <a:srgbClr val="FF0000"/>
+                </a:solidFill>
+              </a:rPr>
+              <a:t>      ↓</a:t>
+            </a:r>
+            <a:br>
+              <a:rPr lang="en-US" sz="1400" dirty="0">
+                <a:solidFill>
+                  <a:srgbClr val="FF0000"/>
+                </a:solidFill>
+              </a:rPr>
+            </a:br>
+            <a:r>
+              <a:rPr lang="en-US" sz="1400" dirty="0">
+                <a:solidFill>
+                  <a:srgbClr val="FF0000"/>
+                </a:solidFill>
+              </a:rPr>
+              <a:t>Predicted Class</a:t>
+            </a:r>
+          </a:p>
+          <a:p>
+            <a:pPr algn="r"/>
+            <a:br>
+              <a:rPr lang="en-US" sz="1200" dirty="0">
+                <a:solidFill>
+                  <a:srgbClr val="FF0000"/>
+                </a:solidFill>
+              </a:rPr>
+            </a:br>
+            <a:endParaRPr lang="en-US" sz="1200" dirty="0">
+              <a:solidFill>
+                <a:srgbClr val="FF0000"/>
+              </a:solidFill>
+            </a:endParaRPr>
+          </a:p>
+        </p:txBody>
+      </p:sp>
+      <p:sp>
+        <p:nvSpPr>
+          <p:cNvPr id="2" name="כותרת משנה 6">
+            <a:extLst>
+              <a:ext uri="{FF2B5EF4-FFF2-40B4-BE49-F238E27FC236}">
+                <a16:creationId xmlns:a16="http://schemas.microsoft.com/office/drawing/2014/main" id="{14459744-4579-BBAD-885C-02C35FEA93D0}"/>
+              </a:ext>
+            </a:extLst>
+          </p:cNvPr>
+          <p:cNvSpPr txBox="1">
+            <a:spLocks/>
+          </p:cNvSpPr>
+          <p:nvPr/>
+        </p:nvSpPr>
+        <p:spPr>
+          <a:xfrm>
+            <a:off x="2255520" y="1636776"/>
+            <a:ext cx="3529584" cy="4197096"/>
+          </a:xfrm>
+          <a:prstGeom prst="rect">
+            <a:avLst/>
+          </a:prstGeom>
+        </p:spPr>
+        <p:txBody>
+          <a:bodyPr vert="horz" lIns="91440" tIns="45720" rIns="91440" bIns="45720" rtlCol="1">
+            <a:normAutofit fontScale="85000" lnSpcReduction="20000"/>
+          </a:bodyPr>
+          <a:lstStyle>
+            <a:lvl1pPr marL="0" indent="0" algn="ctr" defTabSz="914400" rtl="1" eaLnBrk="1" latinLnBrk="0" hangingPunct="1">
+              <a:lnSpc>
+                <a:spcPct val="90000"/>
+              </a:lnSpc>
+              <a:spcBef>
+                <a:spcPts val="1000"/>
+              </a:spcBef>
+              <a:buFont typeface="Arial" panose="020B0604020202020204" pitchFamily="34" charset="0"/>
+              <a:buNone/>
+              <a:defRPr sz="2400" kern="1200">
+                <a:solidFill>
+                  <a:schemeClr val="tx1"/>
+                </a:solidFill>
+                <a:latin typeface="+mn-lt"/>
+                <a:ea typeface="+mn-ea"/>
+                <a:cs typeface="+mn-cs"/>
+              </a:defRPr>
+            </a:lvl1pPr>
+            <a:lvl2pPr marL="457200" indent="0" algn="ctr" defTabSz="914400" rtl="1" eaLnBrk="1" latinLnBrk="0" hangingPunct="1">
+              <a:lnSpc>
+                <a:spcPct val="90000"/>
+              </a:lnSpc>
+              <a:spcBef>
+                <a:spcPts val="500"/>
+              </a:spcBef>
+              <a:buFont typeface="Arial" panose="020B0604020202020204" pitchFamily="34" charset="0"/>
+              <a:buNone/>
+              <a:defRPr sz="2000" kern="1200">
+                <a:solidFill>
+                  <a:schemeClr val="tx1"/>
+                </a:solidFill>
+                <a:latin typeface="+mn-lt"/>
+                <a:ea typeface="+mn-ea"/>
+                <a:cs typeface="+mn-cs"/>
+              </a:defRPr>
+            </a:lvl2pPr>
+            <a:lvl3pPr marL="914400" indent="0" algn="ctr" defTabSz="914400" rtl="1" eaLnBrk="1" latinLnBrk="0" hangingPunct="1">
+              <a:lnSpc>
+                <a:spcPct val="90000"/>
+              </a:lnSpc>
+              <a:spcBef>
+                <a:spcPts val="500"/>
+              </a:spcBef>
+              <a:buFont typeface="Arial" panose="020B0604020202020204" pitchFamily="34" charset="0"/>
+              <a:buNone/>
+              <a:defRPr sz="1800" kern="1200">
+                <a:solidFill>
+                  <a:schemeClr val="tx1"/>
+                </a:solidFill>
+                <a:latin typeface="+mn-lt"/>
+                <a:ea typeface="+mn-ea"/>
+                <a:cs typeface="+mn-cs"/>
+              </a:defRPr>
+            </a:lvl3pPr>
+            <a:lvl4pPr marL="1371600" indent="0" algn="ctr" defTabSz="914400" rtl="1" eaLnBrk="1" latinLnBrk="0" hangingPunct="1">
+              <a:lnSpc>
+                <a:spcPct val="90000"/>
+              </a:lnSpc>
+              <a:spcBef>
+                <a:spcPts val="500"/>
+              </a:spcBef>
+              <a:buFont typeface="Arial" panose="020B0604020202020204" pitchFamily="34" charset="0"/>
+              <a:buNone/>
+              <a:defRPr sz="1600" kern="1200">
+                <a:solidFill>
+                  <a:schemeClr val="tx1"/>
+                </a:solidFill>
+                <a:latin typeface="+mn-lt"/>
+                <a:ea typeface="+mn-ea"/>
+                <a:cs typeface="+mn-cs"/>
+              </a:defRPr>
+            </a:lvl4pPr>
+            <a:lvl5pPr marL="1828800" indent="0" algn="ctr" defTabSz="914400" rtl="1" eaLnBrk="1" latinLnBrk="0" hangingPunct="1">
+              <a:lnSpc>
+                <a:spcPct val="90000"/>
+              </a:lnSpc>
+              <a:spcBef>
+                <a:spcPts val="500"/>
+              </a:spcBef>
+              <a:buFont typeface="Arial" panose="020B0604020202020204" pitchFamily="34" charset="0"/>
+              <a:buNone/>
+              <a:defRPr sz="1600" kern="1200">
+                <a:solidFill>
+                  <a:schemeClr val="tx1"/>
+                </a:solidFill>
+                <a:latin typeface="+mn-lt"/>
+                <a:ea typeface="+mn-ea"/>
+                <a:cs typeface="+mn-cs"/>
+              </a:defRPr>
+            </a:lvl5pPr>
+            <a:lvl6pPr marL="2286000" indent="0" algn="ctr" defTabSz="914400" rtl="1" eaLnBrk="1" latinLnBrk="0" hangingPunct="1">
+              <a:lnSpc>
+                <a:spcPct val="90000"/>
+              </a:lnSpc>
+              <a:spcBef>
+                <a:spcPts val="500"/>
+              </a:spcBef>
+              <a:buFont typeface="Arial" panose="020B0604020202020204" pitchFamily="34" charset="0"/>
+              <a:buNone/>
+              <a:defRPr sz="1600" kern="1200">
+                <a:solidFill>
+                  <a:schemeClr val="tx1"/>
+                </a:solidFill>
+                <a:latin typeface="+mn-lt"/>
+                <a:ea typeface="+mn-ea"/>
+                <a:cs typeface="+mn-cs"/>
+              </a:defRPr>
+            </a:lvl6pPr>
+            <a:lvl7pPr marL="2743200" indent="0" algn="ctr" defTabSz="914400" rtl="1" eaLnBrk="1" latinLnBrk="0" hangingPunct="1">
+              <a:lnSpc>
+                <a:spcPct val="90000"/>
+              </a:lnSpc>
+              <a:spcBef>
+                <a:spcPts val="500"/>
+              </a:spcBef>
+              <a:buFont typeface="Arial" panose="020B0604020202020204" pitchFamily="34" charset="0"/>
+              <a:buNone/>
+              <a:defRPr sz="1600" kern="1200">
+                <a:solidFill>
+                  <a:schemeClr val="tx1"/>
+                </a:solidFill>
+                <a:latin typeface="+mn-lt"/>
+                <a:ea typeface="+mn-ea"/>
+                <a:cs typeface="+mn-cs"/>
+              </a:defRPr>
+            </a:lvl7pPr>
+            <a:lvl8pPr marL="3200400" indent="0" algn="ctr" defTabSz="914400" rtl="1" eaLnBrk="1" latinLnBrk="0" hangingPunct="1">
+              <a:lnSpc>
+                <a:spcPct val="90000"/>
+              </a:lnSpc>
+              <a:spcBef>
+                <a:spcPts val="500"/>
+              </a:spcBef>
+              <a:buFont typeface="Arial" panose="020B0604020202020204" pitchFamily="34" charset="0"/>
+              <a:buNone/>
+              <a:defRPr sz="1600" kern="1200">
+                <a:solidFill>
+                  <a:schemeClr val="tx1"/>
+                </a:solidFill>
+                <a:latin typeface="+mn-lt"/>
+                <a:ea typeface="+mn-ea"/>
+                <a:cs typeface="+mn-cs"/>
+              </a:defRPr>
+            </a:lvl8pPr>
+            <a:lvl9pPr marL="3657600" indent="0" algn="ctr" defTabSz="914400" rtl="1" eaLnBrk="1" latinLnBrk="0" hangingPunct="1">
+              <a:lnSpc>
+                <a:spcPct val="90000"/>
+              </a:lnSpc>
+              <a:spcBef>
+                <a:spcPts val="500"/>
+              </a:spcBef>
+              <a:buFont typeface="Arial" panose="020B0604020202020204" pitchFamily="34" charset="0"/>
+              <a:buNone/>
+              <a:defRPr sz="1600" kern="1200">
+                <a:solidFill>
+                  <a:schemeClr val="tx1"/>
+                </a:solidFill>
+                <a:latin typeface="+mn-lt"/>
+                <a:ea typeface="+mn-ea"/>
+                <a:cs typeface="+mn-cs"/>
+              </a:defRPr>
+            </a:lvl9pPr>
+          </a:lstStyle>
+          <a:p>
+            <a:pPr algn="r"/>
+            <a:r>
+              <a:rPr lang="he-IL" sz="2000" b="1" dirty="0">
+                <a:solidFill>
+                  <a:srgbClr val="FF0000"/>
+                </a:solidFill>
+              </a:rPr>
+              <a:t>טיפ חשוב למצגת</a:t>
+            </a:r>
+          </a:p>
+          <a:p>
+            <a:pPr algn="r"/>
+            <a:r>
+              <a:rPr lang="he-IL" sz="2000" dirty="0">
+                <a:solidFill>
+                  <a:srgbClr val="FF0000"/>
+                </a:solidFill>
+              </a:rPr>
+              <a:t>אם יש מקום — שים </a:t>
+            </a:r>
+            <a:r>
+              <a:rPr lang="he-IL" sz="2000" b="1" dirty="0">
+                <a:solidFill>
+                  <a:srgbClr val="FF0000"/>
+                </a:solidFill>
+              </a:rPr>
+              <a:t>אייקון קטן או תמונה קטנה</a:t>
+            </a:r>
+            <a:r>
+              <a:rPr lang="he-IL" sz="2000" dirty="0">
+                <a:solidFill>
+                  <a:srgbClr val="FF0000"/>
+                </a:solidFill>
+              </a:rPr>
+              <a:t> בכל שלב:</a:t>
+            </a:r>
+          </a:p>
+          <a:p>
+            <a:pPr algn="r"/>
+            <a:r>
+              <a:rPr lang="he-IL" sz="2000" dirty="0">
+                <a:solidFill>
+                  <a:srgbClr val="FF0000"/>
+                </a:solidFill>
+              </a:rPr>
+              <a:t>תמונה → </a:t>
+            </a:r>
+            <a:r>
+              <a:rPr lang="en-US" sz="2000" dirty="0">
+                <a:solidFill>
+                  <a:srgbClr val="FF0000"/>
+                </a:solidFill>
+              </a:rPr>
+              <a:t>image icon</a:t>
+            </a:r>
+          </a:p>
+          <a:p>
+            <a:pPr algn="r"/>
+            <a:r>
+              <a:rPr lang="en-US" sz="2000" dirty="0">
+                <a:solidFill>
+                  <a:srgbClr val="FF0000"/>
+                </a:solidFill>
+              </a:rPr>
+              <a:t>degradation → blur/noise image</a:t>
+            </a:r>
+          </a:p>
+          <a:p>
+            <a:pPr algn="r"/>
+            <a:r>
+              <a:rPr lang="en-US" sz="2000" dirty="0">
+                <a:solidFill>
+                  <a:srgbClr val="FF0000"/>
+                </a:solidFill>
+              </a:rPr>
+              <a:t>model → neural network icon</a:t>
+            </a:r>
+          </a:p>
+          <a:p>
+            <a:pPr algn="r"/>
+            <a:r>
+              <a:rPr lang="en-US" sz="2000" dirty="0">
+                <a:solidFill>
+                  <a:srgbClr val="FF0000"/>
+                </a:solidFill>
+              </a:rPr>
+              <a:t>output → label</a:t>
+            </a:r>
+          </a:p>
+          <a:p>
+            <a:pPr algn="r"/>
+            <a:r>
+              <a:rPr lang="he-IL" sz="2000" dirty="0">
+                <a:solidFill>
+                  <a:srgbClr val="FF0000"/>
+                </a:solidFill>
+              </a:rPr>
+              <a:t>זה גורם לשקופית להיראות הרבה יותר מקצועית.</a:t>
+            </a:r>
+          </a:p>
+          <a:p>
+            <a:pPr algn="r"/>
+            <a:br>
+              <a:rPr lang="he-IL" sz="2000" dirty="0">
+                <a:solidFill>
+                  <a:srgbClr val="FF0000"/>
+                </a:solidFill>
+              </a:rPr>
+            </a:br>
+            <a:endParaRPr lang="he-IL" sz="2000" dirty="0">
+              <a:solidFill>
+                <a:srgbClr val="FF0000"/>
+              </a:solidFill>
+            </a:endParaRPr>
+          </a:p>
+          <a:p>
+            <a:pPr algn="r"/>
+            <a:r>
+              <a:rPr lang="he-IL" sz="2000" b="1" dirty="0">
+                <a:solidFill>
+                  <a:srgbClr val="FF0000"/>
+                </a:solidFill>
+              </a:rPr>
+              <a:t>משהו קטן שכדאי להוסיף מתחת לתרשים</a:t>
+            </a:r>
+          </a:p>
+          <a:p>
+            <a:pPr algn="r"/>
+            <a:r>
+              <a:rPr lang="he-IL" sz="2000" dirty="0">
+                <a:solidFill>
+                  <a:srgbClr val="FF0000"/>
+                </a:solidFill>
+              </a:rPr>
+              <a:t>שורה קצרה:</a:t>
+            </a:r>
+          </a:p>
+          <a:p>
+            <a:pPr algn="r" rtl="0"/>
+            <a:r>
+              <a:rPr lang="en-US" sz="2000" dirty="0">
+                <a:solidFill>
+                  <a:srgbClr val="FF0000"/>
+                </a:solidFill>
+              </a:rPr>
+              <a:t>Pipeline used in all experiments</a:t>
+            </a:r>
+          </a:p>
+        </p:txBody>
+      </p:sp>
+    </p:spTree>
+    <p:extLst>
+      <p:ext uri="{BB962C8B-B14F-4D97-AF65-F5344CB8AC3E}">
+        <p14:creationId xmlns:p14="http://schemas.microsoft.com/office/powerpoint/2010/main" val="4091188308"/>
+      </p:ext>
+    </p:extLst>
+  </p:cSld>
+  <p:clrMapOvr>
+    <a:masterClrMapping/>
+  </p:clrMapOvr>
+</p:sld>
+</file>
+
+<file path=ppt/slides/slide8.xml><?xml version="1.0" encoding="utf-8"?>
+<p:sld xmlns:a="http://schemas.openxmlformats.org/drawingml/2006/main" xmlns:r="http://schemas.openxmlformats.org/officeDocument/2006/relationships" xmlns:p="http://schemas.openxmlformats.org/presentationml/2006/main">
+  <p:cSld>
+    <p:spTree>
+      <p:nvGrpSpPr>
+        <p:cNvPr id="1" name="">
+          <a:extLst>
+            <a:ext uri="{FF2B5EF4-FFF2-40B4-BE49-F238E27FC236}">
+              <a16:creationId xmlns:a16="http://schemas.microsoft.com/office/drawing/2014/main" id="{E86CA5D5-8414-9E93-2941-F6641189095E}"/>
+            </a:ext>
+          </a:extLst>
+        </p:cNvPr>
+        <p:cNvGrpSpPr/>
+        <p:nvPr/>
+      </p:nvGrpSpPr>
+      <p:grpSpPr>
+        <a:xfrm>
+          <a:off x="0" y="0"/>
+          <a:ext cx="0" cy="0"/>
+          <a:chOff x="0" y="0"/>
+          <a:chExt cx="0" cy="0"/>
+        </a:xfrm>
+      </p:grpSpPr>
+      <p:sp>
+        <p:nvSpPr>
+          <p:cNvPr id="7" name="כותרת משנה 6">
+            <a:extLst>
+              <a:ext uri="{FF2B5EF4-FFF2-40B4-BE49-F238E27FC236}">
+                <a16:creationId xmlns:a16="http://schemas.microsoft.com/office/drawing/2014/main" id="{82A15344-9F17-8B5E-9377-C7B90C7F097D}"/>
+              </a:ext>
+            </a:extLst>
+          </p:cNvPr>
+          <p:cNvSpPr>
+            <a:spLocks noGrp="1"/>
+          </p:cNvSpPr>
+          <p:nvPr>
+            <p:ph type="subTitle" idx="1"/>
+          </p:nvPr>
+        </p:nvSpPr>
+        <p:spPr>
+          <a:xfrm>
+            <a:off x="1706880" y="658368"/>
+            <a:ext cx="9144000" cy="978408"/>
+          </a:xfrm>
+        </p:spPr>
+        <p:txBody>
+          <a:bodyPr/>
+          <a:lstStyle/>
+          <a:p>
+            <a:r>
+              <a:rPr lang="en-US" b="1" dirty="0">
+                <a:latin typeface="Times New Roman" panose="02020603050405020304" pitchFamily="18" charset="0"/>
+                <a:cs typeface="Times New Roman" panose="02020603050405020304" pitchFamily="18" charset="0"/>
+              </a:rPr>
+              <a:t>Models Evaluated</a:t>
+            </a:r>
+            <a:endParaRPr lang="he-IL" b="1" dirty="0">
+              <a:latin typeface="Times New Roman" panose="02020603050405020304" pitchFamily="18" charset="0"/>
+              <a:cs typeface="Times New Roman" panose="02020603050405020304" pitchFamily="18" charset="0"/>
+            </a:endParaRPr>
+          </a:p>
+        </p:txBody>
+      </p:sp>
+      <p:sp>
+        <p:nvSpPr>
+          <p:cNvPr id="11" name="כותרת משנה 6">
+            <a:extLst>
+              <a:ext uri="{FF2B5EF4-FFF2-40B4-BE49-F238E27FC236}">
+                <a16:creationId xmlns:a16="http://schemas.microsoft.com/office/drawing/2014/main" id="{12280332-5B42-5802-9128-24DC1EF5A227}"/>
+              </a:ext>
+            </a:extLst>
+          </p:cNvPr>
+          <p:cNvSpPr txBox="1">
+            <a:spLocks/>
+          </p:cNvSpPr>
+          <p:nvPr/>
+        </p:nvSpPr>
+        <p:spPr>
+          <a:xfrm>
+            <a:off x="1268730" y="1947672"/>
+            <a:ext cx="4895088" cy="4553712"/>
+          </a:xfrm>
+          <a:prstGeom prst="rect">
+            <a:avLst/>
+          </a:prstGeom>
+        </p:spPr>
+        <p:txBody>
+          <a:bodyPr vert="horz" lIns="91440" tIns="45720" rIns="91440" bIns="45720" rtlCol="1">
+            <a:normAutofit/>
+          </a:bodyPr>
+          <a:lstStyle>
+            <a:lvl1pPr marL="0" indent="0" algn="ctr" defTabSz="914400" rtl="1" eaLnBrk="1" latinLnBrk="0" hangingPunct="1">
+              <a:lnSpc>
+                <a:spcPct val="90000"/>
+              </a:lnSpc>
+              <a:spcBef>
+                <a:spcPts val="1000"/>
+              </a:spcBef>
+              <a:buFont typeface="Arial" panose="020B0604020202020204" pitchFamily="34" charset="0"/>
+              <a:buNone/>
+              <a:defRPr sz="2400" kern="1200">
+                <a:solidFill>
+                  <a:schemeClr val="tx1"/>
+                </a:solidFill>
+                <a:latin typeface="+mn-lt"/>
+                <a:ea typeface="+mn-ea"/>
+                <a:cs typeface="+mn-cs"/>
+              </a:defRPr>
+            </a:lvl1pPr>
+            <a:lvl2pPr marL="457200" indent="0" algn="ctr" defTabSz="914400" rtl="1" eaLnBrk="1" latinLnBrk="0" hangingPunct="1">
+              <a:lnSpc>
+                <a:spcPct val="90000"/>
+              </a:lnSpc>
+              <a:spcBef>
+                <a:spcPts val="500"/>
+              </a:spcBef>
+              <a:buFont typeface="Arial" panose="020B0604020202020204" pitchFamily="34" charset="0"/>
+              <a:buNone/>
+              <a:defRPr sz="2000" kern="1200">
+                <a:solidFill>
+                  <a:schemeClr val="tx1"/>
+                </a:solidFill>
+                <a:latin typeface="+mn-lt"/>
+                <a:ea typeface="+mn-ea"/>
+                <a:cs typeface="+mn-cs"/>
+              </a:defRPr>
+            </a:lvl2pPr>
+            <a:lvl3pPr marL="914400" indent="0" algn="ctr" defTabSz="914400" rtl="1" eaLnBrk="1" latinLnBrk="0" hangingPunct="1">
+              <a:lnSpc>
+                <a:spcPct val="90000"/>
+              </a:lnSpc>
+              <a:spcBef>
+                <a:spcPts val="500"/>
+              </a:spcBef>
+              <a:buFont typeface="Arial" panose="020B0604020202020204" pitchFamily="34" charset="0"/>
+              <a:buNone/>
+              <a:defRPr sz="1800" kern="1200">
+                <a:solidFill>
+                  <a:schemeClr val="tx1"/>
+                </a:solidFill>
+                <a:latin typeface="+mn-lt"/>
+                <a:ea typeface="+mn-ea"/>
+                <a:cs typeface="+mn-cs"/>
+              </a:defRPr>
+            </a:lvl3pPr>
+            <a:lvl4pPr marL="1371600" indent="0" algn="ctr" defTabSz="914400" rtl="1" eaLnBrk="1" latinLnBrk="0" hangingPunct="1">
+              <a:lnSpc>
+                <a:spcPct val="90000"/>
+              </a:lnSpc>
+              <a:spcBef>
+                <a:spcPts val="500"/>
+              </a:spcBef>
+              <a:buFont typeface="Arial" panose="020B0604020202020204" pitchFamily="34" charset="0"/>
+              <a:buNone/>
+              <a:defRPr sz="1600" kern="1200">
+                <a:solidFill>
+                  <a:schemeClr val="tx1"/>
+                </a:solidFill>
+                <a:latin typeface="+mn-lt"/>
+                <a:ea typeface="+mn-ea"/>
+                <a:cs typeface="+mn-cs"/>
+              </a:defRPr>
+            </a:lvl4pPr>
+            <a:lvl5pPr marL="1828800" indent="0" algn="ctr" defTabSz="914400" rtl="1" eaLnBrk="1" latinLnBrk="0" hangingPunct="1">
+              <a:lnSpc>
+                <a:spcPct val="90000"/>
+              </a:lnSpc>
+              <a:spcBef>
+                <a:spcPts val="500"/>
+              </a:spcBef>
+              <a:buFont typeface="Arial" panose="020B0604020202020204" pitchFamily="34" charset="0"/>
+              <a:buNone/>
+              <a:defRPr sz="1600" kern="1200">
+                <a:solidFill>
+                  <a:schemeClr val="tx1"/>
+                </a:solidFill>
+                <a:latin typeface="+mn-lt"/>
+                <a:ea typeface="+mn-ea"/>
+                <a:cs typeface="+mn-cs"/>
+              </a:defRPr>
+            </a:lvl5pPr>
+            <a:lvl6pPr marL="2286000" indent="0" algn="ctr" defTabSz="914400" rtl="1" eaLnBrk="1" latinLnBrk="0" hangingPunct="1">
+              <a:lnSpc>
+                <a:spcPct val="90000"/>
+              </a:lnSpc>
+              <a:spcBef>
+                <a:spcPts val="500"/>
+              </a:spcBef>
+              <a:buFont typeface="Arial" panose="020B0604020202020204" pitchFamily="34" charset="0"/>
+              <a:buNone/>
+              <a:defRPr sz="1600" kern="1200">
+                <a:solidFill>
+                  <a:schemeClr val="tx1"/>
+                </a:solidFill>
+                <a:latin typeface="+mn-lt"/>
+                <a:ea typeface="+mn-ea"/>
+                <a:cs typeface="+mn-cs"/>
+              </a:defRPr>
+            </a:lvl6pPr>
+            <a:lvl7pPr marL="2743200" indent="0" algn="ctr" defTabSz="914400" rtl="1" eaLnBrk="1" latinLnBrk="0" hangingPunct="1">
+              <a:lnSpc>
+                <a:spcPct val="90000"/>
+              </a:lnSpc>
+              <a:spcBef>
+                <a:spcPts val="500"/>
+              </a:spcBef>
+              <a:buFont typeface="Arial" panose="020B0604020202020204" pitchFamily="34" charset="0"/>
+              <a:buNone/>
+              <a:defRPr sz="1600" kern="1200">
+                <a:solidFill>
+                  <a:schemeClr val="tx1"/>
+                </a:solidFill>
+                <a:latin typeface="+mn-lt"/>
+                <a:ea typeface="+mn-ea"/>
+                <a:cs typeface="+mn-cs"/>
+              </a:defRPr>
+            </a:lvl7pPr>
+            <a:lvl8pPr marL="3200400" indent="0" algn="ctr" defTabSz="914400" rtl="1" eaLnBrk="1" latinLnBrk="0" hangingPunct="1">
+              <a:lnSpc>
+                <a:spcPct val="90000"/>
+              </a:lnSpc>
+              <a:spcBef>
+                <a:spcPts val="500"/>
+              </a:spcBef>
+              <a:buFont typeface="Arial" panose="020B0604020202020204" pitchFamily="34" charset="0"/>
+              <a:buNone/>
+              <a:defRPr sz="1600" kern="1200">
+                <a:solidFill>
+                  <a:schemeClr val="tx1"/>
+                </a:solidFill>
+                <a:latin typeface="+mn-lt"/>
+                <a:ea typeface="+mn-ea"/>
+                <a:cs typeface="+mn-cs"/>
+              </a:defRPr>
+            </a:lvl8pPr>
+            <a:lvl9pPr marL="3657600" indent="0" algn="ctr" defTabSz="914400" rtl="1" eaLnBrk="1" latinLnBrk="0" hangingPunct="1">
+              <a:lnSpc>
+                <a:spcPct val="90000"/>
+              </a:lnSpc>
+              <a:spcBef>
+                <a:spcPts val="500"/>
+              </a:spcBef>
+              <a:buFont typeface="Arial" panose="020B0604020202020204" pitchFamily="34" charset="0"/>
+              <a:buNone/>
+              <a:defRPr sz="1600" kern="1200">
+                <a:solidFill>
+                  <a:schemeClr val="tx1"/>
+                </a:solidFill>
+                <a:latin typeface="+mn-lt"/>
+                <a:ea typeface="+mn-ea"/>
+                <a:cs typeface="+mn-cs"/>
+              </a:defRPr>
+            </a:lvl9pPr>
+          </a:lstStyle>
+          <a:p>
+            <a:pPr algn="l"/>
+            <a:r>
+              <a:rPr lang="en-US" sz="2000" dirty="0">
+                <a:latin typeface="Times New Roman" panose="02020603050405020304" pitchFamily="18" charset="0"/>
+                <a:cs typeface="Times New Roman" panose="02020603050405020304" pitchFamily="18" charset="0"/>
+              </a:rPr>
+              <a:t>Baseline CNN architectures:</a:t>
+            </a:r>
+          </a:p>
+          <a:p>
+            <a:pPr algn="l"/>
+            <a:r>
+              <a:rPr lang="en-US" sz="2000" dirty="0">
+                <a:latin typeface="Times New Roman" panose="02020603050405020304" pitchFamily="18" charset="0"/>
+                <a:cs typeface="Times New Roman" panose="02020603050405020304" pitchFamily="18" charset="0"/>
+              </a:rPr>
+              <a:t>• </a:t>
+            </a:r>
+            <a:r>
+              <a:rPr lang="en-US" sz="2000" dirty="0" err="1">
+                <a:latin typeface="Times New Roman" panose="02020603050405020304" pitchFamily="18" charset="0"/>
+                <a:cs typeface="Times New Roman" panose="02020603050405020304" pitchFamily="18" charset="0"/>
+              </a:rPr>
+              <a:t>ResNet</a:t>
+            </a:r>
+            <a:endParaRPr lang="en-US" sz="2000" dirty="0">
+              <a:latin typeface="Times New Roman" panose="02020603050405020304" pitchFamily="18" charset="0"/>
+              <a:cs typeface="Times New Roman" panose="02020603050405020304" pitchFamily="18" charset="0"/>
+            </a:endParaRPr>
+          </a:p>
+          <a:p>
+            <a:pPr algn="l"/>
+            <a:r>
+              <a:rPr lang="en-US" sz="2000" dirty="0">
+                <a:latin typeface="Times New Roman" panose="02020603050405020304" pitchFamily="18" charset="0"/>
+                <a:cs typeface="Times New Roman" panose="02020603050405020304" pitchFamily="18" charset="0"/>
+              </a:rPr>
+              <a:t>• </a:t>
+            </a:r>
+            <a:r>
+              <a:rPr lang="en-US" sz="2000" dirty="0" err="1">
+                <a:latin typeface="Times New Roman" panose="02020603050405020304" pitchFamily="18" charset="0"/>
+                <a:cs typeface="Times New Roman" panose="02020603050405020304" pitchFamily="18" charset="0"/>
+              </a:rPr>
+              <a:t>DenseNet</a:t>
+            </a:r>
+            <a:endParaRPr lang="en-US" sz="2000" dirty="0">
+              <a:latin typeface="Times New Roman" panose="02020603050405020304" pitchFamily="18" charset="0"/>
+              <a:cs typeface="Times New Roman" panose="02020603050405020304" pitchFamily="18" charset="0"/>
+            </a:endParaRPr>
+          </a:p>
+          <a:p>
+            <a:pPr algn="l"/>
+            <a:endParaRPr lang="en-US" sz="2000" dirty="0">
+              <a:latin typeface="Times New Roman" panose="02020603050405020304" pitchFamily="18" charset="0"/>
+              <a:cs typeface="Times New Roman" panose="02020603050405020304" pitchFamily="18" charset="0"/>
+            </a:endParaRPr>
+          </a:p>
+          <a:p>
+            <a:pPr algn="l"/>
+            <a:r>
+              <a:rPr lang="en-US" sz="2000" dirty="0">
+                <a:latin typeface="Times New Roman" panose="02020603050405020304" pitchFamily="18" charset="0"/>
+                <a:cs typeface="Times New Roman" panose="02020603050405020304" pitchFamily="18" charset="0"/>
+              </a:rPr>
+              <a:t>Advanced architecture:</a:t>
+            </a:r>
+          </a:p>
+          <a:p>
+            <a:pPr algn="l"/>
+            <a:r>
+              <a:rPr lang="en-US" sz="2000" dirty="0">
+                <a:latin typeface="Times New Roman" panose="02020603050405020304" pitchFamily="18" charset="0"/>
+                <a:cs typeface="Times New Roman" panose="02020603050405020304" pitchFamily="18" charset="0"/>
+              </a:rPr>
+              <a:t>• </a:t>
+            </a:r>
+            <a:r>
+              <a:rPr lang="en-US" sz="2000" dirty="0" err="1">
+                <a:latin typeface="Times New Roman" panose="02020603050405020304" pitchFamily="18" charset="0"/>
+                <a:cs typeface="Times New Roman" panose="02020603050405020304" pitchFamily="18" charset="0"/>
+              </a:rPr>
+              <a:t>TransNeXt</a:t>
+            </a:r>
+            <a:r>
+              <a:rPr lang="en-US" sz="2000" dirty="0">
+                <a:latin typeface="Times New Roman" panose="02020603050405020304" pitchFamily="18" charset="0"/>
+                <a:cs typeface="Times New Roman" panose="02020603050405020304" pitchFamily="18" charset="0"/>
+              </a:rPr>
+              <a:t> (Vision Transformer based)</a:t>
+            </a:r>
+          </a:p>
+          <a:p>
+            <a:pPr algn="l"/>
+            <a:endParaRPr lang="en-US" sz="2000" dirty="0">
+              <a:latin typeface="Times New Roman" panose="02020603050405020304" pitchFamily="18" charset="0"/>
+              <a:cs typeface="Times New Roman" panose="02020603050405020304" pitchFamily="18" charset="0"/>
+            </a:endParaRPr>
+          </a:p>
+          <a:p>
+            <a:pPr algn="l"/>
+            <a:r>
+              <a:rPr lang="en-US" sz="2000" dirty="0">
+                <a:latin typeface="Times New Roman" panose="02020603050405020304" pitchFamily="18" charset="0"/>
+                <a:cs typeface="Times New Roman" panose="02020603050405020304" pitchFamily="18" charset="0"/>
+              </a:rPr>
+              <a:t>All models use ImageNet pretrained weights</a:t>
+            </a:r>
+            <a:endParaRPr lang="he-IL" sz="2000" dirty="0">
+              <a:latin typeface="Times New Roman" panose="02020603050405020304" pitchFamily="18" charset="0"/>
+              <a:cs typeface="Times New Roman" panose="02020603050405020304" pitchFamily="18" charset="0"/>
+            </a:endParaRPr>
+          </a:p>
+        </p:txBody>
+      </p:sp>
+      <p:sp>
+        <p:nvSpPr>
+          <p:cNvPr id="10" name="כותרת משנה 6">
+            <a:extLst>
+              <a:ext uri="{FF2B5EF4-FFF2-40B4-BE49-F238E27FC236}">
+                <a16:creationId xmlns:a16="http://schemas.microsoft.com/office/drawing/2014/main" id="{4DB7B054-0311-15AD-3326-C794484F2D48}"/>
+              </a:ext>
+            </a:extLst>
+          </p:cNvPr>
+          <p:cNvSpPr txBox="1">
+            <a:spLocks/>
+          </p:cNvSpPr>
+          <p:nvPr/>
+        </p:nvSpPr>
+        <p:spPr>
+          <a:xfrm>
+            <a:off x="6504432" y="1837944"/>
+            <a:ext cx="3745992" cy="1380744"/>
+          </a:xfrm>
+          <a:prstGeom prst="rect">
+            <a:avLst/>
+          </a:prstGeom>
+        </p:spPr>
+        <p:txBody>
+          <a:bodyPr vert="horz" lIns="91440" tIns="45720" rIns="91440" bIns="45720" rtlCol="1">
+            <a:normAutofit/>
+          </a:bodyPr>
+          <a:lstStyle>
+            <a:lvl1pPr marL="0" indent="0" algn="ctr" defTabSz="914400" rtl="1" eaLnBrk="1" latinLnBrk="0" hangingPunct="1">
+              <a:lnSpc>
+                <a:spcPct val="90000"/>
+              </a:lnSpc>
+              <a:spcBef>
+                <a:spcPts val="1000"/>
+              </a:spcBef>
+              <a:buFont typeface="Arial" panose="020B0604020202020204" pitchFamily="34" charset="0"/>
+              <a:buNone/>
+              <a:defRPr sz="2400" kern="1200">
+                <a:solidFill>
+                  <a:schemeClr val="tx1"/>
+                </a:solidFill>
+                <a:latin typeface="+mn-lt"/>
+                <a:ea typeface="+mn-ea"/>
+                <a:cs typeface="+mn-cs"/>
+              </a:defRPr>
+            </a:lvl1pPr>
+            <a:lvl2pPr marL="457200" indent="0" algn="ctr" defTabSz="914400" rtl="1" eaLnBrk="1" latinLnBrk="0" hangingPunct="1">
+              <a:lnSpc>
+                <a:spcPct val="90000"/>
+              </a:lnSpc>
+              <a:spcBef>
+                <a:spcPts val="500"/>
+              </a:spcBef>
+              <a:buFont typeface="Arial" panose="020B0604020202020204" pitchFamily="34" charset="0"/>
+              <a:buNone/>
+              <a:defRPr sz="2000" kern="1200">
+                <a:solidFill>
+                  <a:schemeClr val="tx1"/>
+                </a:solidFill>
+                <a:latin typeface="+mn-lt"/>
+                <a:ea typeface="+mn-ea"/>
+                <a:cs typeface="+mn-cs"/>
+              </a:defRPr>
+            </a:lvl2pPr>
+            <a:lvl3pPr marL="914400" indent="0" algn="ctr" defTabSz="914400" rtl="1" eaLnBrk="1" latinLnBrk="0" hangingPunct="1">
+              <a:lnSpc>
+                <a:spcPct val="90000"/>
+              </a:lnSpc>
+              <a:spcBef>
+                <a:spcPts val="500"/>
+              </a:spcBef>
+              <a:buFont typeface="Arial" panose="020B0604020202020204" pitchFamily="34" charset="0"/>
+              <a:buNone/>
+              <a:defRPr sz="1800" kern="1200">
+                <a:solidFill>
+                  <a:schemeClr val="tx1"/>
+                </a:solidFill>
+                <a:latin typeface="+mn-lt"/>
+                <a:ea typeface="+mn-ea"/>
+                <a:cs typeface="+mn-cs"/>
+              </a:defRPr>
+            </a:lvl3pPr>
+            <a:lvl4pPr marL="1371600" indent="0" algn="ctr" defTabSz="914400" rtl="1" eaLnBrk="1" latinLnBrk="0" hangingPunct="1">
+              <a:lnSpc>
+                <a:spcPct val="90000"/>
+              </a:lnSpc>
+              <a:spcBef>
+                <a:spcPts val="500"/>
+              </a:spcBef>
+              <a:buFont typeface="Arial" panose="020B0604020202020204" pitchFamily="34" charset="0"/>
+              <a:buNone/>
+              <a:defRPr sz="1600" kern="1200">
+                <a:solidFill>
+                  <a:schemeClr val="tx1"/>
+                </a:solidFill>
+                <a:latin typeface="+mn-lt"/>
+                <a:ea typeface="+mn-ea"/>
+                <a:cs typeface="+mn-cs"/>
+              </a:defRPr>
+            </a:lvl4pPr>
+            <a:lvl5pPr marL="1828800" indent="0" algn="ctr" defTabSz="914400" rtl="1" eaLnBrk="1" latinLnBrk="0" hangingPunct="1">
+              <a:lnSpc>
+                <a:spcPct val="90000"/>
+              </a:lnSpc>
+              <a:spcBef>
+                <a:spcPts val="500"/>
+              </a:spcBef>
+              <a:buFont typeface="Arial" panose="020B0604020202020204" pitchFamily="34" charset="0"/>
+              <a:buNone/>
+              <a:defRPr sz="1600" kern="1200">
+                <a:solidFill>
+                  <a:schemeClr val="tx1"/>
+                </a:solidFill>
+                <a:latin typeface="+mn-lt"/>
+                <a:ea typeface="+mn-ea"/>
+                <a:cs typeface="+mn-cs"/>
+              </a:defRPr>
+            </a:lvl5pPr>
+            <a:lvl6pPr marL="2286000" indent="0" algn="ctr" defTabSz="914400" rtl="1" eaLnBrk="1" latinLnBrk="0" hangingPunct="1">
+              <a:lnSpc>
+                <a:spcPct val="90000"/>
+              </a:lnSpc>
+              <a:spcBef>
+                <a:spcPts val="500"/>
+              </a:spcBef>
+              <a:buFont typeface="Arial" panose="020B0604020202020204" pitchFamily="34" charset="0"/>
+              <a:buNone/>
+              <a:defRPr sz="1600" kern="1200">
+                <a:solidFill>
+                  <a:schemeClr val="tx1"/>
+                </a:solidFill>
+                <a:latin typeface="+mn-lt"/>
+                <a:ea typeface="+mn-ea"/>
+                <a:cs typeface="+mn-cs"/>
+              </a:defRPr>
+            </a:lvl6pPr>
+            <a:lvl7pPr marL="2743200" indent="0" algn="ctr" defTabSz="914400" rtl="1" eaLnBrk="1" latinLnBrk="0" hangingPunct="1">
+              <a:lnSpc>
+                <a:spcPct val="90000"/>
+              </a:lnSpc>
+              <a:spcBef>
+                <a:spcPts val="500"/>
+              </a:spcBef>
+              <a:buFont typeface="Arial" panose="020B0604020202020204" pitchFamily="34" charset="0"/>
+              <a:buNone/>
+              <a:defRPr sz="1600" kern="1200">
+                <a:solidFill>
+                  <a:schemeClr val="tx1"/>
+                </a:solidFill>
+                <a:latin typeface="+mn-lt"/>
+                <a:ea typeface="+mn-ea"/>
+                <a:cs typeface="+mn-cs"/>
+              </a:defRPr>
+            </a:lvl7pPr>
+            <a:lvl8pPr marL="3200400" indent="0" algn="ctr" defTabSz="914400" rtl="1" eaLnBrk="1" latinLnBrk="0" hangingPunct="1">
+              <a:lnSpc>
+                <a:spcPct val="90000"/>
+              </a:lnSpc>
+              <a:spcBef>
+                <a:spcPts val="500"/>
+              </a:spcBef>
+              <a:buFont typeface="Arial" panose="020B0604020202020204" pitchFamily="34" charset="0"/>
+              <a:buNone/>
+              <a:defRPr sz="1600" kern="1200">
+                <a:solidFill>
+                  <a:schemeClr val="tx1"/>
+                </a:solidFill>
+                <a:latin typeface="+mn-lt"/>
+                <a:ea typeface="+mn-ea"/>
+                <a:cs typeface="+mn-cs"/>
+              </a:defRPr>
+            </a:lvl8pPr>
+            <a:lvl9pPr marL="3657600" indent="0" algn="ctr" defTabSz="914400" rtl="1" eaLnBrk="1" latinLnBrk="0" hangingPunct="1">
+              <a:lnSpc>
+                <a:spcPct val="90000"/>
+              </a:lnSpc>
+              <a:spcBef>
+                <a:spcPts val="500"/>
+              </a:spcBef>
+              <a:buFont typeface="Arial" panose="020B0604020202020204" pitchFamily="34" charset="0"/>
+              <a:buNone/>
+              <a:defRPr sz="1600" kern="1200">
+                <a:solidFill>
+                  <a:schemeClr val="tx1"/>
+                </a:solidFill>
+                <a:latin typeface="+mn-lt"/>
+                <a:ea typeface="+mn-ea"/>
+                <a:cs typeface="+mn-cs"/>
+              </a:defRPr>
+            </a:lvl9pPr>
+          </a:lstStyle>
+          <a:p>
+            <a:pPr lvl="0" algn="l" rtl="0" eaLnBrk="0" fontAlgn="base" hangingPunct="0">
+              <a:lnSpc>
+                <a:spcPct val="100000"/>
+              </a:lnSpc>
+              <a:spcBef>
+                <a:spcPct val="0"/>
+              </a:spcBef>
+              <a:spcAft>
+                <a:spcPct val="0"/>
+              </a:spcAft>
+              <a:buFontTx/>
+              <a:buChar char="•"/>
+            </a:pPr>
+            <a:r>
+              <a:rPr lang="he-IL" altLang="he-IL" sz="2000" dirty="0" err="1">
+                <a:solidFill>
+                  <a:srgbClr val="C00000"/>
+                </a:solidFill>
+                <a:latin typeface="Arial" panose="020B0604020202020204" pitchFamily="34" charset="0"/>
+              </a:rPr>
+              <a:t>ResNet</a:t>
+            </a:r>
+            <a:r>
+              <a:rPr lang="he-IL" altLang="he-IL" sz="2000" dirty="0">
+                <a:solidFill>
+                  <a:srgbClr val="C00000"/>
+                </a:solidFill>
+                <a:latin typeface="Arial" panose="020B0604020202020204" pitchFamily="34" charset="0"/>
+              </a:rPr>
+              <a:t> </a:t>
+            </a:r>
+            <a:r>
+              <a:rPr lang="he-IL" altLang="he-IL" sz="2000" dirty="0" err="1">
+                <a:solidFill>
+                  <a:srgbClr val="C00000"/>
+                </a:solidFill>
+                <a:latin typeface="Arial" panose="020B0604020202020204" pitchFamily="34" charset="0"/>
+              </a:rPr>
+              <a:t>block</a:t>
+            </a:r>
+            <a:endParaRPr lang="he-IL" altLang="he-IL" sz="2000" dirty="0">
+              <a:solidFill>
+                <a:srgbClr val="C00000"/>
+              </a:solidFill>
+              <a:latin typeface="Arial" panose="020B0604020202020204" pitchFamily="34" charset="0"/>
+            </a:endParaRPr>
+          </a:p>
+          <a:p>
+            <a:pPr lvl="0" algn="l" rtl="0" eaLnBrk="0" fontAlgn="base" hangingPunct="0">
+              <a:lnSpc>
+                <a:spcPct val="100000"/>
+              </a:lnSpc>
+              <a:spcBef>
+                <a:spcPct val="0"/>
+              </a:spcBef>
+              <a:spcAft>
+                <a:spcPct val="0"/>
+              </a:spcAft>
+              <a:buFontTx/>
+              <a:buChar char="•"/>
+            </a:pPr>
+            <a:r>
+              <a:rPr lang="he-IL" altLang="he-IL" sz="2000" dirty="0" err="1">
+                <a:solidFill>
+                  <a:srgbClr val="C00000"/>
+                </a:solidFill>
+                <a:latin typeface="Arial" panose="020B0604020202020204" pitchFamily="34" charset="0"/>
+              </a:rPr>
+              <a:t>DenseNet</a:t>
+            </a:r>
+            <a:r>
+              <a:rPr lang="he-IL" altLang="he-IL" sz="2000" dirty="0">
+                <a:solidFill>
+                  <a:srgbClr val="C00000"/>
+                </a:solidFill>
+                <a:latin typeface="Arial" panose="020B0604020202020204" pitchFamily="34" charset="0"/>
+              </a:rPr>
+              <a:t> </a:t>
+            </a:r>
+            <a:r>
+              <a:rPr lang="he-IL" altLang="he-IL" sz="2000" dirty="0" err="1">
+                <a:solidFill>
+                  <a:srgbClr val="C00000"/>
+                </a:solidFill>
+                <a:latin typeface="Arial" panose="020B0604020202020204" pitchFamily="34" charset="0"/>
+              </a:rPr>
+              <a:t>connections</a:t>
+            </a:r>
+            <a:endParaRPr lang="he-IL" altLang="he-IL" sz="2000" dirty="0">
+              <a:solidFill>
+                <a:srgbClr val="C00000"/>
+              </a:solidFill>
+              <a:latin typeface="Arial" panose="020B0604020202020204" pitchFamily="34" charset="0"/>
+            </a:endParaRPr>
+          </a:p>
+          <a:p>
+            <a:pPr lvl="0" algn="l" rtl="0" eaLnBrk="0" fontAlgn="base" hangingPunct="0">
+              <a:lnSpc>
+                <a:spcPct val="100000"/>
+              </a:lnSpc>
+              <a:spcBef>
+                <a:spcPct val="0"/>
+              </a:spcBef>
+              <a:spcAft>
+                <a:spcPct val="0"/>
+              </a:spcAft>
+              <a:buFontTx/>
+              <a:buChar char="•"/>
+            </a:pPr>
+            <a:r>
+              <a:rPr lang="he-IL" altLang="he-IL" sz="2000" dirty="0" err="1">
+                <a:solidFill>
+                  <a:srgbClr val="C00000"/>
+                </a:solidFill>
+                <a:latin typeface="Arial" panose="020B0604020202020204" pitchFamily="34" charset="0"/>
+              </a:rPr>
+              <a:t>Transformer</a:t>
+            </a:r>
+            <a:r>
+              <a:rPr lang="he-IL" altLang="he-IL" sz="2000" dirty="0">
+                <a:solidFill>
+                  <a:srgbClr val="C00000"/>
+                </a:solidFill>
+                <a:latin typeface="Arial" panose="020B0604020202020204" pitchFamily="34" charset="0"/>
+              </a:rPr>
+              <a:t> </a:t>
+            </a:r>
+            <a:r>
+              <a:rPr lang="he-IL" altLang="he-IL" sz="2000" dirty="0" err="1">
+                <a:solidFill>
+                  <a:srgbClr val="C00000"/>
+                </a:solidFill>
+                <a:latin typeface="Arial" panose="020B0604020202020204" pitchFamily="34" charset="0"/>
+              </a:rPr>
+              <a:t>attention</a:t>
+            </a:r>
+            <a:br>
+              <a:rPr lang="en-US" altLang="he-IL" sz="2000" dirty="0">
+                <a:solidFill>
+                  <a:srgbClr val="C00000"/>
+                </a:solidFill>
+                <a:latin typeface="Arial" panose="020B0604020202020204" pitchFamily="34" charset="0"/>
+              </a:rPr>
+            </a:br>
+            <a:endParaRPr lang="he-IL" altLang="he-IL" sz="2000" dirty="0">
+              <a:solidFill>
+                <a:srgbClr val="C00000"/>
+              </a:solidFill>
+              <a:latin typeface="Arial" panose="020B0604020202020204" pitchFamily="34" charset="0"/>
+            </a:endParaRPr>
+          </a:p>
+        </p:txBody>
+      </p:sp>
+      <p:sp>
+        <p:nvSpPr>
+          <p:cNvPr id="13" name="כותרת משנה 6">
+            <a:extLst>
+              <a:ext uri="{FF2B5EF4-FFF2-40B4-BE49-F238E27FC236}">
+                <a16:creationId xmlns:a16="http://schemas.microsoft.com/office/drawing/2014/main" id="{73D11DB0-E8E1-CF1C-250A-390E7FFE2B53}"/>
+              </a:ext>
+            </a:extLst>
+          </p:cNvPr>
+          <p:cNvSpPr txBox="1">
+            <a:spLocks/>
+          </p:cNvSpPr>
+          <p:nvPr/>
+        </p:nvSpPr>
+        <p:spPr>
+          <a:xfrm>
+            <a:off x="7062216" y="5800344"/>
+            <a:ext cx="4418838" cy="637032"/>
+          </a:xfrm>
+          <a:prstGeom prst="rect">
+            <a:avLst/>
+          </a:prstGeom>
+        </p:spPr>
+        <p:txBody>
+          <a:bodyPr vert="horz" lIns="91440" tIns="45720" rIns="91440" bIns="45720" rtlCol="1">
+            <a:normAutofit/>
+          </a:bodyPr>
+          <a:lstStyle>
+            <a:lvl1pPr marL="0" indent="0" algn="ctr" defTabSz="914400" rtl="1" eaLnBrk="1" latinLnBrk="0" hangingPunct="1">
+              <a:lnSpc>
+                <a:spcPct val="90000"/>
+              </a:lnSpc>
+              <a:spcBef>
+                <a:spcPts val="1000"/>
+              </a:spcBef>
+              <a:buFont typeface="Arial" panose="020B0604020202020204" pitchFamily="34" charset="0"/>
+              <a:buNone/>
+              <a:defRPr sz="2400" kern="1200">
+                <a:solidFill>
+                  <a:schemeClr val="tx1"/>
+                </a:solidFill>
+                <a:latin typeface="+mn-lt"/>
+                <a:ea typeface="+mn-ea"/>
+                <a:cs typeface="+mn-cs"/>
+              </a:defRPr>
+            </a:lvl1pPr>
+            <a:lvl2pPr marL="457200" indent="0" algn="ctr" defTabSz="914400" rtl="1" eaLnBrk="1" latinLnBrk="0" hangingPunct="1">
+              <a:lnSpc>
+                <a:spcPct val="90000"/>
+              </a:lnSpc>
+              <a:spcBef>
+                <a:spcPts val="500"/>
+              </a:spcBef>
+              <a:buFont typeface="Arial" panose="020B0604020202020204" pitchFamily="34" charset="0"/>
+              <a:buNone/>
+              <a:defRPr sz="2000" kern="1200">
+                <a:solidFill>
+                  <a:schemeClr val="tx1"/>
+                </a:solidFill>
+                <a:latin typeface="+mn-lt"/>
+                <a:ea typeface="+mn-ea"/>
+                <a:cs typeface="+mn-cs"/>
+              </a:defRPr>
+            </a:lvl2pPr>
+            <a:lvl3pPr marL="914400" indent="0" algn="ctr" defTabSz="914400" rtl="1" eaLnBrk="1" latinLnBrk="0" hangingPunct="1">
+              <a:lnSpc>
+                <a:spcPct val="90000"/>
+              </a:lnSpc>
+              <a:spcBef>
+                <a:spcPts val="500"/>
+              </a:spcBef>
+              <a:buFont typeface="Arial" panose="020B0604020202020204" pitchFamily="34" charset="0"/>
+              <a:buNone/>
+              <a:defRPr sz="1800" kern="1200">
+                <a:solidFill>
+                  <a:schemeClr val="tx1"/>
+                </a:solidFill>
+                <a:latin typeface="+mn-lt"/>
+                <a:ea typeface="+mn-ea"/>
+                <a:cs typeface="+mn-cs"/>
+              </a:defRPr>
+            </a:lvl3pPr>
+            <a:lvl4pPr marL="1371600" indent="0" algn="ctr" defTabSz="914400" rtl="1" eaLnBrk="1" latinLnBrk="0" hangingPunct="1">
+              <a:lnSpc>
+                <a:spcPct val="90000"/>
+              </a:lnSpc>
+              <a:spcBef>
+                <a:spcPts val="500"/>
+              </a:spcBef>
+              <a:buFont typeface="Arial" panose="020B0604020202020204" pitchFamily="34" charset="0"/>
+              <a:buNone/>
+              <a:defRPr sz="1600" kern="1200">
+                <a:solidFill>
+                  <a:schemeClr val="tx1"/>
+                </a:solidFill>
+                <a:latin typeface="+mn-lt"/>
+                <a:ea typeface="+mn-ea"/>
+                <a:cs typeface="+mn-cs"/>
+              </a:defRPr>
+            </a:lvl4pPr>
+            <a:lvl5pPr marL="1828800" indent="0" algn="ctr" defTabSz="914400" rtl="1" eaLnBrk="1" latinLnBrk="0" hangingPunct="1">
+              <a:lnSpc>
+                <a:spcPct val="90000"/>
+              </a:lnSpc>
+              <a:spcBef>
+                <a:spcPts val="500"/>
+              </a:spcBef>
+              <a:buFont typeface="Arial" panose="020B0604020202020204" pitchFamily="34" charset="0"/>
+              <a:buNone/>
+              <a:defRPr sz="1600" kern="1200">
+                <a:solidFill>
+                  <a:schemeClr val="tx1"/>
+                </a:solidFill>
+                <a:latin typeface="+mn-lt"/>
+                <a:ea typeface="+mn-ea"/>
+                <a:cs typeface="+mn-cs"/>
+              </a:defRPr>
+            </a:lvl5pPr>
+            <a:lvl6pPr marL="2286000" indent="0" algn="ctr" defTabSz="914400" rtl="1" eaLnBrk="1" latinLnBrk="0" hangingPunct="1">
+              <a:lnSpc>
+                <a:spcPct val="90000"/>
+              </a:lnSpc>
+              <a:spcBef>
+                <a:spcPts val="500"/>
+              </a:spcBef>
+              <a:buFont typeface="Arial" panose="020B0604020202020204" pitchFamily="34" charset="0"/>
+              <a:buNone/>
+              <a:defRPr sz="1600" kern="1200">
+                <a:solidFill>
+                  <a:schemeClr val="tx1"/>
+                </a:solidFill>
+                <a:latin typeface="+mn-lt"/>
+                <a:ea typeface="+mn-ea"/>
+                <a:cs typeface="+mn-cs"/>
+              </a:defRPr>
+            </a:lvl6pPr>
+            <a:lvl7pPr marL="2743200" indent="0" algn="ctr" defTabSz="914400" rtl="1" eaLnBrk="1" latinLnBrk="0" hangingPunct="1">
+              <a:lnSpc>
+                <a:spcPct val="90000"/>
+              </a:lnSpc>
+              <a:spcBef>
+                <a:spcPts val="500"/>
+              </a:spcBef>
+              <a:buFont typeface="Arial" panose="020B0604020202020204" pitchFamily="34" charset="0"/>
+              <a:buNone/>
+              <a:defRPr sz="1600" kern="1200">
+                <a:solidFill>
+                  <a:schemeClr val="tx1"/>
+                </a:solidFill>
+                <a:latin typeface="+mn-lt"/>
+                <a:ea typeface="+mn-ea"/>
+                <a:cs typeface="+mn-cs"/>
+              </a:defRPr>
+            </a:lvl7pPr>
+            <a:lvl8pPr marL="3200400" indent="0" algn="ctr" defTabSz="914400" rtl="1" eaLnBrk="1" latinLnBrk="0" hangingPunct="1">
+              <a:lnSpc>
+                <a:spcPct val="90000"/>
+              </a:lnSpc>
+              <a:spcBef>
+                <a:spcPts val="500"/>
+              </a:spcBef>
+              <a:buFont typeface="Arial" panose="020B0604020202020204" pitchFamily="34" charset="0"/>
+              <a:buNone/>
+              <a:defRPr sz="1600" kern="1200">
+                <a:solidFill>
+                  <a:schemeClr val="tx1"/>
+                </a:solidFill>
+                <a:latin typeface="+mn-lt"/>
+                <a:ea typeface="+mn-ea"/>
+                <a:cs typeface="+mn-cs"/>
+              </a:defRPr>
+            </a:lvl8pPr>
+            <a:lvl9pPr marL="3657600" indent="0" algn="ctr" defTabSz="914400" rtl="1" eaLnBrk="1" latinLnBrk="0" hangingPunct="1">
+              <a:lnSpc>
+                <a:spcPct val="90000"/>
+              </a:lnSpc>
+              <a:spcBef>
+                <a:spcPts val="500"/>
+              </a:spcBef>
+              <a:buFont typeface="Arial" panose="020B0604020202020204" pitchFamily="34" charset="0"/>
+              <a:buNone/>
+              <a:defRPr sz="1600" kern="1200">
+                <a:solidFill>
+                  <a:schemeClr val="tx1"/>
+                </a:solidFill>
+                <a:latin typeface="+mn-lt"/>
+                <a:ea typeface="+mn-ea"/>
+                <a:cs typeface="+mn-cs"/>
+              </a:defRPr>
+            </a:lvl9pPr>
+          </a:lstStyle>
+          <a:p>
+            <a:pPr lvl="0" algn="l" rtl="0" eaLnBrk="0" fontAlgn="base" hangingPunct="0">
+              <a:lnSpc>
+                <a:spcPct val="100000"/>
+              </a:lnSpc>
+              <a:spcBef>
+                <a:spcPct val="0"/>
+              </a:spcBef>
+              <a:spcAft>
+                <a:spcPct val="0"/>
+              </a:spcAft>
+            </a:pPr>
+            <a:r>
+              <a:rPr lang="en-US" altLang="he-IL" sz="2000" dirty="0">
+                <a:latin typeface="Times New Roman" panose="02020603050405020304" pitchFamily="18" charset="0"/>
+                <a:cs typeface="Times New Roman" panose="02020603050405020304" pitchFamily="18" charset="0"/>
+              </a:rPr>
+              <a:t>Training framework: </a:t>
+            </a:r>
+            <a:r>
+              <a:rPr lang="en-US" altLang="he-IL" sz="2000" dirty="0" err="1">
+                <a:latin typeface="Times New Roman" panose="02020603050405020304" pitchFamily="18" charset="0"/>
+                <a:cs typeface="Times New Roman" panose="02020603050405020304" pitchFamily="18" charset="0"/>
+              </a:rPr>
+              <a:t>PyTorch</a:t>
+            </a:r>
+            <a:endParaRPr lang="he-IL" altLang="he-IL" sz="2000" dirty="0">
+              <a:latin typeface="Times New Roman" panose="02020603050405020304" pitchFamily="18" charset="0"/>
+              <a:cs typeface="Times New Roman" panose="02020603050405020304" pitchFamily="18" charset="0"/>
+            </a:endParaRPr>
+          </a:p>
+        </p:txBody>
+      </p:sp>
+    </p:spTree>
+    <p:extLst>
+      <p:ext uri="{BB962C8B-B14F-4D97-AF65-F5344CB8AC3E}">
+        <p14:creationId xmlns:p14="http://schemas.microsoft.com/office/powerpoint/2010/main" val="1886319495"/>
+      </p:ext>
+    </p:extLst>
+  </p:cSld>
+  <p:clrMapOvr>
+    <a:masterClrMapping/>
+  </p:clrMapOvr>
+</p:sld>
+</file>
+
+<file path=ppt/slides/slide9.xml><?xml version="1.0" encoding="utf-8"?>
+<p:sld xmlns:a="http://schemas.openxmlformats.org/drawingml/2006/main" xmlns:r="http://schemas.openxmlformats.org/officeDocument/2006/relationships" xmlns:p="http://schemas.openxmlformats.org/presentationml/2006/main">
+  <p:cSld>
+    <p:spTree>
+      <p:nvGrpSpPr>
+        <p:cNvPr id="1" name="">
+          <a:extLst>
+            <a:ext uri="{FF2B5EF4-FFF2-40B4-BE49-F238E27FC236}">
+              <a16:creationId xmlns:a16="http://schemas.microsoft.com/office/drawing/2014/main" id="{E2BBE8DE-0DDA-9FEB-32CE-EDF8D34424D8}"/>
+            </a:ext>
+          </a:extLst>
+        </p:cNvPr>
+        <p:cNvGrpSpPr/>
+        <p:nvPr/>
+      </p:nvGrpSpPr>
+      <p:grpSpPr>
+        <a:xfrm>
+          <a:off x="0" y="0"/>
+          <a:ext cx="0" cy="0"/>
+          <a:chOff x="0" y="0"/>
+          <a:chExt cx="0" cy="0"/>
+        </a:xfrm>
+      </p:grpSpPr>
+      <p:sp>
+        <p:nvSpPr>
+          <p:cNvPr id="7" name="כותרת משנה 6">
+            <a:extLst>
+              <a:ext uri="{FF2B5EF4-FFF2-40B4-BE49-F238E27FC236}">
+                <a16:creationId xmlns:a16="http://schemas.microsoft.com/office/drawing/2014/main" id="{69D24C73-0253-CADC-2AA4-9762B5198421}"/>
+              </a:ext>
+            </a:extLst>
+          </p:cNvPr>
+          <p:cNvSpPr>
+            <a:spLocks noGrp="1"/>
+          </p:cNvSpPr>
+          <p:nvPr>
+            <p:ph type="subTitle" idx="1"/>
+          </p:nvPr>
+        </p:nvSpPr>
+        <p:spPr>
+          <a:xfrm>
+            <a:off x="1706880" y="658368"/>
+            <a:ext cx="9144000" cy="978408"/>
+          </a:xfrm>
+        </p:spPr>
+        <p:txBody>
+          <a:bodyPr/>
+          <a:lstStyle/>
+          <a:p>
+            <a:r>
+              <a:rPr lang="en-US" b="1" dirty="0">
+                <a:latin typeface="Times New Roman" panose="02020603050405020304" pitchFamily="18" charset="0"/>
+                <a:cs typeface="Times New Roman" panose="02020603050405020304" pitchFamily="18" charset="0"/>
+              </a:rPr>
+              <a:t>Experimental Setup</a:t>
+            </a:r>
+            <a:endParaRPr lang="he-IL" b="1" dirty="0">
+              <a:latin typeface="Times New Roman" panose="02020603050405020304" pitchFamily="18" charset="0"/>
+              <a:cs typeface="Times New Roman" panose="02020603050405020304" pitchFamily="18" charset="0"/>
+            </a:endParaRPr>
+          </a:p>
+        </p:txBody>
+      </p:sp>
+      <p:sp>
+        <p:nvSpPr>
+          <p:cNvPr id="11" name="כותרת משנה 6">
+            <a:extLst>
+              <a:ext uri="{FF2B5EF4-FFF2-40B4-BE49-F238E27FC236}">
+                <a16:creationId xmlns:a16="http://schemas.microsoft.com/office/drawing/2014/main" id="{CA7BC624-590D-9A84-4F31-ADD1190AA6E5}"/>
+              </a:ext>
+            </a:extLst>
+          </p:cNvPr>
+          <p:cNvSpPr txBox="1">
+            <a:spLocks/>
+          </p:cNvSpPr>
+          <p:nvPr/>
+        </p:nvSpPr>
+        <p:spPr>
+          <a:xfrm>
+            <a:off x="1706880" y="1472184"/>
+            <a:ext cx="9211056" cy="4663440"/>
+          </a:xfrm>
+          <a:prstGeom prst="rect">
+            <a:avLst/>
+          </a:prstGeom>
+        </p:spPr>
+        <p:txBody>
+          <a:bodyPr vert="horz" lIns="91440" tIns="45720" rIns="91440" bIns="45720" rtlCol="1">
+            <a:normAutofit fontScale="92500" lnSpcReduction="10000"/>
+          </a:bodyPr>
+          <a:lstStyle>
+            <a:lvl1pPr marL="0" indent="0" algn="ctr" defTabSz="914400" rtl="1" eaLnBrk="1" latinLnBrk="0" hangingPunct="1">
+              <a:lnSpc>
+                <a:spcPct val="90000"/>
+              </a:lnSpc>
+              <a:spcBef>
+                <a:spcPts val="1000"/>
+              </a:spcBef>
+              <a:buFont typeface="Arial" panose="020B0604020202020204" pitchFamily="34" charset="0"/>
+              <a:buNone/>
+              <a:defRPr sz="2400" kern="1200">
+                <a:solidFill>
+                  <a:schemeClr val="tx1"/>
+                </a:solidFill>
+                <a:latin typeface="+mn-lt"/>
+                <a:ea typeface="+mn-ea"/>
+                <a:cs typeface="+mn-cs"/>
+              </a:defRPr>
+            </a:lvl1pPr>
+            <a:lvl2pPr marL="457200" indent="0" algn="ctr" defTabSz="914400" rtl="1" eaLnBrk="1" latinLnBrk="0" hangingPunct="1">
+              <a:lnSpc>
+                <a:spcPct val="90000"/>
+              </a:lnSpc>
+              <a:spcBef>
+                <a:spcPts val="500"/>
+              </a:spcBef>
+              <a:buFont typeface="Arial" panose="020B0604020202020204" pitchFamily="34" charset="0"/>
+              <a:buNone/>
+              <a:defRPr sz="2000" kern="1200">
+                <a:solidFill>
+                  <a:schemeClr val="tx1"/>
+                </a:solidFill>
+                <a:latin typeface="+mn-lt"/>
+                <a:ea typeface="+mn-ea"/>
+                <a:cs typeface="+mn-cs"/>
+              </a:defRPr>
+            </a:lvl2pPr>
+            <a:lvl3pPr marL="914400" indent="0" algn="ctr" defTabSz="914400" rtl="1" eaLnBrk="1" latinLnBrk="0" hangingPunct="1">
+              <a:lnSpc>
+                <a:spcPct val="90000"/>
+              </a:lnSpc>
+              <a:spcBef>
+                <a:spcPts val="500"/>
+              </a:spcBef>
+              <a:buFont typeface="Arial" panose="020B0604020202020204" pitchFamily="34" charset="0"/>
+              <a:buNone/>
+              <a:defRPr sz="1800" kern="1200">
+                <a:solidFill>
+                  <a:schemeClr val="tx1"/>
+                </a:solidFill>
+                <a:latin typeface="+mn-lt"/>
+                <a:ea typeface="+mn-ea"/>
+                <a:cs typeface="+mn-cs"/>
+              </a:defRPr>
+            </a:lvl3pPr>
+            <a:lvl4pPr marL="1371600" indent="0" algn="ctr" defTabSz="914400" rtl="1" eaLnBrk="1" latinLnBrk="0" hangingPunct="1">
+              <a:lnSpc>
+                <a:spcPct val="90000"/>
+              </a:lnSpc>
+              <a:spcBef>
+                <a:spcPts val="500"/>
+              </a:spcBef>
+              <a:buFont typeface="Arial" panose="020B0604020202020204" pitchFamily="34" charset="0"/>
+              <a:buNone/>
+              <a:defRPr sz="1600" kern="1200">
+                <a:solidFill>
+                  <a:schemeClr val="tx1"/>
+                </a:solidFill>
+                <a:latin typeface="+mn-lt"/>
+                <a:ea typeface="+mn-ea"/>
+                <a:cs typeface="+mn-cs"/>
+              </a:defRPr>
+            </a:lvl4pPr>
+            <a:lvl5pPr marL="1828800" indent="0" algn="ctr" defTabSz="914400" rtl="1" eaLnBrk="1" latinLnBrk="0" hangingPunct="1">
+              <a:lnSpc>
+                <a:spcPct val="90000"/>
+              </a:lnSpc>
+              <a:spcBef>
+                <a:spcPts val="500"/>
+              </a:spcBef>
+              <a:buFont typeface="Arial" panose="020B0604020202020204" pitchFamily="34" charset="0"/>
+              <a:buNone/>
+              <a:defRPr sz="1600" kern="1200">
+                <a:solidFill>
+                  <a:schemeClr val="tx1"/>
+                </a:solidFill>
+                <a:latin typeface="+mn-lt"/>
+                <a:ea typeface="+mn-ea"/>
+                <a:cs typeface="+mn-cs"/>
+              </a:defRPr>
+            </a:lvl5pPr>
+            <a:lvl6pPr marL="2286000" indent="0" algn="ctr" defTabSz="914400" rtl="1" eaLnBrk="1" latinLnBrk="0" hangingPunct="1">
+              <a:lnSpc>
+                <a:spcPct val="90000"/>
+              </a:lnSpc>
+              <a:spcBef>
+                <a:spcPts val="500"/>
+              </a:spcBef>
+              <a:buFont typeface="Arial" panose="020B0604020202020204" pitchFamily="34" charset="0"/>
+              <a:buNone/>
+              <a:defRPr sz="1600" kern="1200">
+                <a:solidFill>
+                  <a:schemeClr val="tx1"/>
+                </a:solidFill>
+                <a:latin typeface="+mn-lt"/>
+                <a:ea typeface="+mn-ea"/>
+                <a:cs typeface="+mn-cs"/>
+              </a:defRPr>
+            </a:lvl6pPr>
+            <a:lvl7pPr marL="2743200" indent="0" algn="ctr" defTabSz="914400" rtl="1" eaLnBrk="1" latinLnBrk="0" hangingPunct="1">
+              <a:lnSpc>
+                <a:spcPct val="90000"/>
+              </a:lnSpc>
+              <a:spcBef>
+                <a:spcPts val="500"/>
+              </a:spcBef>
+              <a:buFont typeface="Arial" panose="020B0604020202020204" pitchFamily="34" charset="0"/>
+              <a:buNone/>
+              <a:defRPr sz="1600" kern="1200">
+                <a:solidFill>
+                  <a:schemeClr val="tx1"/>
+                </a:solidFill>
+                <a:latin typeface="+mn-lt"/>
+                <a:ea typeface="+mn-ea"/>
+                <a:cs typeface="+mn-cs"/>
+              </a:defRPr>
+            </a:lvl7pPr>
+            <a:lvl8pPr marL="3200400" indent="0" algn="ctr" defTabSz="914400" rtl="1" eaLnBrk="1" latinLnBrk="0" hangingPunct="1">
+              <a:lnSpc>
+                <a:spcPct val="90000"/>
+              </a:lnSpc>
+              <a:spcBef>
+                <a:spcPts val="500"/>
+              </a:spcBef>
+              <a:buFont typeface="Arial" panose="020B0604020202020204" pitchFamily="34" charset="0"/>
+              <a:buNone/>
+              <a:defRPr sz="1600" kern="1200">
+                <a:solidFill>
+                  <a:schemeClr val="tx1"/>
+                </a:solidFill>
+                <a:latin typeface="+mn-lt"/>
+                <a:ea typeface="+mn-ea"/>
+                <a:cs typeface="+mn-cs"/>
+              </a:defRPr>
+            </a:lvl8pPr>
+            <a:lvl9pPr marL="3657600" indent="0" algn="ctr" defTabSz="914400" rtl="1" eaLnBrk="1" latinLnBrk="0" hangingPunct="1">
+              <a:lnSpc>
+                <a:spcPct val="90000"/>
+              </a:lnSpc>
+              <a:spcBef>
+                <a:spcPts val="500"/>
+              </a:spcBef>
+              <a:buFont typeface="Arial" panose="020B0604020202020204" pitchFamily="34" charset="0"/>
+              <a:buNone/>
+              <a:defRPr sz="1600" kern="1200">
+                <a:solidFill>
+                  <a:schemeClr val="tx1"/>
+                </a:solidFill>
+                <a:latin typeface="+mn-lt"/>
+                <a:ea typeface="+mn-ea"/>
+                <a:cs typeface="+mn-cs"/>
+              </a:defRPr>
+            </a:lvl9pPr>
+          </a:lstStyle>
+          <a:p>
+            <a:pPr algn="l"/>
+            <a:r>
+              <a:rPr lang="en-US" sz="2000" dirty="0">
+                <a:latin typeface="Times New Roman" panose="02020603050405020304" pitchFamily="18" charset="0"/>
+                <a:cs typeface="Times New Roman" panose="02020603050405020304" pitchFamily="18" charset="0"/>
+              </a:rPr>
+              <a:t>Dataset: CIFAR-10</a:t>
+            </a:r>
+          </a:p>
+          <a:p>
+            <a:pPr algn="l"/>
+            <a:br>
+              <a:rPr lang="en-US" sz="2000" dirty="0">
+                <a:latin typeface="Times New Roman" panose="02020603050405020304" pitchFamily="18" charset="0"/>
+                <a:cs typeface="Times New Roman" panose="02020603050405020304" pitchFamily="18" charset="0"/>
+              </a:rPr>
+            </a:br>
+            <a:r>
+              <a:rPr lang="en-US" sz="2000" dirty="0">
+                <a:latin typeface="Times New Roman" panose="02020603050405020304" pitchFamily="18" charset="0"/>
+                <a:cs typeface="Times New Roman" panose="02020603050405020304" pitchFamily="18" charset="0"/>
+              </a:rPr>
+              <a:t>Training</a:t>
+            </a:r>
+            <a:r>
+              <a:rPr lang="en-US" sz="2000" dirty="0"/>
+              <a:t> </a:t>
+            </a:r>
+            <a:r>
+              <a:rPr lang="en-US" sz="2000" dirty="0">
+                <a:latin typeface="Times New Roman" panose="02020603050405020304" pitchFamily="18" charset="0"/>
+                <a:cs typeface="Times New Roman" panose="02020603050405020304" pitchFamily="18" charset="0"/>
+              </a:rPr>
+              <a:t>Framework: </a:t>
+            </a:r>
+            <a:r>
+              <a:rPr lang="en-US" sz="2000" dirty="0" err="1">
+                <a:latin typeface="Times New Roman" panose="02020603050405020304" pitchFamily="18" charset="0"/>
+                <a:cs typeface="Times New Roman" panose="02020603050405020304" pitchFamily="18" charset="0"/>
+              </a:rPr>
+              <a:t>PyTorch</a:t>
+            </a:r>
+            <a:endParaRPr lang="en-US" sz="2000" dirty="0">
+              <a:latin typeface="Times New Roman" panose="02020603050405020304" pitchFamily="18" charset="0"/>
+              <a:cs typeface="Times New Roman" panose="02020603050405020304" pitchFamily="18" charset="0"/>
+            </a:endParaRPr>
+          </a:p>
+          <a:p>
+            <a:pPr algn="l"/>
+            <a:br>
+              <a:rPr lang="en-US" sz="2000" dirty="0">
+                <a:latin typeface="Times New Roman" panose="02020603050405020304" pitchFamily="18" charset="0"/>
+                <a:cs typeface="Times New Roman" panose="02020603050405020304" pitchFamily="18" charset="0"/>
+              </a:rPr>
+            </a:br>
+            <a:r>
+              <a:rPr lang="en-US" sz="2000" dirty="0">
+                <a:latin typeface="Times New Roman" panose="02020603050405020304" pitchFamily="18" charset="0"/>
+                <a:cs typeface="Times New Roman" panose="02020603050405020304" pitchFamily="18" charset="0"/>
+              </a:rPr>
+              <a:t>Models initialized with ImageNet pretrained weights</a:t>
+            </a:r>
+          </a:p>
+          <a:p>
+            <a:pPr algn="l"/>
+            <a:br>
+              <a:rPr lang="en-US" sz="2000" dirty="0">
+                <a:latin typeface="Times New Roman" panose="02020603050405020304" pitchFamily="18" charset="0"/>
+                <a:cs typeface="Times New Roman" panose="02020603050405020304" pitchFamily="18" charset="0"/>
+              </a:rPr>
+            </a:br>
+            <a:r>
+              <a:rPr lang="en-US" sz="2000" dirty="0">
+                <a:latin typeface="Times New Roman" panose="02020603050405020304" pitchFamily="18" charset="0"/>
+                <a:cs typeface="Times New Roman" panose="02020603050405020304" pitchFamily="18" charset="0"/>
+              </a:rPr>
+              <a:t>Experiment parameters:</a:t>
+            </a:r>
+          </a:p>
+          <a:p>
+            <a:pPr algn="l"/>
+            <a:br>
+              <a:rPr lang="en-US" sz="2000" dirty="0">
+                <a:latin typeface="Times New Roman" panose="02020603050405020304" pitchFamily="18" charset="0"/>
+                <a:cs typeface="Times New Roman" panose="02020603050405020304" pitchFamily="18" charset="0"/>
+              </a:rPr>
+            </a:br>
+            <a:r>
+              <a:rPr lang="en-US" sz="2000" dirty="0">
+                <a:latin typeface="Times New Roman" panose="02020603050405020304" pitchFamily="18" charset="0"/>
+                <a:cs typeface="Times New Roman" panose="02020603050405020304" pitchFamily="18" charset="0"/>
+              </a:rPr>
+              <a:t>• degradation level</a:t>
+            </a:r>
+          </a:p>
+          <a:p>
+            <a:pPr algn="l"/>
+            <a:r>
+              <a:rPr lang="en-US" sz="2000" dirty="0">
+                <a:latin typeface="Times New Roman" panose="02020603050405020304" pitchFamily="18" charset="0"/>
+                <a:cs typeface="Times New Roman" panose="02020603050405020304" pitchFamily="18" charset="0"/>
+              </a:rPr>
+              <a:t>• learning rate</a:t>
+            </a:r>
+          </a:p>
+          <a:p>
+            <a:pPr algn="l"/>
+            <a:r>
+              <a:rPr lang="en-US" sz="2000" dirty="0">
+                <a:latin typeface="Times New Roman" panose="02020603050405020304" pitchFamily="18" charset="0"/>
+                <a:cs typeface="Times New Roman" panose="02020603050405020304" pitchFamily="18" charset="0"/>
+              </a:rPr>
+              <a:t>• batch size</a:t>
+            </a:r>
+          </a:p>
+          <a:p>
+            <a:pPr algn="l"/>
+            <a:r>
+              <a:rPr lang="en-US" sz="2000" dirty="0">
+                <a:latin typeface="Times New Roman" panose="02020603050405020304" pitchFamily="18" charset="0"/>
+                <a:cs typeface="Times New Roman" panose="02020603050405020304" pitchFamily="18" charset="0"/>
+              </a:rPr>
+              <a:t>• backbone freezing (linear probe)</a:t>
+            </a:r>
+            <a:br>
+              <a:rPr lang="en-US" sz="2000" dirty="0">
+                <a:latin typeface="Times New Roman" panose="02020603050405020304" pitchFamily="18" charset="0"/>
+                <a:cs typeface="Times New Roman" panose="02020603050405020304" pitchFamily="18" charset="0"/>
+              </a:rPr>
+            </a:br>
+            <a:br>
+              <a:rPr lang="en-US" sz="2000" dirty="0">
+                <a:latin typeface="Times New Roman" panose="02020603050405020304" pitchFamily="18" charset="0"/>
+                <a:cs typeface="Times New Roman" panose="02020603050405020304" pitchFamily="18" charset="0"/>
+              </a:rPr>
+            </a:br>
+            <a:r>
+              <a:rPr lang="en-US" sz="2000" dirty="0">
+                <a:latin typeface="Times New Roman" panose="02020603050405020304" pitchFamily="18" charset="0"/>
+                <a:cs typeface="Times New Roman" panose="02020603050405020304" pitchFamily="18" charset="0"/>
+              </a:rPr>
+              <a:t>Experiments are tracked and logged automatically</a:t>
+            </a:r>
+          </a:p>
+          <a:p>
+            <a:pPr algn="l"/>
+            <a:r>
+              <a:rPr lang="en-US" sz="2000" dirty="0">
+                <a:latin typeface="Times New Roman" panose="02020603050405020304" pitchFamily="18" charset="0"/>
+                <a:cs typeface="Times New Roman" panose="02020603050405020304" pitchFamily="18" charset="0"/>
+              </a:rPr>
+              <a:t>(metrics.csv, logs, checkpoints)</a:t>
+            </a:r>
+            <a:endParaRPr lang="he-IL" sz="2000" dirty="0">
+              <a:latin typeface="Times New Roman" panose="02020603050405020304" pitchFamily="18" charset="0"/>
+              <a:cs typeface="Times New Roman" panose="02020603050405020304" pitchFamily="18" charset="0"/>
+            </a:endParaRPr>
+          </a:p>
+        </p:txBody>
+      </p:sp>
+    </p:spTree>
+    <p:extLst>
+      <p:ext uri="{BB962C8B-B14F-4D97-AF65-F5344CB8AC3E}">
+        <p14:creationId xmlns:p14="http://schemas.microsoft.com/office/powerpoint/2010/main" val="3008627022"/>
       </p:ext>
     </p:extLst>
   </p:cSld>
